--- a/lessons/lesson-09/slides.pptx
+++ b/lessons/lesson-09/slides.pptx
@@ -418,7 +418,12 @@
           </a:p>
           <a:p xmlns:a="http://schemas.openxmlformats.org/drawingml/2006/main">
             <a:r>
-              <a:t>讲义位置：本课讲义；见逐页母稿映射表</a:t>
+              <a:t>讲述与校准：</a:t>
+            </a:r>
+          </a:p>
+          <a:p xmlns:a="http://schemas.openxmlformats.org/drawingml/2006/main">
+            <a:r>
+              <a:t>开场放下实验规格草图。第 7 课已建立机制假设和实验规格草案，第 8 课拿到同伴反馈，但"能跑通"和"能复现"之间还有距离。本课把草图变成可复现的判断门材料，并完成第二次正式提交——判断门。</a:t>
             </a:r>
           </a:p>
           <a:p xmlns:a="http://schemas.openxmlformats.org/drawingml/2006/main">
@@ -428,12 +433,12 @@
           </a:p>
           <a:p xmlns:a="http://schemas.openxmlformats.org/drawingml/2006/main">
             <a:r>
-              <a:t>屏显核对：</a:t>
-            </a:r>
-          </a:p>
-          <a:p xmlns:a="http://schemas.openxmlformats.org/drawingml/2006/main">
-            <a:r>
-              <a:t>第9讲 Baseline、实验规格与可复现实验工程</a:t>
+              <a:t>学生动作：</a:t>
+            </a:r>
+          </a:p>
+          <a:p xmlns:a="http://schemas.openxmlformats.org/drawingml/2006/main">
+            <a:r>
+              <a:t>不展开课程行政信息，直接进入下一页回扣。</a:t>
             </a:r>
           </a:p>
           <a:p xmlns:a="http://schemas.openxmlformats.org/drawingml/2006/main">
@@ -443,12 +448,7 @@
           </a:p>
           <a:p xmlns:a="http://schemas.openxmlformats.org/drawingml/2006/main">
             <a:r>
-              <a:t>教师讲述：</a:t>
-            </a:r>
-          </a:p>
-          <a:p xmlns:a="http://schemas.openxmlformats.org/drawingml/2006/main">
-            <a:r>
-              <a:t>开场放下实验规格草图。第 7 课已建立机制假设和实验规格草案，第 8 课拿到同伴反馈，但"能跑通"和"能复现"之间还有距离。本课把草图变成可复现的判断门材料，并完成第二次正式提交——判断门。</a:t>
+              <a:t>课堂安排：按本稿下方 90 分钟教学路由安排；此页不另占独立时段。</a:t>
             </a:r>
           </a:p>
           <a:p xmlns:a="http://schemas.openxmlformats.org/drawingml/2006/main">
@@ -458,12 +458,12 @@
           </a:p>
           <a:p xmlns:a="http://schemas.openxmlformats.org/drawingml/2006/main">
             <a:r>
-              <a:t>学生动作：</a:t>
-            </a:r>
-          </a:p>
-          <a:p xmlns:a="http://schemas.openxmlformats.org/drawingml/2006/main">
-            <a:r>
-              <a:t>不展开课程行政信息，直接进入下一页回扣。</a:t>
+              <a:t>[Sources]</a:t>
+            </a:r>
+          </a:p>
+          <a:p xmlns:a="http://schemas.openxmlformats.org/drawingml/2006/main">
+            <a:r>
+              <a:t>课程定位以 [syllabus.md](../../course/syllabus.md) 与 [备课规划.md](../备课规划.md) 第 9 课段为准。</a:t>
             </a:r>
           </a:p>
           <a:p xmlns:a="http://schemas.openxmlformats.org/drawingml/2006/main">
@@ -473,57 +473,7 @@
           </a:p>
           <a:p xmlns:a="http://schemas.openxmlformats.org/drawingml/2006/main">
             <a:r>
-              <a:t>来源与边界：</a:t>
-            </a:r>
-          </a:p>
-          <a:p xmlns:a="http://schemas.openxmlformats.org/drawingml/2006/main">
-            <a:r>
-              <a:t>课程定位以 [syllabus.md](../../course/syllabus.md) 与 [备课规划.md](../备课规划.md) 第 9 课段为准。</a:t>
-            </a:r>
-          </a:p>
-          <a:p xmlns:a="http://schemas.openxmlformats.org/drawingml/2006/main">
-            <a:r>
-              <a:t/>
-            </a:r>
-          </a:p>
-          <a:p xmlns:a="http://schemas.openxmlformats.org/drawingml/2006/main">
-            <a:r>
-              <a:t>---</a:t>
-            </a:r>
-          </a:p>
-          <a:p xmlns:a="http://schemas.openxmlformats.org/drawingml/2006/main">
-            <a:r>
-              <a:t/>
-            </a:r>
-          </a:p>
-          <a:p xmlns:a="http://schemas.openxmlformats.org/drawingml/2006/main">
-            <a:r>
-              <a:t>[Sources]</a:t>
-            </a:r>
-          </a:p>
-          <a:p xmlns:a="http://schemas.openxmlformats.org/drawingml/2006/main">
-            <a:r>
-              <a:t/>
-            </a:r>
-          </a:p>
-          <a:p xmlns:a="http://schemas.openxmlformats.org/drawingml/2006/main">
-            <a:r>
-              <a:t>- 本课 handout.md 与 slides.md</a:t>
-            </a:r>
-          </a:p>
-          <a:p xmlns:a="http://schemas.openxmlformats.org/drawingml/2006/main">
-            <a:r>
-              <a:t/>
-            </a:r>
-          </a:p>
-          <a:p xmlns:a="http://schemas.openxmlformats.org/drawingml/2006/main">
-            <a:r>
-              <a:t>- ../../course/reading-card-case.md</a:t>
-            </a:r>
-          </a:p>
-          <a:p xmlns:a="http://schemas.openxmlformats.org/drawingml/2006/main">
-            <a:r>
-              <a:t/>
+              <a:t>本课 handout.md、judgment-task.md；../../course/judgment-path.md。</a:t>
             </a:r>
           </a:p>
           <a:p xmlns:a="http://schemas.openxmlformats.org/drawingml/2006/main">
@@ -608,7 +558,12 @@
           </a:p>
           <a:p xmlns:a="http://schemas.openxmlformats.org/drawingml/2006/main">
             <a:r>
-              <a:t>讲义位置：handout.md §二、Baseline 选择与公平性；三、实验规格完善；四、可复现性；七、贯穿案例</a:t>
+              <a:t>讲述与校准：</a:t>
+            </a:r>
+          </a:p>
+          <a:p xmlns:a="http://schemas.openxmlformats.org/drawingml/2006/main">
+            <a:r>
+              <a:t>打开T01原文、两份输出和参考标注。脚本只校验并汇总人工标注，不自动理解语义。另一个四布尔字段0.5例仅演示工程复现，不能充当这里的遗漏率。</a:t>
             </a:r>
           </a:p>
           <a:p xmlns:a="http://schemas.openxmlformats.org/drawingml/2006/main">
@@ -618,22 +573,12 @@
           </a:p>
           <a:p xmlns:a="http://schemas.openxmlformats.org/drawingml/2006/main">
             <a:r>
-              <a:t>屏显核对：</a:t>
-            </a:r>
-          </a:p>
-          <a:p xmlns:a="http://schemas.openxmlformats.org/drawingml/2006/main">
-            <a:r>
-              <a:t>T01 应保留：英文材料、长度上限、显式限定句。</a:t>
-            </a:r>
-          </a:p>
-          <a:p xmlns:a="http://schemas.openxmlformats.org/drawingml/2006/main">
-            <a:r>
-              <a:t>阅读卡保留 3 项 → 遗漏 0/3。</a:t>
-            </a:r>
-          </a:p>
-          <a:p xmlns:a="http://schemas.openxmlformats.org/drawingml/2006/main">
-            <a:r>
-              <a:t>自由摘要保留 1 项 → 遗漏 2/3。</a:t>
+              <a:t>学生动作：</a:t>
+            </a:r>
+          </a:p>
+          <a:p xmlns:a="http://schemas.openxmlformats.org/drawingml/2006/main">
+            <a:r>
+              <a:t>学生指出一项“保留”的输出原句，另一人反查源文本。</a:t>
             </a:r>
           </a:p>
           <a:p xmlns:a="http://schemas.openxmlformats.org/drawingml/2006/main">
@@ -643,7 +588,7 @@
           </a:p>
           <a:p xmlns:a="http://schemas.openxmlformats.org/drawingml/2006/main">
             <a:r>
-              <a:t>先核验原文和输出，再汇总数字。</a:t>
+              <a:t>课堂安排：按本稿下方 90 分钟教学路由安排；此页不另占独立时段。</a:t>
             </a:r>
           </a:p>
           <a:p xmlns:a="http://schemas.openxmlformats.org/drawingml/2006/main">
@@ -653,12 +598,12 @@
           </a:p>
           <a:p xmlns:a="http://schemas.openxmlformats.org/drawingml/2006/main">
             <a:r>
-              <a:t>教师讲述：</a:t>
-            </a:r>
-          </a:p>
-          <a:p xmlns:a="http://schemas.openxmlformats.org/drawingml/2006/main">
-            <a:r>
-              <a:t>打开T01原文、两份输出和参考标注。脚本只校验并汇总人工标注，不自动理解语义。另一个四布尔字段0.5例仅演示工程复现，不能充当这里的遗漏率。</a:t>
+              <a:t>[Sources]</a:t>
+            </a:r>
+          </a:p>
+          <a:p xmlns:a="http://schemas.openxmlformats.org/drawingml/2006/main">
+            <a:r>
+              <a:t>./handout.md；课堂示例与构造数据见 ../../course/reading-card-case.md</a:t>
             </a:r>
           </a:p>
           <a:p xmlns:a="http://schemas.openxmlformats.org/drawingml/2006/main">
@@ -668,62 +613,7 @@
           </a:p>
           <a:p xmlns:a="http://schemas.openxmlformats.org/drawingml/2006/main">
             <a:r>
-              <a:t>学生动作：</a:t>
-            </a:r>
-          </a:p>
-          <a:p xmlns:a="http://schemas.openxmlformats.org/drawingml/2006/main">
-            <a:r>
-              <a:t>学生指出一项“保留”的输出原句，另一人反查源文本。</a:t>
-            </a:r>
-          </a:p>
-          <a:p xmlns:a="http://schemas.openxmlformats.org/drawingml/2006/main">
-            <a:r>
-              <a:t/>
-            </a:r>
-          </a:p>
-          <a:p xmlns:a="http://schemas.openxmlformats.org/drawingml/2006/main">
-            <a:r>
-              <a:t>来源与边界：</a:t>
-            </a:r>
-          </a:p>
-          <a:p xmlns:a="http://schemas.openxmlformats.org/drawingml/2006/main">
-            <a:r>
-              <a:t>./handout.md；课堂示例与构造数据见 ../../course/reading-card-case.md</a:t>
-            </a:r>
-          </a:p>
-          <a:p xmlns:a="http://schemas.openxmlformats.org/drawingml/2006/main">
-            <a:r>
-              <a:t/>
-            </a:r>
-          </a:p>
-          <a:p xmlns:a="http://schemas.openxmlformats.org/drawingml/2006/main">
-            <a:r>
-              <a:t>[Sources]</a:t>
-            </a:r>
-          </a:p>
-          <a:p xmlns:a="http://schemas.openxmlformats.org/drawingml/2006/main">
-            <a:r>
-              <a:t/>
-            </a:r>
-          </a:p>
-          <a:p xmlns:a="http://schemas.openxmlformats.org/drawingml/2006/main">
-            <a:r>
-              <a:t>- 本课 handout.md 与 slides.md</a:t>
-            </a:r>
-          </a:p>
-          <a:p xmlns:a="http://schemas.openxmlformats.org/drawingml/2006/main">
-            <a:r>
-              <a:t/>
-            </a:r>
-          </a:p>
-          <a:p xmlns:a="http://schemas.openxmlformats.org/drawingml/2006/main">
-            <a:r>
-              <a:t>- ../../course/reading-card-case.md</a:t>
-            </a:r>
-          </a:p>
-          <a:p xmlns:a="http://schemas.openxmlformats.org/drawingml/2006/main">
-            <a:r>
-              <a:t/>
+              <a:t>本课 handout.md、judgment-task.md；../../course/judgment-path.md。</a:t>
             </a:r>
           </a:p>
           <a:p xmlns:a="http://schemas.openxmlformats.org/drawingml/2006/main">
@@ -808,7 +698,12 @@
           </a:p>
           <a:p xmlns:a="http://schemas.openxmlformats.org/drawingml/2006/main">
             <a:r>
-              <a:t>讲义位置：handout.md §二、Baseline 选择与公平性；三、实验规格完善；四、可复现性；七、贯穿案例</a:t>
+              <a:t>讲述与校准：</a:t>
+            </a:r>
+          </a:p>
+          <a:p xmlns:a="http://schemas.openxmlformats.org/drawingml/2006/main">
+            <a:r>
+              <a:t>演示从README进入一次实际运行，版本以输入摘要与配置为准。这里不填写虚构SDK、模型版本或不存在的仓库commit。离线分支打开已经生成的真实日志。</a:t>
             </a:r>
           </a:p>
           <a:p xmlns:a="http://schemas.openxmlformats.org/drawingml/2006/main">
@@ -818,37 +713,12 @@
           </a:p>
           <a:p xmlns:a="http://schemas.openxmlformats.org/drawingml/2006/main">
             <a:r>
-              <a:t>屏显核对：</a:t>
-            </a:r>
-          </a:p>
-          <a:p xmlns:a="http://schemas.openxmlformats.org/drawingml/2006/main">
-            <a:r>
-              <a:t>输入：sources.json / outputs.json</a:t>
-            </a:r>
-          </a:p>
-          <a:p xmlns:a="http://schemas.openxmlformats.org/drawingml/2006/main">
-            <a:r>
-              <a:t>配置：config.json 与文件摘要</a:t>
-            </a:r>
-          </a:p>
-          <a:p xmlns:a="http://schemas.openxmlformats.org/drawingml/2006/main">
-            <a:r>
-              <a:t>入口：run.py replay，再 evaluate</a:t>
-            </a:r>
-          </a:p>
-          <a:p xmlns:a="http://schemas.openxmlformats.org/drawingml/2006/main">
-            <a:r>
-              <a:t>过程：events.jsonl / state.json</a:t>
-            </a:r>
-          </a:p>
-          <a:p xmlns:a="http://schemas.openxmlformats.org/drawingml/2006/main">
-            <a:r>
-              <a:t>结果：evaluation.json</a:t>
-            </a:r>
-          </a:p>
-          <a:p xmlns:a="http://schemas.openxmlformats.org/drawingml/2006/main">
-            <a:r>
-              <a:t>基准：gold.json / annotations.json</a:t>
+              <a:t>学生动作：</a:t>
+            </a:r>
+          </a:p>
+          <a:p xmlns:a="http://schemas.openxmlformats.org/drawingml/2006/main">
+            <a:r>
+              <a:t>同伴按说明找到一个输入、一条输出及其对应标注。</a:t>
             </a:r>
           </a:p>
           <a:p xmlns:a="http://schemas.openxmlformats.org/drawingml/2006/main">
@@ -858,12 +728,7 @@
           </a:p>
           <a:p xmlns:a="http://schemas.openxmlformats.org/drawingml/2006/main">
             <a:r>
-              <a:t>教师讲述：</a:t>
-            </a:r>
-          </a:p>
-          <a:p xmlns:a="http://schemas.openxmlformats.org/drawingml/2006/main">
-            <a:r>
-              <a:t>演示从README进入一次实际运行，版本以输入摘要与配置为准。这里不填写虚构SDK、模型版本或不存在的仓库commit。离线分支打开已经生成的真实日志。</a:t>
+              <a:t>课堂安排：按本稿下方 90 分钟教学路由安排；此页不另占独立时段。</a:t>
             </a:r>
           </a:p>
           <a:p xmlns:a="http://schemas.openxmlformats.org/drawingml/2006/main">
@@ -873,12 +738,12 @@
           </a:p>
           <a:p xmlns:a="http://schemas.openxmlformats.org/drawingml/2006/main">
             <a:r>
-              <a:t>学生动作：</a:t>
-            </a:r>
-          </a:p>
-          <a:p xmlns:a="http://schemas.openxmlformats.org/drawingml/2006/main">
-            <a:r>
-              <a:t>同伴按说明找到一个输入、一条输出及其对应标注。</a:t>
+              <a:t>[Sources]</a:t>
+            </a:r>
+          </a:p>
+          <a:p xmlns:a="http://schemas.openxmlformats.org/drawingml/2006/main">
+            <a:r>
+              <a:t>./handout.md；课堂示例与构造数据见 ../../course/reading-card-case.md</a:t>
             </a:r>
           </a:p>
           <a:p xmlns:a="http://schemas.openxmlformats.org/drawingml/2006/main">
@@ -888,57 +753,7 @@
           </a:p>
           <a:p xmlns:a="http://schemas.openxmlformats.org/drawingml/2006/main">
             <a:r>
-              <a:t>来源与边界：</a:t>
-            </a:r>
-          </a:p>
-          <a:p xmlns:a="http://schemas.openxmlformats.org/drawingml/2006/main">
-            <a:r>
-              <a:t>./handout.md；课堂示例与构造数据见 ../../course/reading-card-case.md</a:t>
-            </a:r>
-          </a:p>
-          <a:p xmlns:a="http://schemas.openxmlformats.org/drawingml/2006/main">
-            <a:r>
-              <a:t/>
-            </a:r>
-          </a:p>
-          <a:p xmlns:a="http://schemas.openxmlformats.org/drawingml/2006/main">
-            <a:r>
-              <a:t>[Sources]</a:t>
-            </a:r>
-          </a:p>
-          <a:p xmlns:a="http://schemas.openxmlformats.org/drawingml/2006/main">
-            <a:r>
-              <a:t/>
-            </a:r>
-          </a:p>
-          <a:p xmlns:a="http://schemas.openxmlformats.org/drawingml/2006/main">
-            <a:r>
-              <a:t>- https://journals.plos.org/ploscompbiol/article?id=10.1371/journal.pcbi.1003285</a:t>
-            </a:r>
-          </a:p>
-          <a:p xmlns:a="http://schemas.openxmlformats.org/drawingml/2006/main">
-            <a:r>
-              <a:t/>
-            </a:r>
-          </a:p>
-          <a:p xmlns:a="http://schemas.openxmlformats.org/drawingml/2006/main">
-            <a:r>
-              <a:t>- 本课 handout.md 与 slides.md</a:t>
-            </a:r>
-          </a:p>
-          <a:p xmlns:a="http://schemas.openxmlformats.org/drawingml/2006/main">
-            <a:r>
-              <a:t/>
-            </a:r>
-          </a:p>
-          <a:p xmlns:a="http://schemas.openxmlformats.org/drawingml/2006/main">
-            <a:r>
-              <a:t>- ../../course/reading-card-case.md</a:t>
-            </a:r>
-          </a:p>
-          <a:p xmlns:a="http://schemas.openxmlformats.org/drawingml/2006/main">
-            <a:r>
-              <a:t/>
+              <a:t>本课 handout.md、judgment-task.md；../../course/judgment-path.md。</a:t>
             </a:r>
           </a:p>
           <a:p xmlns:a="http://schemas.openxmlformats.org/drawingml/2006/main">
@@ -1023,7 +838,12 @@
           </a:p>
           <a:p xmlns:a="http://schemas.openxmlformats.org/drawingml/2006/main">
             <a:r>
-              <a:t>讲义位置：本课讲义；见逐页母稿映射表</a:t>
+              <a:t>讲述与校准：</a:t>
+            </a:r>
+          </a:p>
+          <a:p xmlns:a="http://schemas.openxmlformats.org/drawingml/2006/main">
+            <a:r>
+              <a:t>Bouthillier 等人的核心发现：单次运行噪声可能改变方法比较。这意味着重复计划必须服务于要声称的结论：要谈方差或稳定性，就需要足以估计它们的重复；单次只能作为边界明确的初步观察。课程不设统一“至少 3 次”硬门。</a:t>
             </a:r>
           </a:p>
           <a:p xmlns:a="http://schemas.openxmlformats.org/drawingml/2006/main">
@@ -1033,12 +853,12 @@
           </a:p>
           <a:p xmlns:a="http://schemas.openxmlformats.org/drawingml/2006/main">
             <a:r>
-              <a:t>屏显核对：</a:t>
-            </a:r>
-          </a:p>
-          <a:p xmlns:a="http://schemas.openxmlformats.org/drawingml/2006/main">
-            <a:r>
-              <a:t>机器学习实验的随机性来自多层面：数据划分、模型初始化、采样、解码。</a:t>
+              <a:t>学生动作：</a:t>
+            </a:r>
+          </a:p>
+          <a:p xmlns:a="http://schemas.openxmlformats.org/drawingml/2006/main">
+            <a:r>
+              <a:t>让学生检查：自己的关键比较跑了几次？有没有报告标准差？</a:t>
             </a:r>
           </a:p>
           <a:p xmlns:a="http://schemas.openxmlformats.org/drawingml/2006/main">
@@ -1048,7 +868,7 @@
           </a:p>
           <a:p xmlns:a="http://schemas.openxmlformats.org/drawingml/2006/main">
             <a:r>
-              <a:t>Bouthillier et al. 2021：单次运行的差异往往大于方法间差异。</a:t>
+              <a:t>课堂安排：按本稿下方 90 分钟教学路由安排；此页不另占独立时段。</a:t>
             </a:r>
           </a:p>
           <a:p xmlns:a="http://schemas.openxmlformats.org/drawingml/2006/main">
@@ -1058,7 +878,12 @@
           </a:p>
           <a:p xmlns:a="http://schemas.openxmlformats.org/drawingml/2006/main">
             <a:r>
-              <a:t>判断门要求的是可追溯，重复次数由主张决定：</a:t>
+              <a:t>[Sources]</a:t>
+            </a:r>
+          </a:p>
+          <a:p xmlns:a="http://schemas.openxmlformats.org/drawingml/2006/main">
+            <a:r>
+              <a:t>讲义 §四·2；Bouthillier et al. 2021（[reading-list.md](../../course/reading-list.md) 第 9 课）。</a:t>
             </a:r>
           </a:p>
           <a:p xmlns:a="http://schemas.openxmlformats.org/drawingml/2006/main">
@@ -1068,117 +893,7 @@
           </a:p>
           <a:p xmlns:a="http://schemas.openxmlformats.org/drawingml/2006/main">
             <a:r>
-              <a:t>- 记录所有随机种子的来源和值</a:t>
-            </a:r>
-          </a:p>
-          <a:p xmlns:a="http://schemas.openxmlformats.org/drawingml/2006/main">
-            <a:r>
-              <a:t>- 声称方差或稳定性时，事先写明足以支撑该主张的重复计划与汇总方式</a:t>
-            </a:r>
-          </a:p>
-          <a:p xmlns:a="http://schemas.openxmlformats.org/drawingml/2006/main">
-            <a:r>
-              <a:t>- 若只跑 1 次，写明边界，不把单次差异写成稳定结论</a:t>
-            </a:r>
-          </a:p>
-          <a:p xmlns:a="http://schemas.openxmlformats.org/drawingml/2006/main">
-            <a:r>
-              <a:t/>
-            </a:r>
-          </a:p>
-          <a:p xmlns:a="http://schemas.openxmlformats.org/drawingml/2006/main">
-            <a:r>
-              <a:t>&gt; 把单次运行的差异写成方法效应 = 隐性偏倚。</a:t>
-            </a:r>
-          </a:p>
-          <a:p xmlns:a="http://schemas.openxmlformats.org/drawingml/2006/main">
-            <a:r>
-              <a:t/>
-            </a:r>
-          </a:p>
-          <a:p xmlns:a="http://schemas.openxmlformats.org/drawingml/2006/main">
-            <a:r>
-              <a:t>教师讲述：</a:t>
-            </a:r>
-          </a:p>
-          <a:p xmlns:a="http://schemas.openxmlformats.org/drawingml/2006/main">
-            <a:r>
-              <a:t>Bouthillier 等人的核心发现：单次运行噪声可能改变方法比较。这意味着重复计划必须服务于要声称的结论：要谈方差或稳定性，就需要足以估计它们的重复；单次只能作为边界明确的初步观察。课程不设统一“至少 3 次”硬门。</a:t>
-            </a:r>
-          </a:p>
-          <a:p xmlns:a="http://schemas.openxmlformats.org/drawingml/2006/main">
-            <a:r>
-              <a:t/>
-            </a:r>
-          </a:p>
-          <a:p xmlns:a="http://schemas.openxmlformats.org/drawingml/2006/main">
-            <a:r>
-              <a:t>学生动作：</a:t>
-            </a:r>
-          </a:p>
-          <a:p xmlns:a="http://schemas.openxmlformats.org/drawingml/2006/main">
-            <a:r>
-              <a:t>让学生检查：自己的关键比较跑了几次？有没有报告标准差？</a:t>
-            </a:r>
-          </a:p>
-          <a:p xmlns:a="http://schemas.openxmlformats.org/drawingml/2006/main">
-            <a:r>
-              <a:t/>
-            </a:r>
-          </a:p>
-          <a:p xmlns:a="http://schemas.openxmlformats.org/drawingml/2006/main">
-            <a:r>
-              <a:t>来源与边界：</a:t>
-            </a:r>
-          </a:p>
-          <a:p xmlns:a="http://schemas.openxmlformats.org/drawingml/2006/main">
-            <a:r>
-              <a:t>讲义 §四·2；Bouthillier et al. 2021（[reading-list.md](../../course/reading-list.md) 第 9 课）。</a:t>
-            </a:r>
-          </a:p>
-          <a:p xmlns:a="http://schemas.openxmlformats.org/drawingml/2006/main">
-            <a:r>
-              <a:t/>
-            </a:r>
-          </a:p>
-          <a:p xmlns:a="http://schemas.openxmlformats.org/drawingml/2006/main">
-            <a:r>
-              <a:t>---</a:t>
-            </a:r>
-          </a:p>
-          <a:p xmlns:a="http://schemas.openxmlformats.org/drawingml/2006/main">
-            <a:r>
-              <a:t/>
-            </a:r>
-          </a:p>
-          <a:p xmlns:a="http://schemas.openxmlformats.org/drawingml/2006/main">
-            <a:r>
-              <a:t>[Sources]</a:t>
-            </a:r>
-          </a:p>
-          <a:p xmlns:a="http://schemas.openxmlformats.org/drawingml/2006/main">
-            <a:r>
-              <a:t/>
-            </a:r>
-          </a:p>
-          <a:p xmlns:a="http://schemas.openxmlformats.org/drawingml/2006/main">
-            <a:r>
-              <a:t>- 本课 handout.md 与 slides.md</a:t>
-            </a:r>
-          </a:p>
-          <a:p xmlns:a="http://schemas.openxmlformats.org/drawingml/2006/main">
-            <a:r>
-              <a:t/>
-            </a:r>
-          </a:p>
-          <a:p xmlns:a="http://schemas.openxmlformats.org/drawingml/2006/main">
-            <a:r>
-              <a:t>- ../../course/reading-card-case.md</a:t>
-            </a:r>
-          </a:p>
-          <a:p xmlns:a="http://schemas.openxmlformats.org/drawingml/2006/main">
-            <a:r>
-              <a:t/>
+              <a:t>本课 handout.md、judgment-task.md；../../course/judgment-path.md。</a:t>
             </a:r>
           </a:p>
           <a:p xmlns:a="http://schemas.openxmlformats.org/drawingml/2006/main">
@@ -1263,7 +978,12 @@
           </a:p>
           <a:p xmlns:a="http://schemas.openxmlformats.org/drawingml/2006/main">
             <a:r>
-              <a:t>讲义位置：handout.md §二、Baseline 选择与公平性；三、实验规格完善；四、可复现性；七、贯穿案例</a:t>
+              <a:t>讲述与校准：</a:t>
+            </a:r>
+          </a:p>
+          <a:p xmlns:a="http://schemas.openxmlformats.org/drawingml/2006/main">
+            <a:r>
+              <a:t>课程借用这些检查问题，不授予ACM徽章，也不把课程判断门等同于完整artifact评审。详细定义以讲义所链ACM官方说明为准。</a:t>
             </a:r>
           </a:p>
           <a:p xmlns:a="http://schemas.openxmlformats.org/drawingml/2006/main">
@@ -1273,27 +993,12 @@
           </a:p>
           <a:p xmlns:a="http://schemas.openxmlformats.org/drawingml/2006/main">
             <a:r>
-              <a:t>屏显核对：</a:t>
-            </a:r>
-          </a:p>
-          <a:p xmlns:a="http://schemas.openxmlformats.org/drawingml/2006/main">
-            <a:r>
-              <a:t>documented｜说明足够</a:t>
-            </a:r>
-          </a:p>
-          <a:p xmlns:a="http://schemas.openxmlformats.org/drawingml/2006/main">
-            <a:r>
-              <a:t>consistent｜说明、代码和主张一致</a:t>
-            </a:r>
-          </a:p>
-          <a:p xmlns:a="http://schemas.openxmlformats.org/drawingml/2006/main">
-            <a:r>
-              <a:t>complete｜关键部分齐全</a:t>
-            </a:r>
-          </a:p>
-          <a:p xmlns:a="http://schemas.openxmlformats.org/drawingml/2006/main">
-            <a:r>
-              <a:t>exercisable｜能够执行检查</a:t>
+              <a:t>学生动作：</a:t>
+            </a:r>
+          </a:p>
+          <a:p xmlns:a="http://schemas.openxmlformats.org/drawingml/2006/main">
+            <a:r>
+              <a:t>找出当前复现包一个最影响他人使用的缺口。</a:t>
             </a:r>
           </a:p>
           <a:p xmlns:a="http://schemas.openxmlformats.org/drawingml/2006/main">
@@ -1303,7 +1008,7 @@
           </a:p>
           <a:p xmlns:a="http://schemas.openxmlformats.org/drawingml/2006/main">
             <a:r>
-              <a:t>它们是 ACM Functional 的检查维度，不是四个等级。</a:t>
+              <a:t>课堂安排：按本稿下方 90 分钟教学路由安排；此页不另占独立时段。</a:t>
             </a:r>
           </a:p>
           <a:p xmlns:a="http://schemas.openxmlformats.org/drawingml/2006/main">
@@ -1313,12 +1018,12 @@
           </a:p>
           <a:p xmlns:a="http://schemas.openxmlformats.org/drawingml/2006/main">
             <a:r>
-              <a:t>教师讲述：</a:t>
-            </a:r>
-          </a:p>
-          <a:p xmlns:a="http://schemas.openxmlformats.org/drawingml/2006/main">
-            <a:r>
-              <a:t>课程借用这些检查问题，不授予ACM徽章，也不把课程判断门等同于完整artifact评审。详细定义以讲义所链ACM官方说明为准。</a:t>
+              <a:t>[Sources]</a:t>
+            </a:r>
+          </a:p>
+          <a:p xmlns:a="http://schemas.openxmlformats.org/drawingml/2006/main">
+            <a:r>
+              <a:t>./handout.md；课堂示例与构造数据见 ../../course/reading-card-case.md</a:t>
             </a:r>
           </a:p>
           <a:p xmlns:a="http://schemas.openxmlformats.org/drawingml/2006/main">
@@ -1328,62 +1033,7 @@
           </a:p>
           <a:p xmlns:a="http://schemas.openxmlformats.org/drawingml/2006/main">
             <a:r>
-              <a:t>学生动作：</a:t>
-            </a:r>
-          </a:p>
-          <a:p xmlns:a="http://schemas.openxmlformats.org/drawingml/2006/main">
-            <a:r>
-              <a:t>找出当前复现包一个最影响他人使用的缺口。</a:t>
-            </a:r>
-          </a:p>
-          <a:p xmlns:a="http://schemas.openxmlformats.org/drawingml/2006/main">
-            <a:r>
-              <a:t/>
-            </a:r>
-          </a:p>
-          <a:p xmlns:a="http://schemas.openxmlformats.org/drawingml/2006/main">
-            <a:r>
-              <a:t>来源与边界：</a:t>
-            </a:r>
-          </a:p>
-          <a:p xmlns:a="http://schemas.openxmlformats.org/drawingml/2006/main">
-            <a:r>
-              <a:t>./handout.md；课堂示例与构造数据见 ../../course/reading-card-case.md</a:t>
-            </a:r>
-          </a:p>
-          <a:p xmlns:a="http://schemas.openxmlformats.org/drawingml/2006/main">
-            <a:r>
-              <a:t/>
-            </a:r>
-          </a:p>
-          <a:p xmlns:a="http://schemas.openxmlformats.org/drawingml/2006/main">
-            <a:r>
-              <a:t>[Sources]</a:t>
-            </a:r>
-          </a:p>
-          <a:p xmlns:a="http://schemas.openxmlformats.org/drawingml/2006/main">
-            <a:r>
-              <a:t/>
-            </a:r>
-          </a:p>
-          <a:p xmlns:a="http://schemas.openxmlformats.org/drawingml/2006/main">
-            <a:r>
-              <a:t>- 本课 handout.md 与 slides.md</a:t>
-            </a:r>
-          </a:p>
-          <a:p xmlns:a="http://schemas.openxmlformats.org/drawingml/2006/main">
-            <a:r>
-              <a:t/>
-            </a:r>
-          </a:p>
-          <a:p xmlns:a="http://schemas.openxmlformats.org/drawingml/2006/main">
-            <a:r>
-              <a:t>- ../../course/reading-card-case.md</a:t>
-            </a:r>
-          </a:p>
-          <a:p xmlns:a="http://schemas.openxmlformats.org/drawingml/2006/main">
-            <a:r>
-              <a:t/>
+              <a:t>本课 handout.md、judgment-task.md；../../course/judgment-path.md。</a:t>
             </a:r>
           </a:p>
           <a:p xmlns:a="http://schemas.openxmlformats.org/drawingml/2006/main">
@@ -1468,7 +1118,12 @@
           </a:p>
           <a:p xmlns:a="http://schemas.openxmlformats.org/drawingml/2006/main">
             <a:r>
-              <a:t>讲义位置：本课讲义；见逐页母稿映射表</a:t>
+              <a:t>讲述与校准：</a:t>
+            </a:r>
+          </a:p>
+          <a:p xmlns:a="http://schemas.openxmlformats.org/drawingml/2006/main">
+            <a:r>
+              <a:t>允许 README 索引＋主文档＋实现与原始记录；命题只维护一份，其他内容引用 ID。分文件与合并版按相同内容验收，保留四次阶段版本。</a:t>
             </a:r>
           </a:p>
           <a:p xmlns:a="http://schemas.openxmlformats.org/drawingml/2006/main">
@@ -1478,12 +1133,7 @@
           </a:p>
           <a:p xmlns:a="http://schemas.openxmlformats.org/drawingml/2006/main">
             <a:r>
-              <a:t>屏显核对：</a:t>
-            </a:r>
-          </a:p>
-          <a:p xmlns:a="http://schemas.openxmlformats.org/drawingml/2006/main">
-            <a:r>
-              <a:t>判断门条件之九：从轻量脚手架迁移到完整项目模板，且没有丢失 AI 使用记录和伦理说明。</a:t>
+              <a:t>迁移不是重写——把 starter-template 中已稳定的字段搬到 project-template 对应位置。最常见错误：搬字段时漏掉了第 1-8 课的 AI 使用记录条目，或伦理说明没补数据使用限制。迁移验收判据：AI 使用记录条目数 ≥ 第 1-8 课总和。</a:t>
             </a:r>
           </a:p>
           <a:p xmlns:a="http://schemas.openxmlformats.org/drawingml/2006/main">
@@ -1493,7 +1143,12 @@
           </a:p>
           <a:p xmlns:a="http://schemas.openxmlformats.org/drawingml/2006/main">
             <a:r>
-              <a:t>迁移对照表（部分）：</a:t>
+              <a:t>学生动作：</a:t>
+            </a:r>
+          </a:p>
+          <a:p xmlns:a="http://schemas.openxmlformats.org/drawingml/2006/main">
+            <a:r>
+              <a:t>让学生对照迁移表，标注自己已搬哪些、还缺哪些。</a:t>
             </a:r>
           </a:p>
           <a:p xmlns:a="http://schemas.openxmlformats.org/drawingml/2006/main">
@@ -1503,27 +1158,7 @@
           </a:p>
           <a:p xmlns:a="http://schemas.openxmlformats.org/drawingml/2006/main">
             <a:r>
-              <a:t>| starter 字段 | project 位置 | 注意 |</a:t>
-            </a:r>
-          </a:p>
-          <a:p xmlns:a="http://schemas.openxmlformats.org/drawingml/2006/main">
-            <a:r>
-              <a:t>| --- | --- | --- |</a:t>
-            </a:r>
-          </a:p>
-          <a:p xmlns:a="http://schemas.openxmlformats.org/drawingml/2006/main">
-            <a:r>
-              <a:t>| §1 项目概览 | §1 项目信息 | 补 URL |</a:t>
-            </a:r>
-          </a:p>
-          <a:p xmlns:a="http://schemas.openxmlformats.org/drawingml/2006/main">
-            <a:r>
-              <a:t>| §6 AI 使用记录 | ai-usage-log.md | 不丢失任何条目 |</a:t>
-            </a:r>
-          </a:p>
-          <a:p xmlns:a="http://schemas.openxmlformats.org/drawingml/2006/main">
-            <a:r>
-              <a:t>| §8 伦理检查 | ethics-and-compliance.md | 补数据使用限制 |</a:t>
+              <a:t>课堂安排：按本稿下方 90 分钟教学路由安排；此页不另占独立时段。</a:t>
             </a:r>
           </a:p>
           <a:p xmlns:a="http://schemas.openxmlformats.org/drawingml/2006/main">
@@ -1533,7 +1168,12 @@
           </a:p>
           <a:p xmlns:a="http://schemas.openxmlformats.org/drawingml/2006/main">
             <a:r>
-              <a:t>新增字段：</a:t>
+              <a:t>[Sources]</a:t>
+            </a:r>
+          </a:p>
+          <a:p xmlns:a="http://schemas.openxmlformats.org/drawingml/2006/main">
+            <a:r>
+              <a:t>讲义 §五；[starter-template.md](../../course/starter-template.md) 与 [project-template.md](../../course/project-template.md)。</a:t>
             </a:r>
           </a:p>
           <a:p xmlns:a="http://schemas.openxmlformats.org/drawingml/2006/main">
@@ -1543,127 +1183,7 @@
           </a:p>
           <a:p xmlns:a="http://schemas.openxmlformats.org/drawingml/2006/main">
             <a:r>
-              <a:t>- §4.2 Baseline（类型 + 公平性）</a:t>
-            </a:r>
-          </a:p>
-          <a:p xmlns:a="http://schemas.openxmlformats.org/drawingml/2006/main">
-            <a:r>
-              <a:t>- §4.6 实验规格（七字段）</a:t>
-            </a:r>
-          </a:p>
-          <a:p xmlns:a="http://schemas.openxmlformats.org/drawingml/2006/main">
-            <a:r>
-              <a:t>- §5 研究判断记录（≥2 条六字段）</a:t>
-            </a:r>
-          </a:p>
-          <a:p xmlns:a="http://schemas.openxmlformats.org/drawingml/2006/main">
-            <a:r>
-              <a:t>- §7 实验记录（≥1 行可追溯）</a:t>
-            </a:r>
-          </a:p>
-          <a:p xmlns:a="http://schemas.openxmlformats.org/drawingml/2006/main">
-            <a:r>
-              <a:t>- 同伴反馈处理记录</a:t>
-            </a:r>
-          </a:p>
-          <a:p xmlns:a="http://schemas.openxmlformats.org/drawingml/2006/main">
-            <a:r>
-              <a:t/>
-            </a:r>
-          </a:p>
-          <a:p xmlns:a="http://schemas.openxmlformats.org/drawingml/2006/main">
-            <a:r>
-              <a:t>&gt; 迁移沿用现有字段位置，补齐新增项与数据使用限制。</a:t>
-            </a:r>
-          </a:p>
-          <a:p xmlns:a="http://schemas.openxmlformats.org/drawingml/2006/main">
-            <a:r>
-              <a:t/>
-            </a:r>
-          </a:p>
-          <a:p xmlns:a="http://schemas.openxmlformats.org/drawingml/2006/main">
-            <a:r>
-              <a:t>教师讲述：</a:t>
-            </a:r>
-          </a:p>
-          <a:p xmlns:a="http://schemas.openxmlformats.org/drawingml/2006/main">
-            <a:r>
-              <a:t>迁移不是重写——把 starter-template 中已稳定的字段搬到 project-template 对应位置。最常见错误：搬字段时漏掉了第 1-8 课的 AI 使用记录条目，或伦理说明没补数据使用限制。迁移验收判据：AI 使用记录条目数 ≥ 第 1-8 课总和。</a:t>
-            </a:r>
-          </a:p>
-          <a:p xmlns:a="http://schemas.openxmlformats.org/drawingml/2006/main">
-            <a:r>
-              <a:t/>
-            </a:r>
-          </a:p>
-          <a:p xmlns:a="http://schemas.openxmlformats.org/drawingml/2006/main">
-            <a:r>
-              <a:t>学生动作：</a:t>
-            </a:r>
-          </a:p>
-          <a:p xmlns:a="http://schemas.openxmlformats.org/drawingml/2006/main">
-            <a:r>
-              <a:t>让学生对照迁移表，标注自己已搬哪些、还缺哪些。</a:t>
-            </a:r>
-          </a:p>
-          <a:p xmlns:a="http://schemas.openxmlformats.org/drawingml/2006/main">
-            <a:r>
-              <a:t/>
-            </a:r>
-          </a:p>
-          <a:p xmlns:a="http://schemas.openxmlformats.org/drawingml/2006/main">
-            <a:r>
-              <a:t>来源与边界：</a:t>
-            </a:r>
-          </a:p>
-          <a:p xmlns:a="http://schemas.openxmlformats.org/drawingml/2006/main">
-            <a:r>
-              <a:t>讲义 §五；[starter-template.md](../../course/starter-template.md) 与 [project-template.md](../../course/project-template.md)。</a:t>
-            </a:r>
-          </a:p>
-          <a:p xmlns:a="http://schemas.openxmlformats.org/drawingml/2006/main">
-            <a:r>
-              <a:t/>
-            </a:r>
-          </a:p>
-          <a:p xmlns:a="http://schemas.openxmlformats.org/drawingml/2006/main">
-            <a:r>
-              <a:t>---</a:t>
-            </a:r>
-          </a:p>
-          <a:p xmlns:a="http://schemas.openxmlformats.org/drawingml/2006/main">
-            <a:r>
-              <a:t/>
-            </a:r>
-          </a:p>
-          <a:p xmlns:a="http://schemas.openxmlformats.org/drawingml/2006/main">
-            <a:r>
-              <a:t>[Sources]</a:t>
-            </a:r>
-          </a:p>
-          <a:p xmlns:a="http://schemas.openxmlformats.org/drawingml/2006/main">
-            <a:r>
-              <a:t/>
-            </a:r>
-          </a:p>
-          <a:p xmlns:a="http://schemas.openxmlformats.org/drawingml/2006/main">
-            <a:r>
-              <a:t>- 本课 handout.md 与 slides.md</a:t>
-            </a:r>
-          </a:p>
-          <a:p xmlns:a="http://schemas.openxmlformats.org/drawingml/2006/main">
-            <a:r>
-              <a:t/>
-            </a:r>
-          </a:p>
-          <a:p xmlns:a="http://schemas.openxmlformats.org/drawingml/2006/main">
-            <a:r>
-              <a:t>- ../../course/reading-card-case.md</a:t>
-            </a:r>
-          </a:p>
-          <a:p xmlns:a="http://schemas.openxmlformats.org/drawingml/2006/main">
-            <a:r>
-              <a:t/>
+              <a:t>本课 handout.md、judgment-task.md；../../course/judgment-path.md。</a:t>
             </a:r>
           </a:p>
           <a:p xmlns:a="http://schemas.openxmlformats.org/drawingml/2006/main">
@@ -1748,7 +1268,12 @@
           </a:p>
           <a:p xmlns:a="http://schemas.openxmlformats.org/drawingml/2006/main">
             <a:r>
-              <a:t>讲义位置：本课讲义；见逐页母稿映射表</a:t>
+              <a:t>讲述与校准：</a:t>
+            </a:r>
+          </a:p>
+          <a:p xmlns:a="http://schemas.openxmlformats.org/drawingml/2006/main">
+            <a:r>
+              <a:t>数据材料说明含证据角色和独立单位，七字段含反馈允许用途、搜索次数、成本与判断条件；不是新增研究门数量或提交。</a:t>
             </a:r>
           </a:p>
           <a:p xmlns:a="http://schemas.openxmlformats.org/drawingml/2006/main">
@@ -1758,12 +1283,7 @@
           </a:p>
           <a:p xmlns:a="http://schemas.openxmlformats.org/drawingml/2006/main">
             <a:r>
-              <a:t>屏显核对：</a:t>
-            </a:r>
-          </a:p>
-          <a:p xmlns:a="http://schemas.openxmlformats.org/drawingml/2006/main">
-            <a:r>
-              <a:t>9 项门条件（与 [assignments.md](../../course/assignments.md) Checkpoint 2 一致）：</a:t>
+              <a:t>快速说明 9 项门条件与 assignments.md 一一对应。第 8 项记录已经发生的执行失败或已经放弃的备选方案，不能由第 7 项前瞻失败预案替代；第 9 项为模板迁移。判断门检查当前项目版本，不重新制作材料。</a:t>
             </a:r>
           </a:p>
           <a:p xmlns:a="http://schemas.openxmlformats.org/drawingml/2006/main">
@@ -1773,57 +1293,12 @@
           </a:p>
           <a:p xmlns:a="http://schemas.openxmlformats.org/drawingml/2006/main">
             <a:r>
-              <a:t>| # | 门条件 | 自查 |</a:t>
-            </a:r>
-          </a:p>
-          <a:p xmlns:a="http://schemas.openxmlformats.org/drawingml/2006/main">
-            <a:r>
-              <a:t>| --- | --- | --- |</a:t>
-            </a:r>
-          </a:p>
-          <a:p xmlns:a="http://schemas.openxmlformats.org/drawingml/2006/main">
-            <a:r>
-              <a:t>| 1 | 可执行 baseline 或最小验证原型 | □ |</a:t>
-            </a:r>
-          </a:p>
-          <a:p xmlns:a="http://schemas.openxmlformats.org/drawingml/2006/main">
-            <a:r>
-              <a:t>| 2 | 数据、材料、评价指标和使用限制说明 | □ |</a:t>
-            </a:r>
-          </a:p>
-          <a:p xmlns:a="http://schemas.openxmlformats.org/drawingml/2006/main">
-            <a:r>
-              <a:t>| 3 | 环境、配置、随机种子或等价复现条件 | □ |</a:t>
-            </a:r>
-          </a:p>
-          <a:p xmlns:a="http://schemas.openxmlformats.org/drawingml/2006/main">
-            <a:r>
-              <a:t>| 4 | ≥2 条研究判断（取舍理由、适用边界、依据、待验证状态） | □ |</a:t>
-            </a:r>
-          </a:p>
-          <a:p xmlns:a="http://schemas.openxmlformats.org/drawingml/2006/main">
-            <a:r>
-              <a:t>| 5 | 实验规格完整（假设对应、变量、步骤、度量、对照、停止条件） | □ |</a:t>
-            </a:r>
-          </a:p>
-          <a:p xmlns:a="http://schemas.openxmlformats.org/drawingml/2006/main">
-            <a:r>
-              <a:t>| 6 | 第 8 课同伴反馈处理记录 | □ |</a:t>
-            </a:r>
-          </a:p>
-          <a:p xmlns:a="http://schemas.openxmlformats.org/drawingml/2006/main">
-            <a:r>
-              <a:t>| 7 | 当前最大风险和失败预案 | □ |</a:t>
-            </a:r>
-          </a:p>
-          <a:p xmlns:a="http://schemas.openxmlformats.org/drawingml/2006/main">
-            <a:r>
-              <a:t>| 8 | 已遇执行失败或已放弃备选：发生条件、处理、回写 | □ |</a:t>
-            </a:r>
-          </a:p>
-          <a:p xmlns:a="http://schemas.openxmlformats.org/drawingml/2006/main">
-            <a:r>
-              <a:t>| 9 | 迁移到完整项目模板，不丢失 AI 使用记录和伦理说明 | □ |</a:t>
+              <a:t>学生动作：</a:t>
+            </a:r>
+          </a:p>
+          <a:p xmlns:a="http://schemas.openxmlformats.org/drawingml/2006/main">
+            <a:r>
+              <a:t>让学生对照清单，标注当前项目哪些已满足、哪些待补全。</a:t>
             </a:r>
           </a:p>
           <a:p xmlns:a="http://schemas.openxmlformats.org/drawingml/2006/main">
@@ -1833,7 +1308,7 @@
           </a:p>
           <a:p xmlns:a="http://schemas.openxmlformats.org/drawingml/2006/main">
             <a:r>
-              <a:t>&gt; 第 1-8 课产出已是项目一部分，本课补全第 1-3、5、7、8 项，整理第 4、6、9 项。</a:t>
+              <a:t>课堂安排：按本稿下方 90 分钟教学路由安排；此页不另占独立时段。</a:t>
             </a:r>
           </a:p>
           <a:p xmlns:a="http://schemas.openxmlformats.org/drawingml/2006/main">
@@ -1843,12 +1318,12 @@
           </a:p>
           <a:p xmlns:a="http://schemas.openxmlformats.org/drawingml/2006/main">
             <a:r>
-              <a:t>教师讲述：</a:t>
-            </a:r>
-          </a:p>
-          <a:p xmlns:a="http://schemas.openxmlformats.org/drawingml/2006/main">
-            <a:r>
-              <a:t>快速说明 9 项门条件与 assignments.md 一一对应。第 8 项记录已经发生的执行失败或已经放弃的备选方案，不能由第 7 项前瞻失败预案替代；第 9 项为模板迁移。判断门检查当前项目版本，不重新制作材料。</a:t>
+              <a:t>[Sources]</a:t>
+            </a:r>
+          </a:p>
+          <a:p xmlns:a="http://schemas.openxmlformats.org/drawingml/2006/main">
+            <a:r>
+              <a:t>[assignments.md](../../course/assignments.md) Checkpoint 2 判断门条件（权威来源）；[project-template.md](../../course/project-template.md) 字段模板。</a:t>
             </a:r>
           </a:p>
           <a:p xmlns:a="http://schemas.openxmlformats.org/drawingml/2006/main">
@@ -1858,72 +1333,7 @@
           </a:p>
           <a:p xmlns:a="http://schemas.openxmlformats.org/drawingml/2006/main">
             <a:r>
-              <a:t>学生动作：</a:t>
-            </a:r>
-          </a:p>
-          <a:p xmlns:a="http://schemas.openxmlformats.org/drawingml/2006/main">
-            <a:r>
-              <a:t>让学生对照清单，标注当前项目哪些已满足、哪些待补全。</a:t>
-            </a:r>
-          </a:p>
-          <a:p xmlns:a="http://schemas.openxmlformats.org/drawingml/2006/main">
-            <a:r>
-              <a:t/>
-            </a:r>
-          </a:p>
-          <a:p xmlns:a="http://schemas.openxmlformats.org/drawingml/2006/main">
-            <a:r>
-              <a:t>来源与边界：</a:t>
-            </a:r>
-          </a:p>
-          <a:p xmlns:a="http://schemas.openxmlformats.org/drawingml/2006/main">
-            <a:r>
-              <a:t>[assignments.md](../../course/assignments.md) Checkpoint 2 判断门条件（权威来源）；[project-template.md](../../course/project-template.md) 字段模板。</a:t>
-            </a:r>
-          </a:p>
-          <a:p xmlns:a="http://schemas.openxmlformats.org/drawingml/2006/main">
-            <a:r>
-              <a:t/>
-            </a:r>
-          </a:p>
-          <a:p xmlns:a="http://schemas.openxmlformats.org/drawingml/2006/main">
-            <a:r>
-              <a:t>---</a:t>
-            </a:r>
-          </a:p>
-          <a:p xmlns:a="http://schemas.openxmlformats.org/drawingml/2006/main">
-            <a:r>
-              <a:t/>
-            </a:r>
-          </a:p>
-          <a:p xmlns:a="http://schemas.openxmlformats.org/drawingml/2006/main">
-            <a:r>
-              <a:t>[Sources]</a:t>
-            </a:r>
-          </a:p>
-          <a:p xmlns:a="http://schemas.openxmlformats.org/drawingml/2006/main">
-            <a:r>
-              <a:t/>
-            </a:r>
-          </a:p>
-          <a:p xmlns:a="http://schemas.openxmlformats.org/drawingml/2006/main">
-            <a:r>
-              <a:t>- 本课 handout.md 与 slides.md</a:t>
-            </a:r>
-          </a:p>
-          <a:p xmlns:a="http://schemas.openxmlformats.org/drawingml/2006/main">
-            <a:r>
-              <a:t/>
-            </a:r>
-          </a:p>
-          <a:p xmlns:a="http://schemas.openxmlformats.org/drawingml/2006/main">
-            <a:r>
-              <a:t>- ../../course/reading-card-case.md</a:t>
-            </a:r>
-          </a:p>
-          <a:p xmlns:a="http://schemas.openxmlformats.org/drawingml/2006/main">
-            <a:r>
-              <a:t/>
+              <a:t>本课 handout.md、judgment-task.md；../../course/judgment-path.md。</a:t>
             </a:r>
           </a:p>
           <a:p xmlns:a="http://schemas.openxmlformats.org/drawingml/2006/main">
@@ -2008,7 +1418,12 @@
           </a:p>
           <a:p xmlns:a="http://schemas.openxmlformats.org/drawingml/2006/main">
             <a:r>
-              <a:t>讲义位置：本课讲义；见逐页母稿映射表</a:t>
+              <a:t>讲述与校准：</a:t>
+            </a:r>
+          </a:p>
+          <a:p xmlns:a="http://schemas.openxmlformats.org/drawingml/2006/main">
+            <a:r>
+              <a:t>演示如何把第 8 课同伴反馈变成判断门可检查的材料。重点是真实处理、理由和回写位置，不是覆盖机械分类。</a:t>
             </a:r>
           </a:p>
           <a:p xmlns:a="http://schemas.openxmlformats.org/drawingml/2006/main">
@@ -2018,12 +1433,12 @@
           </a:p>
           <a:p xmlns:a="http://schemas.openxmlformats.org/drawingml/2006/main">
             <a:r>
-              <a:t>屏显核对：</a:t>
-            </a:r>
-          </a:p>
-          <a:p xmlns:a="http://schemas.openxmlformats.org/drawingml/2006/main">
-            <a:r>
-              <a:t>**J2 第二条研究判断**：</a:t>
+              <a:t>学生动作：</a:t>
+            </a:r>
+          </a:p>
+          <a:p xmlns:a="http://schemas.openxmlformats.org/drawingml/2006/main">
+            <a:r>
+              <a:t>让学生用自己的同伴反馈尝试同样的归档。</a:t>
             </a:r>
           </a:p>
           <a:p xmlns:a="http://schemas.openxmlformats.org/drawingml/2006/main">
@@ -2033,42 +1448,7 @@
           </a:p>
           <a:p xmlns:a="http://schemas.openxmlformats.org/drawingml/2006/main">
             <a:r>
-              <a:t>| 字段 | 内容 |</a:t>
-            </a:r>
-          </a:p>
-          <a:p xmlns:a="http://schemas.openxmlformats.org/drawingml/2006/main">
-            <a:r>
-              <a:t>| --- | --- |</a:t>
-            </a:r>
-          </a:p>
-          <a:p xmlns:a="http://schemas.openxmlformats.org/drawingml/2006/main">
-            <a:r>
-              <a:t>| 判断内容 | 自由摘要作朴素 baseline |</a:t>
-            </a:r>
-          </a:p>
-          <a:p xmlns:a="http://schemas.openxmlformats.org/drawingml/2006/main">
-            <a:r>
-              <a:t>| 取舍理由 | 强基线需外部 prompt 集，超出周期 |</a:t>
-            </a:r>
-          </a:p>
-          <a:p xmlns:a="http://schemas.openxmlformats.org/drawingml/2006/main">
-            <a:r>
-              <a:t>| 适用边界 | 只比较字段约束 vs 无约束 |</a:t>
-            </a:r>
-          </a:p>
-          <a:p xmlns:a="http://schemas.openxmlformats.org/drawingml/2006/main">
-            <a:r>
-              <a:t>| 依据 | 第 8 课反馈 + 可定位原文原则 |</a:t>
-            </a:r>
-          </a:p>
-          <a:p xmlns:a="http://schemas.openxmlformats.org/drawingml/2006/main">
-            <a:r>
-              <a:t>| 待验证状态 | 强基线留作后续验证 |</a:t>
-            </a:r>
-          </a:p>
-          <a:p xmlns:a="http://schemas.openxmlformats.org/drawingml/2006/main">
-            <a:r>
-              <a:t>| 影响工件 | 实验规格 §对照、§失败预案 |</a:t>
+              <a:t>课堂安排：按本稿下方 90 分钟教学路由安排；此页不另占独立时段。</a:t>
             </a:r>
           </a:p>
           <a:p xmlns:a="http://schemas.openxmlformats.org/drawingml/2006/main">
@@ -2078,7 +1458,12 @@
           </a:p>
           <a:p xmlns:a="http://schemas.openxmlformats.org/drawingml/2006/main">
             <a:r>
-              <a:t>**同伴反馈处理**：</a:t>
+              <a:t>[Sources]</a:t>
+            </a:r>
+          </a:p>
+          <a:p xmlns:a="http://schemas.openxmlformats.org/drawingml/2006/main">
+            <a:r>
+              <a:t>讲义 §七 贯穿案例第四至六步；第 8 课同伴反馈记录。</a:t>
             </a:r>
           </a:p>
           <a:p xmlns:a="http://schemas.openxmlformats.org/drawingml/2006/main">
@@ -2088,117 +1473,7 @@
           </a:p>
           <a:p xmlns:a="http://schemas.openxmlformats.org/drawingml/2006/main">
             <a:r>
-              <a:t>- "增加强 baseline" → 保留异议（J2 记录当前周期约束与后续条件）</a:t>
-            </a:r>
-          </a:p>
-          <a:p xmlns:a="http://schemas.openxmlformats.org/drawingml/2006/main">
-            <a:r>
-              <a:t>- "报告方差" → 采纳（已写入实验规格 3 次运行与标准差）</a:t>
-            </a:r>
-          </a:p>
-          <a:p xmlns:a="http://schemas.openxmlformats.org/drawingml/2006/main">
-            <a:r>
-              <a:t>- "样本量过小" → 暂缓（标记为待验证项，结论将标注"小样本下的初步证据"）</a:t>
-            </a:r>
-          </a:p>
-          <a:p xmlns:a="http://schemas.openxmlformats.org/drawingml/2006/main">
-            <a:r>
-              <a:t/>
-            </a:r>
-          </a:p>
-          <a:p xmlns:a="http://schemas.openxmlformats.org/drawingml/2006/main">
-            <a:r>
-              <a:t>&gt; 处理动作按真实反馈选择，记录理由与回写位置；不要求出现拒绝。</a:t>
-            </a:r>
-          </a:p>
-          <a:p xmlns:a="http://schemas.openxmlformats.org/drawingml/2006/main">
-            <a:r>
-              <a:t/>
-            </a:r>
-          </a:p>
-          <a:p xmlns:a="http://schemas.openxmlformats.org/drawingml/2006/main">
-            <a:r>
-              <a:t>教师讲述：</a:t>
-            </a:r>
-          </a:p>
-          <a:p xmlns:a="http://schemas.openxmlformats.org/drawingml/2006/main">
-            <a:r>
-              <a:t>演示如何把第 8 课同伴反馈变成判断门可检查的材料。重点是真实处理、理由和回写位置，不是覆盖机械分类。</a:t>
-            </a:r>
-          </a:p>
-          <a:p xmlns:a="http://schemas.openxmlformats.org/drawingml/2006/main">
-            <a:r>
-              <a:t/>
-            </a:r>
-          </a:p>
-          <a:p xmlns:a="http://schemas.openxmlformats.org/drawingml/2006/main">
-            <a:r>
-              <a:t>学生动作：</a:t>
-            </a:r>
-          </a:p>
-          <a:p xmlns:a="http://schemas.openxmlformats.org/drawingml/2006/main">
-            <a:r>
-              <a:t>让学生用自己的同伴反馈尝试同样的归档。</a:t>
-            </a:r>
-          </a:p>
-          <a:p xmlns:a="http://schemas.openxmlformats.org/drawingml/2006/main">
-            <a:r>
-              <a:t/>
-            </a:r>
-          </a:p>
-          <a:p xmlns:a="http://schemas.openxmlformats.org/drawingml/2006/main">
-            <a:r>
-              <a:t>来源与边界：</a:t>
-            </a:r>
-          </a:p>
-          <a:p xmlns:a="http://schemas.openxmlformats.org/drawingml/2006/main">
-            <a:r>
-              <a:t>讲义 §七 贯穿案例第四至六步；第 8 课同伴反馈记录。</a:t>
-            </a:r>
-          </a:p>
-          <a:p xmlns:a="http://schemas.openxmlformats.org/drawingml/2006/main">
-            <a:r>
-              <a:t/>
-            </a:r>
-          </a:p>
-          <a:p xmlns:a="http://schemas.openxmlformats.org/drawingml/2006/main">
-            <a:r>
-              <a:t>---</a:t>
-            </a:r>
-          </a:p>
-          <a:p xmlns:a="http://schemas.openxmlformats.org/drawingml/2006/main">
-            <a:r>
-              <a:t/>
-            </a:r>
-          </a:p>
-          <a:p xmlns:a="http://schemas.openxmlformats.org/drawingml/2006/main">
-            <a:r>
-              <a:t>[Sources]</a:t>
-            </a:r>
-          </a:p>
-          <a:p xmlns:a="http://schemas.openxmlformats.org/drawingml/2006/main">
-            <a:r>
-              <a:t/>
-            </a:r>
-          </a:p>
-          <a:p xmlns:a="http://schemas.openxmlformats.org/drawingml/2006/main">
-            <a:r>
-              <a:t>- 本课 handout.md 与 slides.md</a:t>
-            </a:r>
-          </a:p>
-          <a:p xmlns:a="http://schemas.openxmlformats.org/drawingml/2006/main">
-            <a:r>
-              <a:t/>
-            </a:r>
-          </a:p>
-          <a:p xmlns:a="http://schemas.openxmlformats.org/drawingml/2006/main">
-            <a:r>
-              <a:t>- ../../course/reading-card-case.md</a:t>
-            </a:r>
-          </a:p>
-          <a:p xmlns:a="http://schemas.openxmlformats.org/drawingml/2006/main">
-            <a:r>
-              <a:t/>
+              <a:t>本课 handout.md、judgment-task.md；../../course/judgment-path.md。</a:t>
             </a:r>
           </a:p>
           <a:p xmlns:a="http://schemas.openxmlformats.org/drawingml/2006/main">
@@ -2273,7 +1548,7 @@
           <a:lstStyle xmlns:a="http://schemas.openxmlformats.org/drawingml/2006/main"/>
           <a:p xmlns:a="http://schemas.openxmlformats.org/drawingml/2006/main">
             <a:r>
-              <a:t>页面：P17 个人实践：启动判断门材料的最小闭环</a:t>
+              <a:t>页面：P17 本人项目：决定、核验与回写</a:t>
             </a:r>
           </a:p>
           <a:p xmlns:a="http://schemas.openxmlformats.org/drawingml/2006/main">
@@ -2283,7 +1558,12 @@
           </a:p>
           <a:p xmlns:a="http://schemas.openxmlformats.org/drawingml/2006/main">
             <a:r>
-              <a:t>讲义位置：本课讲义；见逐页母稿映射表</a:t>
+              <a:t>讲述与校准：</a:t>
+            </a:r>
+          </a:p>
+          <a:p xmlns:a="http://schemas.openxmlformats.org/drawingml/2006/main">
+            <a:r>
+              <a:t>第一段作决定并查证据；中点处理共性卡点；第二段实际回写并验证。对象、预算、预处理、失败保留和评分可见性都变了；4/8 与 1/6 的差不能归因于方案。修复优先在同一 T01–T03 上固定预算与处理，保留所有任务。预算一致不自动使最终评价独立。</a:t>
             </a:r>
           </a:p>
           <a:p xmlns:a="http://schemas.openxmlformats.org/drawingml/2006/main">
@@ -2293,12 +1573,12 @@
           </a:p>
           <a:p xmlns:a="http://schemas.openxmlformats.org/drawingml/2006/main">
             <a:r>
-              <a:t>屏显核对：</a:t>
-            </a:r>
-          </a:p>
-          <a:p xmlns:a="http://schemas.openxmlformats.org/drawingml/2006/main">
-            <a:r>
-              <a:t>课堂最低闭环：</a:t>
+              <a:t>学生动作：</a:t>
+            </a:r>
+          </a:p>
+          <a:p xmlns:a="http://schemas.openxmlformats.org/drawingml/2006/main">
+            <a:r>
+              <a:t>复制个人微型项目起点，实际执行 baseline.py 并评价；保存本人 trace 与输入、实现散列。为记录校验问题冻结比较协议，同伴依说明复现关键步骤。阅读卡回放另作方法示范。</a:t>
             </a:r>
           </a:p>
           <a:p xmlns:a="http://schemas.openxmlformats.org/drawingml/2006/main">
@@ -2308,12 +1588,7 @@
           </a:p>
           <a:p xmlns:a="http://schemas.openxmlformats.org/drawingml/2006/main">
             <a:r>
-              <a:t>1. 选择 baseline，标明类型（朴素/强/消融）与公平性</a:t>
-            </a:r>
-          </a:p>
-          <a:p xmlns:a="http://schemas.openxmlformats.org/drawingml/2006/main">
-            <a:r>
-              <a:t>2. 补足一条可重运行记录：输入版本、环境与配置、执行指令或等价步骤、输出路径、种子或等价条件、实际结果</a:t>
+              <a:t>课堂安排：按本稿下方 90 分钟教学路由安排；此页不另占独立时段。</a:t>
             </a:r>
           </a:p>
           <a:p xmlns:a="http://schemas.openxmlformats.org/drawingml/2006/main">
@@ -2323,7 +1598,12 @@
           </a:p>
           <a:p xmlns:a="http://schemas.openxmlformats.org/drawingml/2006/main">
             <a:r>
-              <a:t>课后补全：七字段规格、J2、反馈处理、已遇失败记录、九项自查与模板迁移。</a:t>
+              <a:t>[Sources]</a:t>
+            </a:r>
+          </a:p>
+          <a:p xmlns:a="http://schemas.openxmlformats.org/drawingml/2006/main">
+            <a:r>
+              <a:t>[project-template.md](../../course/project-template.md) 字段模板；第 7-8 课项目工件。</a:t>
             </a:r>
           </a:p>
           <a:p xmlns:a="http://schemas.openxmlformats.org/drawingml/2006/main">
@@ -2333,107 +1613,7 @@
           </a:p>
           <a:p xmlns:a="http://schemas.openxmlformats.org/drawingml/2006/main">
             <a:r>
-              <a:t>选择顺序：本人真实项目 → 贯穿案例（自由摘要 vs 阅读卡摘要）</a:t>
-            </a:r>
-          </a:p>
-          <a:p xmlns:a="http://schemas.openxmlformats.org/drawingml/2006/main">
-            <a:r>
-              <a:t/>
-            </a:r>
-          </a:p>
-          <a:p xmlns:a="http://schemas.openxmlformats.org/drawingml/2006/main">
-            <a:r>
-              <a:t>写入位置：`experiment-spec.md`、`hypothesis-and-judgment.md`、`peer-review.md`、`failure-log.md`</a:t>
-            </a:r>
-          </a:p>
-          <a:p xmlns:a="http://schemas.openxmlformats.org/drawingml/2006/main">
-            <a:r>
-              <a:t/>
-            </a:r>
-          </a:p>
-          <a:p xmlns:a="http://schemas.openxmlformats.org/drawingml/2006/main">
-            <a:r>
-              <a:t>教师讲述：</a:t>
-            </a:r>
-          </a:p>
-          <a:p xmlns:a="http://schemas.openxmlformats.org/drawingml/2006/main">
-            <a:r>
-              <a:t>没有真实课题的学生沿用贯穿案例，但要求改换问题表述或子问题分解，避免与教师演示完全重复。验收标准：baseline 标明类型与公平性；七字段填满；复现说明齐到种子或等价条件；重复计划与主张强度相匹配；J2 六字段；同伴反馈逐条处理；已遇失败事实与前瞻预案分开；模板迁移 AI 使用记录不丢失；门条件自查逐项标注。教师巡视只处理共同卡点，不逐台排障。</a:t>
-            </a:r>
-          </a:p>
-          <a:p xmlns:a="http://schemas.openxmlformats.org/drawingml/2006/main">
-            <a:r>
-              <a:t/>
-            </a:r>
-          </a:p>
-          <a:p xmlns:a="http://schemas.openxmlformats.org/drawingml/2006/main">
-            <a:r>
-              <a:t>学生动作：</a:t>
-            </a:r>
-          </a:p>
-          <a:p xmlns:a="http://schemas.openxmlformats.org/drawingml/2006/main">
-            <a:r>
-              <a:t>40:00-42:00 说明任务；42:00-60:00 将本页或 P18 停留在屏幕上，保证完整 20 分钟课堂实践。</a:t>
-            </a:r>
-          </a:p>
-          <a:p xmlns:a="http://schemas.openxmlformats.org/drawingml/2006/main">
-            <a:r>
-              <a:t/>
-            </a:r>
-          </a:p>
-          <a:p xmlns:a="http://schemas.openxmlformats.org/drawingml/2006/main">
-            <a:r>
-              <a:t>来源与边界：</a:t>
-            </a:r>
-          </a:p>
-          <a:p xmlns:a="http://schemas.openxmlformats.org/drawingml/2006/main">
-            <a:r>
-              <a:t>[project-template.md](../../course/project-template.md) 字段模板；第 7-8 课项目工件。</a:t>
-            </a:r>
-          </a:p>
-          <a:p xmlns:a="http://schemas.openxmlformats.org/drawingml/2006/main">
-            <a:r>
-              <a:t/>
-            </a:r>
-          </a:p>
-          <a:p xmlns:a="http://schemas.openxmlformats.org/drawingml/2006/main">
-            <a:r>
-              <a:t>---</a:t>
-            </a:r>
-          </a:p>
-          <a:p xmlns:a="http://schemas.openxmlformats.org/drawingml/2006/main">
-            <a:r>
-              <a:t/>
-            </a:r>
-          </a:p>
-          <a:p xmlns:a="http://schemas.openxmlformats.org/drawingml/2006/main">
-            <a:r>
-              <a:t>[Sources]</a:t>
-            </a:r>
-          </a:p>
-          <a:p xmlns:a="http://schemas.openxmlformats.org/drawingml/2006/main">
-            <a:r>
-              <a:t/>
-            </a:r>
-          </a:p>
-          <a:p xmlns:a="http://schemas.openxmlformats.org/drawingml/2006/main">
-            <a:r>
-              <a:t>- 本课 handout.md 与 slides.md</a:t>
-            </a:r>
-          </a:p>
-          <a:p xmlns:a="http://schemas.openxmlformats.org/drawingml/2006/main">
-            <a:r>
-              <a:t/>
-            </a:r>
-          </a:p>
-          <a:p xmlns:a="http://schemas.openxmlformats.org/drawingml/2006/main">
-            <a:r>
-              <a:t>- ../../course/reading-card-case.md</a:t>
-            </a:r>
-          </a:p>
-          <a:p xmlns:a="http://schemas.openxmlformats.org/drawingml/2006/main">
-            <a:r>
-              <a:t/>
+              <a:t>本课 handout.md、judgment-task.md；../../course/judgment-path.md。教学构造仅用于方法判断；本人结果以实际记录为准。</a:t>
             </a:r>
           </a:p>
           <a:p xmlns:a="http://schemas.openxmlformats.org/drawingml/2006/main">
@@ -2518,7 +1698,12 @@
           </a:p>
           <a:p xmlns:a="http://schemas.openxmlformats.org/drawingml/2006/main">
             <a:r>
-              <a:t>讲义位置：handout.md §二、Baseline 选择与公平性；三、实验规格完善；四、可复现性；七、贯穿案例</a:t>
+              <a:t>讲述与校准：</a:t>
+            </a:r>
+          </a:p>
+          <a:p xmlns:a="http://schemas.openxmlformats.org/drawingml/2006/main">
+            <a:r>
+              <a:t>教师包完成只证明学生练过方法。若没有个人项目结果，必须在退出条目写出迁移缺口，不把课堂截图当正式提交证据。</a:t>
             </a:r>
           </a:p>
           <a:p xmlns:a="http://schemas.openxmlformats.org/drawingml/2006/main">
@@ -2528,12 +1713,12 @@
           </a:p>
           <a:p xmlns:a="http://schemas.openxmlformats.org/drawingml/2006/main">
             <a:r>
-              <a:t>屏显核对：</a:t>
-            </a:r>
-          </a:p>
-          <a:p xmlns:a="http://schemas.openxmlformats.org/drawingml/2006/main">
-            <a:r>
-              <a:t>当堂：一项 baseline 公平性修订 + 一条可重运行记录。</a:t>
+              <a:t>学生动作：</a:t>
+            </a:r>
+          </a:p>
+          <a:p xmlns:a="http://schemas.openxmlformats.org/drawingml/2006/main">
+            <a:r>
+              <a:t>记录“已完成什么、本人项目还缺什么、补到哪个文件”。</a:t>
             </a:r>
           </a:p>
           <a:p xmlns:a="http://schemas.openxmlformats.org/drawingml/2006/main">
@@ -2543,7 +1728,7 @@
           </a:p>
           <a:p xmlns:a="http://schemas.openxmlformats.org/drawingml/2006/main">
             <a:r>
-              <a:t>课后：补齐本人实验规格、复现说明、反馈处理与模板迁移。</a:t>
+              <a:t>课堂安排：按本稿下方 90 分钟教学路由安排；此页不另占独立时段。</a:t>
             </a:r>
           </a:p>
           <a:p xmlns:a="http://schemas.openxmlformats.org/drawingml/2006/main">
@@ -2553,7 +1738,12 @@
           </a:p>
           <a:p xmlns:a="http://schemas.openxmlformats.org/drawingml/2006/main">
             <a:r>
-              <a:t>判断门：仍按九项完整条件检查本人项目。</a:t>
+              <a:t>[Sources]</a:t>
+            </a:r>
+          </a:p>
+          <a:p xmlns:a="http://schemas.openxmlformats.org/drawingml/2006/main">
+            <a:r>
+              <a:t>./handout.md；课堂示例与构造数据见 ../../course/reading-card-case.md</a:t>
             </a:r>
           </a:p>
           <a:p xmlns:a="http://schemas.openxmlformats.org/drawingml/2006/main">
@@ -2563,77 +1753,7 @@
           </a:p>
           <a:p xmlns:a="http://schemas.openxmlformats.org/drawingml/2006/main">
             <a:r>
-              <a:t>教师讲述：</a:t>
-            </a:r>
-          </a:p>
-          <a:p xmlns:a="http://schemas.openxmlformats.org/drawingml/2006/main">
-            <a:r>
-              <a:t>教师包完成只证明学生练过方法。若没有个人项目结果，必须在退出条目写出迁移缺口，不把课堂截图当正式提交证据。</a:t>
-            </a:r>
-          </a:p>
-          <a:p xmlns:a="http://schemas.openxmlformats.org/drawingml/2006/main">
-            <a:r>
-              <a:t/>
-            </a:r>
-          </a:p>
-          <a:p xmlns:a="http://schemas.openxmlformats.org/drawingml/2006/main">
-            <a:r>
-              <a:t>学生动作：</a:t>
-            </a:r>
-          </a:p>
-          <a:p xmlns:a="http://schemas.openxmlformats.org/drawingml/2006/main">
-            <a:r>
-              <a:t>记录“已完成什么、本人项目还缺什么、补到哪个文件”。</a:t>
-            </a:r>
-          </a:p>
-          <a:p xmlns:a="http://schemas.openxmlformats.org/drawingml/2006/main">
-            <a:r>
-              <a:t/>
-            </a:r>
-          </a:p>
-          <a:p xmlns:a="http://schemas.openxmlformats.org/drawingml/2006/main">
-            <a:r>
-              <a:t>来源与边界：</a:t>
-            </a:r>
-          </a:p>
-          <a:p xmlns:a="http://schemas.openxmlformats.org/drawingml/2006/main">
-            <a:r>
-              <a:t>./handout.md；课堂示例与构造数据见 ../../course/reading-card-case.md</a:t>
-            </a:r>
-          </a:p>
-          <a:p xmlns:a="http://schemas.openxmlformats.org/drawingml/2006/main">
-            <a:r>
-              <a:t/>
-            </a:r>
-          </a:p>
-          <a:p xmlns:a="http://schemas.openxmlformats.org/drawingml/2006/main">
-            <a:r>
-              <a:t>[Sources]</a:t>
-            </a:r>
-          </a:p>
-          <a:p xmlns:a="http://schemas.openxmlformats.org/drawingml/2006/main">
-            <a:r>
-              <a:t/>
-            </a:r>
-          </a:p>
-          <a:p xmlns:a="http://schemas.openxmlformats.org/drawingml/2006/main">
-            <a:r>
-              <a:t>- 本课 handout.md 与 slides.md</a:t>
-            </a:r>
-          </a:p>
-          <a:p xmlns:a="http://schemas.openxmlformats.org/drawingml/2006/main">
-            <a:r>
-              <a:t/>
-            </a:r>
-          </a:p>
-          <a:p xmlns:a="http://schemas.openxmlformats.org/drawingml/2006/main">
-            <a:r>
-              <a:t>- ../../course/reading-card-case.md</a:t>
-            </a:r>
-          </a:p>
-          <a:p xmlns:a="http://schemas.openxmlformats.org/drawingml/2006/main">
-            <a:r>
-              <a:t/>
+              <a:t>本课 handout.md、judgment-task.md；../../course/judgment-path.md。</a:t>
             </a:r>
           </a:p>
           <a:p xmlns:a="http://schemas.openxmlformats.org/drawingml/2006/main">
@@ -2718,7 +1838,12 @@
           </a:p>
           <a:p xmlns:a="http://schemas.openxmlformats.org/drawingml/2006/main">
             <a:r>
-              <a:t>讲义位置：本课讲义；见逐页母稿映射表</a:t>
+              <a:t>讲述与校准：</a:t>
+            </a:r>
+          </a:p>
+          <a:p xmlns:a="http://schemas.openxmlformats.org/drawingml/2006/main">
+            <a:r>
+              <a:t>每人约 3-5 分钟：一人用 45 秒说明 baseline 选择、实验规格七字段和同伴反馈处理；同伴按门条件逐项检查。反馈不要求立即改写。反馈者不替代作者修改，不形成共同提交。人数为奇数时组成三人组，每人缩短说明时间。重点检查第 1-3、5、7、8 项（本课产出），其他项只确认已存在。</a:t>
             </a:r>
           </a:p>
           <a:p xmlns:a="http://schemas.openxmlformats.org/drawingml/2006/main">
@@ -2728,12 +1853,12 @@
           </a:p>
           <a:p xmlns:a="http://schemas.openxmlformats.org/drawingml/2006/main">
             <a:r>
-              <a:t>屏显核对：</a:t>
-            </a:r>
-          </a:p>
-          <a:p xmlns:a="http://schemas.openxmlformats.org/drawingml/2006/main">
-            <a:r>
-              <a:t>2-3 人互查，按 9 项门条件逐项检查：</a:t>
+              <a:t>学生动作：</a:t>
+            </a:r>
+          </a:p>
+          <a:p xmlns:a="http://schemas.openxmlformats.org/drawingml/2006/main">
+            <a:r>
+              <a:t>按既定同伴互查段 10 分钟执行。</a:t>
             </a:r>
           </a:p>
           <a:p xmlns:a="http://schemas.openxmlformats.org/drawingml/2006/main">
@@ -2743,47 +1868,7 @@
           </a:p>
           <a:p xmlns:a="http://schemas.openxmlformats.org/drawingml/2006/main">
             <a:r>
-              <a:t>1. baseline 标明类型与公平性了吗？还是任意对比组？</a:t>
-            </a:r>
-          </a:p>
-          <a:p xmlns:a="http://schemas.openxmlformats.org/drawingml/2006/main">
-            <a:r>
-              <a:t>2. 复现说明齐到种子了吗？还是只记了环境？</a:t>
-            </a:r>
-          </a:p>
-          <a:p xmlns:a="http://schemas.openxmlformats.org/drawingml/2006/main">
-            <a:r>
-              <a:t>3. 种子或等价复现条件可追溯吗？重复计划能支撑你要声称的强度吗？</a:t>
-            </a:r>
-          </a:p>
-          <a:p xmlns:a="http://schemas.openxmlformats.org/drawingml/2006/main">
-            <a:r>
-              <a:t>4. 停止条件预先写明了吗？还是"跑到显著为止"？</a:t>
-            </a:r>
-          </a:p>
-          <a:p xmlns:a="http://schemas.openxmlformats.org/drawingml/2006/main">
-            <a:r>
-              <a:t>5. J2 六字段完整吗？适用边界写了吗？</a:t>
-            </a:r>
-          </a:p>
-          <a:p xmlns:a="http://schemas.openxmlformats.org/drawingml/2006/main">
-            <a:r>
-              <a:t>6. 同伴反馈是否根据真实理由选择了处理动作，并记录回写位置？</a:t>
-            </a:r>
-          </a:p>
-          <a:p xmlns:a="http://schemas.openxmlformats.org/drawingml/2006/main">
-            <a:r>
-              <a:t>7. 当前最大风险是否有一条直接对应、可执行且保留失败记录的预案？</a:t>
-            </a:r>
-          </a:p>
-          <a:p xmlns:a="http://schemas.openxmlformats.org/drawingml/2006/main">
-            <a:r>
-              <a:t>8. 是否有一条已经发生的失败/放弃备选记录，而不只是未来预案？</a:t>
-            </a:r>
-          </a:p>
-          <a:p xmlns:a="http://schemas.openxmlformats.org/drawingml/2006/main">
-            <a:r>
-              <a:t>9. 模板迁移丢失了 AI 使用记录或伦理说明吗？</a:t>
+              <a:t>课堂安排：按本稿下方 90 分钟教学路由安排；此页不另占独立时段。</a:t>
             </a:r>
           </a:p>
           <a:p xmlns:a="http://schemas.openxmlformats.org/drawingml/2006/main">
@@ -2793,7 +1878,12 @@
           </a:p>
           <a:p xmlns:a="http://schemas.openxmlformats.org/drawingml/2006/main">
             <a:r>
-              <a:t>作者按需选择：采纳／澄清／补证／保留异议／暂缓。不要求五类齐全，也不机械要求拒绝。</a:t>
+              <a:t>[Sources]</a:t>
+            </a:r>
+          </a:p>
+          <a:p xmlns:a="http://schemas.openxmlformats.org/drawingml/2006/main">
+            <a:r>
+              <a:t>同伴反馈为形成性活动，不单独计分，不共同提交（[assignments.md](../../course/assignments.md)）。</a:t>
             </a:r>
           </a:p>
           <a:p xmlns:a="http://schemas.openxmlformats.org/drawingml/2006/main">
@@ -2803,97 +1893,7 @@
           </a:p>
           <a:p xmlns:a="http://schemas.openxmlformats.org/drawingml/2006/main">
             <a:r>
-              <a:t>&gt; 同伴互查只提问题；作者保留修改决定权。</a:t>
-            </a:r>
-          </a:p>
-          <a:p xmlns:a="http://schemas.openxmlformats.org/drawingml/2006/main">
-            <a:r>
-              <a:t/>
-            </a:r>
-          </a:p>
-          <a:p xmlns:a="http://schemas.openxmlformats.org/drawingml/2006/main">
-            <a:r>
-              <a:t>教师讲述：</a:t>
-            </a:r>
-          </a:p>
-          <a:p xmlns:a="http://schemas.openxmlformats.org/drawingml/2006/main">
-            <a:r>
-              <a:t>每人约 3-5 分钟：一人用 45 秒说明 baseline 选择、实验规格七字段和同伴反馈处理；同伴按门条件逐项检查。反馈不要求立即改写。反馈者不替代作者修改，不形成共同提交。人数为奇数时组成三人组，每人缩短说明时间。重点检查第 1-3、5、7、8 项（本课产出），其他项只确认已存在。</a:t>
-            </a:r>
-          </a:p>
-          <a:p xmlns:a="http://schemas.openxmlformats.org/drawingml/2006/main">
-            <a:r>
-              <a:t/>
-            </a:r>
-          </a:p>
-          <a:p xmlns:a="http://schemas.openxmlformats.org/drawingml/2006/main">
-            <a:r>
-              <a:t>学生动作：</a:t>
-            </a:r>
-          </a:p>
-          <a:p xmlns:a="http://schemas.openxmlformats.org/drawingml/2006/main">
-            <a:r>
-              <a:t>60:00-78:00 同伴互查。</a:t>
-            </a:r>
-          </a:p>
-          <a:p xmlns:a="http://schemas.openxmlformats.org/drawingml/2006/main">
-            <a:r>
-              <a:t/>
-            </a:r>
-          </a:p>
-          <a:p xmlns:a="http://schemas.openxmlformats.org/drawingml/2006/main">
-            <a:r>
-              <a:t>来源与边界：</a:t>
-            </a:r>
-          </a:p>
-          <a:p xmlns:a="http://schemas.openxmlformats.org/drawingml/2006/main">
-            <a:r>
-              <a:t>同伴反馈为形成性活动，不单独计分，不共同提交（[assignments.md](../../course/assignments.md)）。</a:t>
-            </a:r>
-          </a:p>
-          <a:p xmlns:a="http://schemas.openxmlformats.org/drawingml/2006/main">
-            <a:r>
-              <a:t/>
-            </a:r>
-          </a:p>
-          <a:p xmlns:a="http://schemas.openxmlformats.org/drawingml/2006/main">
-            <a:r>
-              <a:t>---</a:t>
-            </a:r>
-          </a:p>
-          <a:p xmlns:a="http://schemas.openxmlformats.org/drawingml/2006/main">
-            <a:r>
-              <a:t/>
-            </a:r>
-          </a:p>
-          <a:p xmlns:a="http://schemas.openxmlformats.org/drawingml/2006/main">
-            <a:r>
-              <a:t>[Sources]</a:t>
-            </a:r>
-          </a:p>
-          <a:p xmlns:a="http://schemas.openxmlformats.org/drawingml/2006/main">
-            <a:r>
-              <a:t/>
-            </a:r>
-          </a:p>
-          <a:p xmlns:a="http://schemas.openxmlformats.org/drawingml/2006/main">
-            <a:r>
-              <a:t>- 本课 handout.md 与 slides.md</a:t>
-            </a:r>
-          </a:p>
-          <a:p xmlns:a="http://schemas.openxmlformats.org/drawingml/2006/main">
-            <a:r>
-              <a:t/>
-            </a:r>
-          </a:p>
-          <a:p xmlns:a="http://schemas.openxmlformats.org/drawingml/2006/main">
-            <a:r>
-              <a:t>- ../../course/reading-card-case.md</a:t>
-            </a:r>
-          </a:p>
-          <a:p xmlns:a="http://schemas.openxmlformats.org/drawingml/2006/main">
-            <a:r>
-              <a:t/>
+              <a:t>本课 handout.md、judgment-task.md；../../course/judgment-path.md。</a:t>
             </a:r>
           </a:p>
           <a:p xmlns:a="http://schemas.openxmlformats.org/drawingml/2006/main">
@@ -2978,7 +1978,12 @@
           </a:p>
           <a:p xmlns:a="http://schemas.openxmlformats.org/drawingml/2006/main">
             <a:r>
-              <a:t>讲义位置：本课讲义；见逐页母稿映射表</a:t>
+              <a:t>讲述与校准：</a:t>
+            </a:r>
+          </a:p>
+          <a:p xmlns:a="http://schemas.openxmlformats.org/drawingml/2006/main">
+            <a:r>
+              <a:t>回扣第 7-8 课：机制假设和实验规格草图让"问什么"和"怎么验证"可见，但没有回答"baseline 公不公平""能不能复现""同伴反馈怎么处理"。本课进入阶段六成案与阶段七起始，把草图变成判断门可检查材料。</a:t>
             </a:r>
           </a:p>
           <a:p xmlns:a="http://schemas.openxmlformats.org/drawingml/2006/main">
@@ -2988,32 +1993,12 @@
           </a:p>
           <a:p xmlns:a="http://schemas.openxmlformats.org/drawingml/2006/main">
             <a:r>
-              <a:t>屏显核对：</a:t>
-            </a:r>
-          </a:p>
-          <a:p xmlns:a="http://schemas.openxmlformats.org/drawingml/2006/main">
-            <a:r>
-              <a:t>第 7-8 课已建立：</a:t>
-            </a:r>
-          </a:p>
-          <a:p xmlns:a="http://schemas.openxmlformats.org/drawingml/2006/main">
-            <a:r>
-              <a:t>- 机制假设列表（主假设 + 替代假设 + 反证点）</a:t>
-            </a:r>
-          </a:p>
-          <a:p xmlns:a="http://schemas.openxmlformats.org/drawingml/2006/main">
-            <a:r>
-              <a:t>- 研究判断记录 J1（六字段）</a:t>
-            </a:r>
-          </a:p>
-          <a:p xmlns:a="http://schemas.openxmlformats.org/drawingml/2006/main">
-            <a:r>
-              <a:t>- 实验规格草图（变量清单草案）</a:t>
-            </a:r>
-          </a:p>
-          <a:p xmlns:a="http://schemas.openxmlformats.org/drawingml/2006/main">
-            <a:r>
-              <a:t>- 第 8 课同伴反馈记录</a:t>
+              <a:t>学生动作：</a:t>
+            </a:r>
+          </a:p>
+          <a:p xmlns:a="http://schemas.openxmlformats.org/drawingml/2006/main">
+            <a:r>
+              <a:t>快问：你第 7 课的实验规格草图中，停止条件写了没？随机种子记录了没？只听回答，不评价。</a:t>
             </a:r>
           </a:p>
           <a:p xmlns:a="http://schemas.openxmlformats.org/drawingml/2006/main">
@@ -3023,42 +2008,7 @@
           </a:p>
           <a:p xmlns:a="http://schemas.openxmlformats.org/drawingml/2006/main">
             <a:r>
-              <a:t>仍未解决：</a:t>
-            </a:r>
-          </a:p>
-          <a:p xmlns:a="http://schemas.openxmlformats.org/drawingml/2006/main">
-            <a:r>
-              <a:t>- baseline 选哪个？为什么公平？</a:t>
-            </a:r>
-          </a:p>
-          <a:p xmlns:a="http://schemas.openxmlformats.org/drawingml/2006/main">
-            <a:r>
-              <a:t>- 七字段缺停止条件、随机化、失败预案</a:t>
-            </a:r>
-          </a:p>
-          <a:p xmlns:a="http://schemas.openxmlformats.org/drawingml/2006/main">
-            <a:r>
-              <a:t>- 复现说明缺种子与环境</a:t>
-            </a:r>
-          </a:p>
-          <a:p xmlns:a="http://schemas.openxmlformats.org/drawingml/2006/main">
-            <a:r>
-              <a:t>- 同伴反馈未逐条处理</a:t>
-            </a:r>
-          </a:p>
-          <a:p xmlns:a="http://schemas.openxmlformats.org/drawingml/2006/main">
-            <a:r>
-              <a:t>- 第二条研究判断尚未写</a:t>
-            </a:r>
-          </a:p>
-          <a:p xmlns:a="http://schemas.openxmlformats.org/drawingml/2006/main">
-            <a:r>
-              <a:t>- 已遇执行失败或已放弃备选尚未落档</a:t>
-            </a:r>
-          </a:p>
-          <a:p xmlns:a="http://schemas.openxmlformats.org/drawingml/2006/main">
-            <a:r>
-              <a:t>- 仍在 starter-template，未迁移到 project-template</a:t>
+              <a:t>课堂安排：按本稿下方 90 分钟教学路由安排；此页不另占独立时段。</a:t>
             </a:r>
           </a:p>
           <a:p xmlns:a="http://schemas.openxmlformats.org/drawingml/2006/main">
@@ -3068,7 +2018,12 @@
           </a:p>
           <a:p xmlns:a="http://schemas.openxmlformats.org/drawingml/2006/main">
             <a:r>
-              <a:t>&gt; 草图能跑≠能复现；判断门检查的是可复现。</a:t>
+              <a:t>[Sources]</a:t>
+            </a:r>
+          </a:p>
+          <a:p xmlns:a="http://schemas.openxmlformats.org/drawingml/2006/main">
+            <a:r>
+              <a:t>回扣第 7 课讲义 §四与第 8 课方案分享记录；[AGENTS.md](../../AGENTS.md) 证据标准。</a:t>
             </a:r>
           </a:p>
           <a:p xmlns:a="http://schemas.openxmlformats.org/drawingml/2006/main">
@@ -3078,142 +2033,7 @@
           </a:p>
           <a:p xmlns:a="http://schemas.openxmlformats.org/drawingml/2006/main">
             <a:r>
-              <a:t>教师讲述：</a:t>
-            </a:r>
-          </a:p>
-          <a:p xmlns:a="http://schemas.openxmlformats.org/drawingml/2006/main">
-            <a:r>
-              <a:t>回扣第 7-8 课：机制假设和实验规格草图让"问什么"和"怎么验证"可见，但没有回答"baseline 公不公平""能不能复现""同伴反馈怎么处理"。本课进入阶段六成案与阶段七起始，把草图变成判断门可检查材料。</a:t>
-            </a:r>
-          </a:p>
-          <a:p xmlns:a="http://schemas.openxmlformats.org/drawingml/2006/main">
-            <a:r>
-              <a:t/>
-            </a:r>
-          </a:p>
-          <a:p xmlns:a="http://schemas.openxmlformats.org/drawingml/2006/main">
-            <a:r>
-              <a:t>学生动作：</a:t>
-            </a:r>
-          </a:p>
-          <a:p xmlns:a="http://schemas.openxmlformats.org/drawingml/2006/main">
-            <a:r>
-              <a:t>快问：你第 7 课的实验规格草图中，停止条件写了没？随机种子记录了没？只听回答，不评价。</a:t>
-            </a:r>
-          </a:p>
-          <a:p xmlns:a="http://schemas.openxmlformats.org/drawingml/2006/main">
-            <a:r>
-              <a:t/>
-            </a:r>
-          </a:p>
-          <a:p xmlns:a="http://schemas.openxmlformats.org/drawingml/2006/main">
-            <a:r>
-              <a:t>本课板书、诊断与串词：</a:t>
-            </a:r>
-          </a:p>
-          <a:p xmlns:a="http://schemas.openxmlformats.org/drawingml/2006/main">
-            <a:r>
-              <a:t>本节替换同类口头提示，不增加既有时段。开场诊断嵌入现有开场/回顾，后续再沿原实践时段操作。</a:t>
-            </a:r>
-          </a:p>
-          <a:p xmlns:a="http://schemas.openxmlformats.org/drawingml/2006/main">
-            <a:r>
-              <a:t/>
-            </a:r>
-          </a:p>
-          <a:p xmlns:a="http://schemas.openxmlformats.org/drawingml/2006/main">
-            <a:r>
-              <a:t>- **板书主线**：输入 → 输出 → 条件标注 → 分子/分母 → 记录。</a:t>
-            </a:r>
-          </a:p>
-          <a:p xmlns:a="http://schemas.openxmlformats.org/drawingml/2006/main">
-            <a:r>
-              <a:t>- **诊断问题**：代码跑出0.5就证明语义正确吗？</a:t>
-            </a:r>
-          </a:p>
-          <a:p xmlns:a="http://schemas.openxmlformats.org/drawingml/2006/main">
-            <a:r>
-              <a:t>- **预期回答**：不；工程复现和语义核验分工不同。</a:t>
-            </a:r>
-          </a:p>
-          <a:p xmlns:a="http://schemas.openxmlformats.org/drawingml/2006/main">
-            <a:r>
-              <a:t>- **常见误答后的追问**：让学生从T01找到一项保留的输出原句，再看汇总。</a:t>
-            </a:r>
-          </a:p>
-          <a:p xmlns:a="http://schemas.openxmlformats.org/drawingml/2006/main">
-            <a:r>
-              <a:t>- **过渡串词**：“设计与记录明确后，才能给执行工具限定任务。”</a:t>
-            </a:r>
-          </a:p>
-          <a:p xmlns:a="http://schemas.openxmlformats.org/drawingml/2006/main">
-            <a:r>
-              <a:t>- **当堂最小产出**：一项baseline修订与一条可重运行记录。</a:t>
-            </a:r>
-          </a:p>
-          <a:p xmlns:a="http://schemas.openxmlformats.org/drawingml/2006/main">
-            <a:r>
-              <a:t>- **退出记录**：写“已完成的动作、本人项目仍缺的证据/工件、下次补齐位置”。使用教师包时标明课堂方法练习，不能据此宣称本人研究门通过；正式提交课次仍为第 6、9、13、16 课。</a:t>
-            </a:r>
-          </a:p>
-          <a:p xmlns:a="http://schemas.openxmlformats.org/drawingml/2006/main">
-            <a:r>
-              <a:t/>
-            </a:r>
-          </a:p>
-          <a:p xmlns:a="http://schemas.openxmlformats.org/drawingml/2006/main">
-            <a:r>
-              <a:t>来源与边界：</a:t>
-            </a:r>
-          </a:p>
-          <a:p xmlns:a="http://schemas.openxmlformats.org/drawingml/2006/main">
-            <a:r>
-              <a:t>回扣第 7 课讲义 §四与第 8 课方案分享记录；[AGENTS.md](../../AGENTS.md) 证据标准。</a:t>
-            </a:r>
-          </a:p>
-          <a:p xmlns:a="http://schemas.openxmlformats.org/drawingml/2006/main">
-            <a:r>
-              <a:t/>
-            </a:r>
-          </a:p>
-          <a:p xmlns:a="http://schemas.openxmlformats.org/drawingml/2006/main">
-            <a:r>
-              <a:t>---</a:t>
-            </a:r>
-          </a:p>
-          <a:p xmlns:a="http://schemas.openxmlformats.org/drawingml/2006/main">
-            <a:r>
-              <a:t/>
-            </a:r>
-          </a:p>
-          <a:p xmlns:a="http://schemas.openxmlformats.org/drawingml/2006/main">
-            <a:r>
-              <a:t>[Sources]</a:t>
-            </a:r>
-          </a:p>
-          <a:p xmlns:a="http://schemas.openxmlformats.org/drawingml/2006/main">
-            <a:r>
-              <a:t/>
-            </a:r>
-          </a:p>
-          <a:p xmlns:a="http://schemas.openxmlformats.org/drawingml/2006/main">
-            <a:r>
-              <a:t>- 本课 handout.md 与 slides.md</a:t>
-            </a:r>
-          </a:p>
-          <a:p xmlns:a="http://schemas.openxmlformats.org/drawingml/2006/main">
-            <a:r>
-              <a:t/>
-            </a:r>
-          </a:p>
-          <a:p xmlns:a="http://schemas.openxmlformats.org/drawingml/2006/main">
-            <a:r>
-              <a:t>- ../../course/reading-card-case.md</a:t>
-            </a:r>
-          </a:p>
-          <a:p xmlns:a="http://schemas.openxmlformats.org/drawingml/2006/main">
-            <a:r>
-              <a:t/>
+              <a:t>本课 handout.md、judgment-task.md；../../course/judgment-path.md。</a:t>
             </a:r>
           </a:p>
           <a:p xmlns:a="http://schemas.openxmlformats.org/drawingml/2006/main">
@@ -3298,7 +2118,12 @@
           </a:p>
           <a:p xmlns:a="http://schemas.openxmlformats.org/drawingml/2006/main">
             <a:r>
-              <a:t>讲义位置：本课讲义；见逐页母稿映射表</a:t>
+              <a:t>讲述与校准：</a:t>
+            </a:r>
+          </a:p>
+          <a:p xmlns:a="http://schemas.openxmlformats.org/drawingml/2006/main">
+            <a:r>
+              <a:t>回收 baseline、公平性、实验规格、复现记录和判断门的关系。本页不替代下一页提交说明。</a:t>
             </a:r>
           </a:p>
           <a:p xmlns:a="http://schemas.openxmlformats.org/drawingml/2006/main">
@@ -3308,12 +2133,12 @@
           </a:p>
           <a:p xmlns:a="http://schemas.openxmlformats.org/drawingml/2006/main">
             <a:r>
-              <a:t>屏显核对：</a:t>
-            </a:r>
-          </a:p>
-          <a:p xmlns:a="http://schemas.openxmlformats.org/drawingml/2006/main">
-            <a:r>
-              <a:t>公平 baseline → 实验规格 → 复现记录 → 判断门</a:t>
+              <a:t>学生动作：</a:t>
+            </a:r>
+          </a:p>
+          <a:p xmlns:a="http://schemas.openxmlformats.org/drawingml/2006/main">
+            <a:r>
+              <a:t>学生指出自己最可能缺失的是公平性、停止条件还是复现字段。</a:t>
             </a:r>
           </a:p>
           <a:p xmlns:a="http://schemas.openxmlformats.org/drawingml/2006/main">
@@ -3323,22 +2148,7 @@
           </a:p>
           <a:p xmlns:a="http://schemas.openxmlformats.org/drawingml/2006/main">
             <a:r>
-              <a:t>- 比较对象与预算必须可解释；</a:t>
-            </a:r>
-          </a:p>
-          <a:p xmlns:a="http://schemas.openxmlformats.org/drawingml/2006/main">
-            <a:r>
-              <a:t>- 假设、变量、指标、对照与停止条件齐全；</a:t>
-            </a:r>
-          </a:p>
-          <a:p xmlns:a="http://schemas.openxmlformats.org/drawingml/2006/main">
-            <a:r>
-              <a:t>- 环境、配置、随机种子与数据可追溯；</a:t>
-            </a:r>
-          </a:p>
-          <a:p xmlns:a="http://schemas.openxmlformats.org/drawingml/2006/main">
-            <a:r>
-              <a:t>- 把规格、判断、反馈与风险绑定到当前版本。</a:t>
+              <a:t>课堂安排：按本稿下方 90 分钟教学路由安排；此页不另占独立时段。</a:t>
             </a:r>
           </a:p>
           <a:p xmlns:a="http://schemas.openxmlformats.org/drawingml/2006/main">
@@ -3348,7 +2158,12 @@
           </a:p>
           <a:p xmlns:a="http://schemas.openxmlformats.org/drawingml/2006/main">
             <a:r>
-              <a:t>&gt; 能运行不等于公平、可复现或足以支持研究判断。</a:t>
+              <a:t>[Sources]</a:t>
+            </a:r>
+          </a:p>
+          <a:p xmlns:a="http://schemas.openxmlformats.org/drawingml/2006/main">
+            <a:r>
+              <a:t>讲义 §二-§六；[assignments.md](../../course/assignments.md) Checkpoint 2。</a:t>
             </a:r>
           </a:p>
           <a:p xmlns:a="http://schemas.openxmlformats.org/drawingml/2006/main">
@@ -3358,87 +2173,7 @@
           </a:p>
           <a:p xmlns:a="http://schemas.openxmlformats.org/drawingml/2006/main">
             <a:r>
-              <a:t>教师讲述：</a:t>
-            </a:r>
-          </a:p>
-          <a:p xmlns:a="http://schemas.openxmlformats.org/drawingml/2006/main">
-            <a:r>
-              <a:t>回收 baseline、公平性、实验规格、复现记录和判断门的关系。本页不替代下一页提交说明。</a:t>
-            </a:r>
-          </a:p>
-          <a:p xmlns:a="http://schemas.openxmlformats.org/drawingml/2006/main">
-            <a:r>
-              <a:t/>
-            </a:r>
-          </a:p>
-          <a:p xmlns:a="http://schemas.openxmlformats.org/drawingml/2006/main">
-            <a:r>
-              <a:t>学生动作：</a:t>
-            </a:r>
-          </a:p>
-          <a:p xmlns:a="http://schemas.openxmlformats.org/drawingml/2006/main">
-            <a:r>
-              <a:t>学生指出自己最可能缺失的是公平性、停止条件还是复现字段。</a:t>
-            </a:r>
-          </a:p>
-          <a:p xmlns:a="http://schemas.openxmlformats.org/drawingml/2006/main">
-            <a:r>
-              <a:t/>
-            </a:r>
-          </a:p>
-          <a:p xmlns:a="http://schemas.openxmlformats.org/drawingml/2006/main">
-            <a:r>
-              <a:t>来源与边界：</a:t>
-            </a:r>
-          </a:p>
-          <a:p xmlns:a="http://schemas.openxmlformats.org/drawingml/2006/main">
-            <a:r>
-              <a:t>讲义 §二-§六；[assignments.md](../../course/assignments.md) Checkpoint 2。</a:t>
-            </a:r>
-          </a:p>
-          <a:p xmlns:a="http://schemas.openxmlformats.org/drawingml/2006/main">
-            <a:r>
-              <a:t/>
-            </a:r>
-          </a:p>
-          <a:p xmlns:a="http://schemas.openxmlformats.org/drawingml/2006/main">
-            <a:r>
-              <a:t>---</a:t>
-            </a:r>
-          </a:p>
-          <a:p xmlns:a="http://schemas.openxmlformats.org/drawingml/2006/main">
-            <a:r>
-              <a:t/>
-            </a:r>
-          </a:p>
-          <a:p xmlns:a="http://schemas.openxmlformats.org/drawingml/2006/main">
-            <a:r>
-              <a:t>[Sources]</a:t>
-            </a:r>
-          </a:p>
-          <a:p xmlns:a="http://schemas.openxmlformats.org/drawingml/2006/main">
-            <a:r>
-              <a:t/>
-            </a:r>
-          </a:p>
-          <a:p xmlns:a="http://schemas.openxmlformats.org/drawingml/2006/main">
-            <a:r>
-              <a:t>- 本课 handout.md 与 slides.md</a:t>
-            </a:r>
-          </a:p>
-          <a:p xmlns:a="http://schemas.openxmlformats.org/drawingml/2006/main">
-            <a:r>
-              <a:t/>
-            </a:r>
-          </a:p>
-          <a:p xmlns:a="http://schemas.openxmlformats.org/drawingml/2006/main">
-            <a:r>
-              <a:t>- ../../course/reading-card-case.md</a:t>
-            </a:r>
-          </a:p>
-          <a:p xmlns:a="http://schemas.openxmlformats.org/drawingml/2006/main">
-            <a:r>
-              <a:t/>
+              <a:t>本课 handout.md、judgment-task.md；../../course/judgment-path.md。</a:t>
             </a:r>
           </a:p>
           <a:p xmlns:a="http://schemas.openxmlformats.org/drawingml/2006/main">
@@ -3513,7 +2248,7 @@
           <a:lstStyle xmlns:a="http://schemas.openxmlformats.org/drawingml/2006/main"/>
           <a:p xmlns:a="http://schemas.openxmlformats.org/drawingml/2006/main">
             <a:r>
-              <a:t>页面：P21 提交当前项目版本，并把规格交给第 10 课</a:t>
+              <a:t>页面：P21 保留本课决定，准备下一课输入</a:t>
             </a:r>
           </a:p>
           <a:p xmlns:a="http://schemas.openxmlformats.org/drawingml/2006/main">
@@ -3523,7 +2258,12 @@
           </a:p>
           <a:p xmlns:a="http://schemas.openxmlformats.org/drawingml/2006/main">
             <a:r>
-              <a:t>讲义位置：本课讲义；见逐页母稿映射表</a:t>
+              <a:t>讲述与校准：</a:t>
+            </a:r>
+          </a:p>
+          <a:p xmlns:a="http://schemas.openxmlformats.org/drawingml/2006/main">
+            <a:r>
+              <a:t>15 分钟整理；45 分钟修订并提交判断门，主要运行在课堂完成。 每课课外最多60分钟；详见讲义。</a:t>
             </a:r>
           </a:p>
           <a:p xmlns:a="http://schemas.openxmlformats.org/drawingml/2006/main">
@@ -3533,17 +2273,12 @@
           </a:p>
           <a:p xmlns:a="http://schemas.openxmlformats.org/drawingml/2006/main">
             <a:r>
-              <a:t>屏显核对：</a:t>
-            </a:r>
-          </a:p>
-          <a:p xmlns:a="http://schemas.openxmlformats.org/drawingml/2006/main">
-            <a:r>
-              <a:t>**提交方式**：</a:t>
-            </a:r>
-          </a:p>
-          <a:p xmlns:a="http://schemas.openxmlformats.org/drawingml/2006/main">
-            <a:r>
-              <a:t>提交指向当前个人项目版本的链接、tag 或压缩包。不重复制作与项目仓库分离的汇报文档。</a:t>
+              <a:t>学生动作：</a:t>
+            </a:r>
+          </a:p>
+          <a:p xmlns:a="http://schemas.openxmlformats.org/drawingml/2006/main">
+            <a:r>
+              <a:t>定位实际工件与下一项动作；按既定预算收口。</a:t>
             </a:r>
           </a:p>
           <a:p xmlns:a="http://schemas.openxmlformats.org/drawingml/2006/main">
@@ -3553,12 +2288,7 @@
           </a:p>
           <a:p xmlns:a="http://schemas.openxmlformats.org/drawingml/2006/main">
             <a:r>
-              <a:t>**未通过时**：</a:t>
-            </a:r>
-          </a:p>
-          <a:p xmlns:a="http://schemas.openxmlformats.org/drawingml/2006/main">
-            <a:r>
-              <a:t>回到对应工件修改，一周内重新检查。根因定位细项见教师备注和讲义。</a:t>
+              <a:t>课堂安排：按本稿下方 90 分钟教学路由安排；此页不另占独立时段。</a:t>
             </a:r>
           </a:p>
           <a:p xmlns:a="http://schemas.openxmlformats.org/drawingml/2006/main">
@@ -3568,12 +2298,37 @@
           </a:p>
           <a:p xmlns:a="http://schemas.openxmlformats.org/drawingml/2006/main">
             <a:r>
-              <a:t>**第 10 课输入**：</a:t>
-            </a:r>
-          </a:p>
-          <a:p xmlns:a="http://schemas.openxmlformats.org/drawingml/2006/main">
-            <a:r>
-              <a:t>交付当前 baseline 判断与可重运行记录，标出“拟用 Agent 的步骤”和“必须人工确认的步骤”。</a:t>
+              <a:t>[Sources]</a:t>
+            </a:r>
+          </a:p>
+          <a:p xmlns:a="http://schemas.openxmlformats.org/drawingml/2006/main">
+            <a:r>
+              <a:t>- Wilson, G. et al. *PLOS Computational Biology* 13(6):e1005510 (2017). DOI: [10.1371/journal.pcbi.1005510](https://journals.plos.org/ploscompbiol/article?id=10.1371/journal.pcbi.1005510)。</a:t>
+            </a:r>
+          </a:p>
+          <a:p xmlns:a="http://schemas.openxmlformats.org/drawingml/2006/main">
+            <a:r>
+              <a:t>- Pineau, J. et al. *JMLR* 22(164), 1–20 (2021). [JMLR 正式页面](https://www.jmlr.org/papers/v22/20-303.html)。</a:t>
+            </a:r>
+          </a:p>
+          <a:p xmlns:a="http://schemas.openxmlformats.org/drawingml/2006/main">
+            <a:r>
+              <a:t>- ACM. *Artifact Review and Badging, Version 1.1* (2020). [官方页面](https://www.acm.org/publications/policies/artifact-review-and-badging-current)。</a:t>
+            </a:r>
+          </a:p>
+          <a:p xmlns:a="http://schemas.openxmlformats.org/drawingml/2006/main">
+            <a:r>
+              <a:t>- Bouthillier, X. et al. *MLSys* 3 (2021). [MLSys 正式页面](https://proceedings.mlsys.org/paper_files/paper/2021/hash/0184b0cd3cfb185989f858a1d9f5c1eb-Abstract.html)。</a:t>
+            </a:r>
+          </a:p>
+          <a:p xmlns:a="http://schemas.openxmlformats.org/drawingml/2006/main">
+            <a:r>
+              <a:t>- 阅读规则见 [reading-list.md](../../course/reading-list.md)。</a:t>
+            </a:r>
+          </a:p>
+          <a:p xmlns:a="http://schemas.openxmlformats.org/drawingml/2006/main">
+            <a:r>
+              <a:t>- 判断门条件见 [assignments.md](../../course/assignments.md) Checkpoint 2。</a:t>
             </a:r>
           </a:p>
           <a:p xmlns:a="http://schemas.openxmlformats.org/drawingml/2006/main">
@@ -3583,167 +2338,7 @@
           </a:p>
           <a:p xmlns:a="http://schemas.openxmlformats.org/drawingml/2006/main">
             <a:r>
-              <a:t>**退出卡**：</a:t>
-            </a:r>
-          </a:p>
-          <a:p xmlns:a="http://schemas.openxmlformats.org/drawingml/2006/main">
-            <a:r>
-              <a:t>哪一项门条件最可能不通过？你的下一个最小动作是什么？</a:t>
-            </a:r>
-          </a:p>
-          <a:p xmlns:a="http://schemas.openxmlformats.org/drawingml/2006/main">
-            <a:r>
-              <a:t/>
-            </a:r>
-          </a:p>
-          <a:p xmlns:a="http://schemas.openxmlformats.org/drawingml/2006/main">
-            <a:r>
-              <a:t>&gt; 本课产出（experiment-spec 七字段 + 复现说明 + J2 + 同伴反馈处理 + 已遇失败记录）是第 10 课的直接输入。实验规格中"哪些步骤拟用 Agent、哪些步骤必须人工"将在第 10 课展开。课后提交判断门材料包。</a:t>
-            </a:r>
-          </a:p>
-          <a:p xmlns:a="http://schemas.openxmlformats.org/drawingml/2006/main">
-            <a:r>
-              <a:t/>
-            </a:r>
-          </a:p>
-          <a:p xmlns:a="http://schemas.openxmlformats.org/drawingml/2006/main">
-            <a:r>
-              <a:t>教师讲述：</a:t>
-            </a:r>
-          </a:p>
-          <a:p xmlns:a="http://schemas.openxmlformats.org/drawingml/2006/main">
-            <a:r>
-              <a:t>回扣本课目标与课后补全边界。根因定位细项、阅读清单与精读卡保存要求不再投屏，由教师口头说明并引导学生回到讲义和 reading-list.md。核心阅读为 Wilson et al.；Pineau et al.、ACM Artifact Review and Badging v1.1 与 Bouthillier et al. 为任选。</a:t>
-            </a:r>
-          </a:p>
-          <a:p xmlns:a="http://schemas.openxmlformats.org/drawingml/2006/main">
-            <a:r>
-              <a:t/>
-            </a:r>
-          </a:p>
-          <a:p xmlns:a="http://schemas.openxmlformats.org/drawingml/2006/main">
-            <a:r>
-              <a:t>学生动作：</a:t>
-            </a:r>
-          </a:p>
-          <a:p xmlns:a="http://schemas.openxmlformats.org/drawingml/2006/main">
-            <a:r>
-              <a:t>学生提交退出卡或保存在个人项目。教师收集共性问题，用于第 10 课前调整。</a:t>
-            </a:r>
-          </a:p>
-          <a:p xmlns:a="http://schemas.openxmlformats.org/drawingml/2006/main">
-            <a:r>
-              <a:t/>
-            </a:r>
-          </a:p>
-          <a:p xmlns:a="http://schemas.openxmlformats.org/drawingml/2006/main">
-            <a:r>
-              <a:t>来源与边界：</a:t>
-            </a:r>
-          </a:p>
-          <a:p xmlns:a="http://schemas.openxmlformats.org/drawingml/2006/main">
-            <a:r>
-              <a:t>- Wilson, G. et al. *PLOS Computational Biology* 13(6):e1005510 (2017). DOI: [10.1371/journal.pcbi.1005510](https://journals.plos.org/ploscompbiol/article?id=10.1371/journal.pcbi.1005510)。</a:t>
-            </a:r>
-          </a:p>
-          <a:p xmlns:a="http://schemas.openxmlformats.org/drawingml/2006/main">
-            <a:r>
-              <a:t>- Pineau, J. et al. *JMLR* 22(164), 1–20 (2021). [JMLR 正式页面](https://www.jmlr.org/papers/v22/20-303.html)。</a:t>
-            </a:r>
-          </a:p>
-          <a:p xmlns:a="http://schemas.openxmlformats.org/drawingml/2006/main">
-            <a:r>
-              <a:t>- ACM. *Artifact Review and Badging, Version 1.1* (2020). [官方页面](https://www.acm.org/publications/policies/artifact-review-and-badging-current)。</a:t>
-            </a:r>
-          </a:p>
-          <a:p xmlns:a="http://schemas.openxmlformats.org/drawingml/2006/main">
-            <a:r>
-              <a:t>- Bouthillier, X. et al. *MLSys* 3 (2021). [MLSys 正式页面](https://proceedings.mlsys.org/paper_files/paper/2021/hash/0184b0cd3cfb185989f858a1d9f5c1eb-Abstract.html)。</a:t>
-            </a:r>
-          </a:p>
-          <a:p xmlns:a="http://schemas.openxmlformats.org/drawingml/2006/main">
-            <a:r>
-              <a:t>- 阅读规则见 [reading-list.md](../../course/reading-list.md)。</a:t>
-            </a:r>
-          </a:p>
-          <a:p xmlns:a="http://schemas.openxmlformats.org/drawingml/2006/main">
-            <a:r>
-              <a:t>- 判断门条件见 [assignments.md](../../course/assignments.md) Checkpoint 2。</a:t>
-            </a:r>
-          </a:p>
-          <a:p xmlns:a="http://schemas.openxmlformats.org/drawingml/2006/main">
-            <a:r>
-              <a:t/>
-            </a:r>
-          </a:p>
-          <a:p xmlns:a="http://schemas.openxmlformats.org/drawingml/2006/main">
-            <a:r>
-              <a:t>[Sources]</a:t>
-            </a:r>
-          </a:p>
-          <a:p xmlns:a="http://schemas.openxmlformats.org/drawingml/2006/main">
-            <a:r>
-              <a:t/>
-            </a:r>
-          </a:p>
-          <a:p xmlns:a="http://schemas.openxmlformats.org/drawingml/2006/main">
-            <a:r>
-              <a:t>- https://journals.plos.org/ploscompbiol/article?id=10.1371/journal.pcbi.1005510</a:t>
-            </a:r>
-          </a:p>
-          <a:p xmlns:a="http://schemas.openxmlformats.org/drawingml/2006/main">
-            <a:r>
-              <a:t/>
-            </a:r>
-          </a:p>
-          <a:p xmlns:a="http://schemas.openxmlformats.org/drawingml/2006/main">
-            <a:r>
-              <a:t>- https://www.jmlr.org/papers/v22/20-303.html</a:t>
-            </a:r>
-          </a:p>
-          <a:p xmlns:a="http://schemas.openxmlformats.org/drawingml/2006/main">
-            <a:r>
-              <a:t/>
-            </a:r>
-          </a:p>
-          <a:p xmlns:a="http://schemas.openxmlformats.org/drawingml/2006/main">
-            <a:r>
-              <a:t>- https://www.acm.org/publications/policies/artifact-review-and-badging-current</a:t>
-            </a:r>
-          </a:p>
-          <a:p xmlns:a="http://schemas.openxmlformats.org/drawingml/2006/main">
-            <a:r>
-              <a:t/>
-            </a:r>
-          </a:p>
-          <a:p xmlns:a="http://schemas.openxmlformats.org/drawingml/2006/main">
-            <a:r>
-              <a:t>- https://proceedings.mlsys.org/paper_files/paper/2021/hash/0184b0cd3cfb185989f858a1d9f5c1eb-Abstract.html</a:t>
-            </a:r>
-          </a:p>
-          <a:p xmlns:a="http://schemas.openxmlformats.org/drawingml/2006/main">
-            <a:r>
-              <a:t/>
-            </a:r>
-          </a:p>
-          <a:p xmlns:a="http://schemas.openxmlformats.org/drawingml/2006/main">
-            <a:r>
-              <a:t>- 本课 handout.md 与 slides.md</a:t>
-            </a:r>
-          </a:p>
-          <a:p xmlns:a="http://schemas.openxmlformats.org/drawingml/2006/main">
-            <a:r>
-              <a:t/>
-            </a:r>
-          </a:p>
-          <a:p xmlns:a="http://schemas.openxmlformats.org/drawingml/2006/main">
-            <a:r>
-              <a:t>- ../../course/reading-card-case.md</a:t>
-            </a:r>
-          </a:p>
-          <a:p xmlns:a="http://schemas.openxmlformats.org/drawingml/2006/main">
-            <a:r>
-              <a:t/>
+              <a:t>本课 handout.md、judgment-task.md；../../course/judgment-path.md。教学构造仅用于方法判断；本人结果以实际记录为准。</a:t>
             </a:r>
           </a:p>
           <a:p xmlns:a="http://schemas.openxmlformats.org/drawingml/2006/main">
@@ -3818,7 +2413,7 @@
           <a:lstStyle xmlns:a="http://schemas.openxmlformats.org/drawingml/2006/main"/>
           <a:p xmlns:a="http://schemas.openxmlformats.org/drawingml/2006/main">
             <a:r>
-              <a:t>页面：P03 本课产出是可复现的判断门材料初版</a:t>
+              <a:t>页面：P03 这个提升可以比较吗</a:t>
             </a:r>
           </a:p>
           <a:p xmlns:a="http://schemas.openxmlformats.org/drawingml/2006/main">
@@ -3828,7 +2423,12 @@
           </a:p>
           <a:p xmlns:a="http://schemas.openxmlformats.org/drawingml/2006/main">
             <a:r>
-              <a:t>讲义位置：本课讲义；见逐页母稿映射表</a:t>
+              <a:t>讲述与校准：</a:t>
+            </a:r>
+          </a:p>
+          <a:p xmlns:a="http://schemas.openxmlformats.org/drawingml/2006/main">
+            <a:r>
+              <a:t>先独立作答，再同伴比较；以下依据只在校准时揭示。</a:t>
             </a:r>
           </a:p>
           <a:p xmlns:a="http://schemas.openxmlformats.org/drawingml/2006/main">
@@ -3838,12 +2438,7 @@
           </a:p>
           <a:p xmlns:a="http://schemas.openxmlformats.org/drawingml/2006/main">
             <a:r>
-              <a:t>屏显核对：</a:t>
-            </a:r>
-          </a:p>
-          <a:p xmlns:a="http://schemas.openxmlformats.org/drawingml/2006/main">
-            <a:r>
-              <a:t>完成本课后，你能：</a:t>
+              <a:t>对象、预算、预处理、失败保留和评分可见性都变了；4/8 与 1/6 的差不能归因于方案。修复优先在同一 T01–T03 上固定预算与处理，保留所有任务。预算一致不自动使最终评价独立。</a:t>
             </a:r>
           </a:p>
           <a:p xmlns:a="http://schemas.openxmlformats.org/drawingml/2006/main">
@@ -3853,37 +2448,12 @@
           </a:p>
           <a:p xmlns:a="http://schemas.openxmlformats.org/drawingml/2006/main">
             <a:r>
-              <a:t>1. 选择一个可解释、公平且能在课程周期内运行的 baseline；</a:t>
-            </a:r>
-          </a:p>
-          <a:p xmlns:a="http://schemas.openxmlformats.org/drawingml/2006/main">
-            <a:r>
-              <a:t>2. 把第 7 课实验规格草图补全为七字段完整规格；</a:t>
-            </a:r>
-          </a:p>
-          <a:p xmlns:a="http://schemas.openxmlformats.org/drawingml/2006/main">
-            <a:r>
-              <a:t>3. 记录使实验可复现的最小集合（环境、配置、种子、数据、代码、结果）；</a:t>
-            </a:r>
-          </a:p>
-          <a:p xmlns:a="http://schemas.openxmlformats.org/drawingml/2006/main">
-            <a:r>
-              <a:t>4. 处理机器学习实验的方差来源，避免把单次运行写成结论；</a:t>
-            </a:r>
-          </a:p>
-          <a:p xmlns:a="http://schemas.openxmlformats.org/drawingml/2006/main">
-            <a:r>
-              <a:t>5. 把第 8 课同伴反馈按真实处理动作归档，记录理由与位置；</a:t>
-            </a:r>
-          </a:p>
-          <a:p xmlns:a="http://schemas.openxmlformats.org/drawingml/2006/main">
-            <a:r>
-              <a:t>6. 按课后操作指引从 starter-template 迁移到 project-template，不丢失 AI 使用记录和伦理说明；</a:t>
-            </a:r>
-          </a:p>
-          <a:p xmlns:a="http://schemas.openxmlformats.org/drawingml/2006/main">
-            <a:r>
-              <a:t>7. 对照判断门九项条件完成提交前自查。</a:t>
+              <a:t>学生动作：</a:t>
+            </a:r>
+          </a:p>
+          <a:p xmlns:a="http://schemas.openxmlformats.org/drawingml/2006/main">
+            <a:r>
+              <a:t>先独立写决定和证据，后同伴比较；校准后再回写。</a:t>
             </a:r>
           </a:p>
           <a:p xmlns:a="http://schemas.openxmlformats.org/drawingml/2006/main">
@@ -3893,7 +2463,7 @@
           </a:p>
           <a:p xmlns:a="http://schemas.openxmlformats.org/drawingml/2006/main">
             <a:r>
-              <a:t>课堂最低产出：一条公平 baseline 判断 + 一条可重运行记录。</a:t>
+              <a:t>课堂安排：按本稿下方 90 分钟教学路由安排；此页不另占独立时段。</a:t>
             </a:r>
           </a:p>
           <a:p xmlns:a="http://schemas.openxmlformats.org/drawingml/2006/main">
@@ -3903,7 +2473,12 @@
           </a:p>
           <a:p xmlns:a="http://schemas.openxmlformats.org/drawingml/2006/main">
             <a:r>
-              <a:t>&gt; 课后提交判断门材料包，具体条件以 assignments.md 为准。</a:t>
+              <a:t>[Sources]</a:t>
+            </a:r>
+          </a:p>
+          <a:p xmlns:a="http://schemas.openxmlformats.org/drawingml/2006/main">
+            <a:r>
+              <a:t>[备课规划.md](../备课规划.md) 第 9 课目标段；[assignments.md](../../course/assignments.md) Checkpoint 2 判断门条件。</a:t>
             </a:r>
           </a:p>
           <a:p xmlns:a="http://schemas.openxmlformats.org/drawingml/2006/main">
@@ -3913,87 +2488,7 @@
           </a:p>
           <a:p xmlns:a="http://schemas.openxmlformats.org/drawingml/2006/main">
             <a:r>
-              <a:t>教师讲述：</a:t>
-            </a:r>
-          </a:p>
-          <a:p xmlns:a="http://schemas.openxmlformats.org/drawingml/2006/main">
-            <a:r>
-              <a:t>明确边界：本课目标是完成判断门材料初版，不要求课堂内全部自查通过。判断门条件以 [assignments.md](../../course/assignments.md) Checkpoint 2 为权威来源，本课自查清单与之一一对应。第 1-8 课产出已是项目一部分，本课只补全 baseline、实验规格完整字段、复现说明、第二条研究判断、同伴反馈处理和模板迁移。</a:t>
-            </a:r>
-          </a:p>
-          <a:p xmlns:a="http://schemas.openxmlformats.org/drawingml/2006/main">
-            <a:r>
-              <a:t/>
-            </a:r>
-          </a:p>
-          <a:p xmlns:a="http://schemas.openxmlformats.org/drawingml/2006/main">
-            <a:r>
-              <a:t>学生动作：</a:t>
-            </a:r>
-          </a:p>
-          <a:p xmlns:a="http://schemas.openxmlformats.org/drawingml/2006/main">
-            <a:r>
-              <a:t>无。</a:t>
-            </a:r>
-          </a:p>
-          <a:p xmlns:a="http://schemas.openxmlformats.org/drawingml/2006/main">
-            <a:r>
-              <a:t/>
-            </a:r>
-          </a:p>
-          <a:p xmlns:a="http://schemas.openxmlformats.org/drawingml/2006/main">
-            <a:r>
-              <a:t>来源与边界：</a:t>
-            </a:r>
-          </a:p>
-          <a:p xmlns:a="http://schemas.openxmlformats.org/drawingml/2006/main">
-            <a:r>
-              <a:t>[备课规划.md](../备课规划.md) 第 9 课目标段；[assignments.md](../../course/assignments.md) Checkpoint 2 判断门条件。</a:t>
-            </a:r>
-          </a:p>
-          <a:p xmlns:a="http://schemas.openxmlformats.org/drawingml/2006/main">
-            <a:r>
-              <a:t/>
-            </a:r>
-          </a:p>
-          <a:p xmlns:a="http://schemas.openxmlformats.org/drawingml/2006/main">
-            <a:r>
-              <a:t>---</a:t>
-            </a:r>
-          </a:p>
-          <a:p xmlns:a="http://schemas.openxmlformats.org/drawingml/2006/main">
-            <a:r>
-              <a:t/>
-            </a:r>
-          </a:p>
-          <a:p xmlns:a="http://schemas.openxmlformats.org/drawingml/2006/main">
-            <a:r>
-              <a:t>[Sources]</a:t>
-            </a:r>
-          </a:p>
-          <a:p xmlns:a="http://schemas.openxmlformats.org/drawingml/2006/main">
-            <a:r>
-              <a:t/>
-            </a:r>
-          </a:p>
-          <a:p xmlns:a="http://schemas.openxmlformats.org/drawingml/2006/main">
-            <a:r>
-              <a:t>- 本课 handout.md 与 slides.md</a:t>
-            </a:r>
-          </a:p>
-          <a:p xmlns:a="http://schemas.openxmlformats.org/drawingml/2006/main">
-            <a:r>
-              <a:t/>
-            </a:r>
-          </a:p>
-          <a:p xmlns:a="http://schemas.openxmlformats.org/drawingml/2006/main">
-            <a:r>
-              <a:t>- ../../course/reading-card-case.md</a:t>
-            </a:r>
-          </a:p>
-          <a:p xmlns:a="http://schemas.openxmlformats.org/drawingml/2006/main">
-            <a:r>
-              <a:t/>
+              <a:t>本课 handout.md、judgment-task.md；../../course/judgment-path.md。教学构造仅用于方法判断；本人结果以实际记录为准。</a:t>
             </a:r>
           </a:p>
           <a:p xmlns:a="http://schemas.openxmlformats.org/drawingml/2006/main">
@@ -4078,7 +2573,12 @@
           </a:p>
           <a:p xmlns:a="http://schemas.openxmlformats.org/drawingml/2006/main">
             <a:r>
-              <a:t>讲义位置：handout.md §二、Baseline 选择与公平性；三、实验规格完善；四、可复现性；七、贯穿案例</a:t>
+              <a:t>讲述与校准：</a:t>
+            </a:r>
+          </a:p>
+          <a:p xmlns:a="http://schemas.openxmlformats.org/drawingml/2006/main">
+            <a:r>
+              <a:t>公平对照的重点是目标比较和可比性，不能把“只要五项一样就证明机制”当充分条件。按待检验命题选择合理对照，并披露无法匹配处。</a:t>
             </a:r>
           </a:p>
           <a:p xmlns:a="http://schemas.openxmlformats.org/drawingml/2006/main">
@@ -4088,17 +2588,12 @@
           </a:p>
           <a:p xmlns:a="http://schemas.openxmlformats.org/drawingml/2006/main">
             <a:r>
-              <a:t>屏显核对：</a:t>
-            </a:r>
-          </a:p>
-          <a:p xmlns:a="http://schemas.openxmlformats.org/drawingml/2006/main">
-            <a:r>
-              <a:t>同一研究问题 → 合理的比较对象</a:t>
-            </a:r>
-          </a:p>
-          <a:p xmlns:a="http://schemas.openxmlformats.org/drawingml/2006/main">
-            <a:r>
-              <a:t>同一评价口径 → 可解释的结果差异</a:t>
+              <a:t>学生动作：</a:t>
+            </a:r>
+          </a:p>
+          <a:p xmlns:a="http://schemas.openxmlformats.org/drawingml/2006/main">
+            <a:r>
+              <a:t>指出本人 baseline 与方法最可能不对等的一项。</a:t>
             </a:r>
           </a:p>
           <a:p xmlns:a="http://schemas.openxmlformats.org/drawingml/2006/main">
@@ -4108,12 +2603,7 @@
           </a:p>
           <a:p xmlns:a="http://schemas.openxmlformats.org/drawingml/2006/main">
             <a:r>
-              <a:t>两组有差异，仍需排查混杂。</a:t>
-            </a:r>
-          </a:p>
-          <a:p xmlns:a="http://schemas.openxmlformats.org/drawingml/2006/main">
-            <a:r>
-              <a:t>一个 baseline 通常不能单独证明机制。</a:t>
+              <a:t>课堂安排：按本稿下方 90 分钟教学路由安排；此页不另占独立时段。</a:t>
             </a:r>
           </a:p>
           <a:p xmlns:a="http://schemas.openxmlformats.org/drawingml/2006/main">
@@ -4123,12 +2613,12 @@
           </a:p>
           <a:p xmlns:a="http://schemas.openxmlformats.org/drawingml/2006/main">
             <a:r>
-              <a:t>教师讲述：</a:t>
-            </a:r>
-          </a:p>
-          <a:p xmlns:a="http://schemas.openxmlformats.org/drawingml/2006/main">
-            <a:r>
-              <a:t>公平对照的重点是目标比较和可比性，不能把“只要五项一样就证明机制”当充分条件。按待检验命题选择合理对照，并披露无法匹配处。</a:t>
+              <a:t>[Sources]</a:t>
+            </a:r>
+          </a:p>
+          <a:p xmlns:a="http://schemas.openxmlformats.org/drawingml/2006/main">
+            <a:r>
+              <a:t>./handout.md；课堂示例与构造数据见 ../../course/reading-card-case.md</a:t>
             </a:r>
           </a:p>
           <a:p xmlns:a="http://schemas.openxmlformats.org/drawingml/2006/main">
@@ -4138,72 +2628,7 @@
           </a:p>
           <a:p xmlns:a="http://schemas.openxmlformats.org/drawingml/2006/main">
             <a:r>
-              <a:t>学生动作：</a:t>
-            </a:r>
-          </a:p>
-          <a:p xmlns:a="http://schemas.openxmlformats.org/drawingml/2006/main">
-            <a:r>
-              <a:t>指出本人 baseline 与方法最可能不对等的一项。</a:t>
-            </a:r>
-          </a:p>
-          <a:p xmlns:a="http://schemas.openxmlformats.org/drawingml/2006/main">
-            <a:r>
-              <a:t/>
-            </a:r>
-          </a:p>
-          <a:p xmlns:a="http://schemas.openxmlformats.org/drawingml/2006/main">
-            <a:r>
-              <a:t>来源与边界：</a:t>
-            </a:r>
-          </a:p>
-          <a:p xmlns:a="http://schemas.openxmlformats.org/drawingml/2006/main">
-            <a:r>
-              <a:t>./handout.md；课堂示例与构造数据见 ../../course/reading-card-case.md</a:t>
-            </a:r>
-          </a:p>
-          <a:p xmlns:a="http://schemas.openxmlformats.org/drawingml/2006/main">
-            <a:r>
-              <a:t/>
-            </a:r>
-          </a:p>
-          <a:p xmlns:a="http://schemas.openxmlformats.org/drawingml/2006/main">
-            <a:r>
-              <a:t>[Sources]</a:t>
-            </a:r>
-          </a:p>
-          <a:p xmlns:a="http://schemas.openxmlformats.org/drawingml/2006/main">
-            <a:r>
-              <a:t/>
-            </a:r>
-          </a:p>
-          <a:p xmlns:a="http://schemas.openxmlformats.org/drawingml/2006/main">
-            <a:r>
-              <a:t>- https://www.jmlr.org/papers/v22/20-303.html</a:t>
-            </a:r>
-          </a:p>
-          <a:p xmlns:a="http://schemas.openxmlformats.org/drawingml/2006/main">
-            <a:r>
-              <a:t/>
-            </a:r>
-          </a:p>
-          <a:p xmlns:a="http://schemas.openxmlformats.org/drawingml/2006/main">
-            <a:r>
-              <a:t>- 本课 handout.md 与 slides.md</a:t>
-            </a:r>
-          </a:p>
-          <a:p xmlns:a="http://schemas.openxmlformats.org/drawingml/2006/main">
-            <a:r>
-              <a:t/>
-            </a:r>
-          </a:p>
-          <a:p xmlns:a="http://schemas.openxmlformats.org/drawingml/2006/main">
-            <a:r>
-              <a:t>- ../../course/reading-card-case.md</a:t>
-            </a:r>
-          </a:p>
-          <a:p xmlns:a="http://schemas.openxmlformats.org/drawingml/2006/main">
-            <a:r>
-              <a:t/>
+              <a:t>本课 handout.md、judgment-task.md；../../course/judgment-path.md。</a:t>
             </a:r>
           </a:p>
           <a:p xmlns:a="http://schemas.openxmlformats.org/drawingml/2006/main">
@@ -4288,7 +2713,12 @@
           </a:p>
           <a:p xmlns:a="http://schemas.openxmlformats.org/drawingml/2006/main">
             <a:r>
-              <a:t>讲义位置：handout.md §二、Baseline 选择与公平性；三、实验规格完善；四、可复现性；七、贯穿案例</a:t>
+              <a:t>讲述与校准：</a:t>
+            </a:r>
+          </a:p>
+          <a:p xmlns:a="http://schemas.openxmlformats.org/drawingml/2006/main">
+            <a:r>
+              <a:t>五问是审计入口，不是逻辑上的充要条件。不同系统可以使用合理的不同配置，关键是比较问题是否清楚、资源差异是否披露、是否存在未控偏差。</a:t>
             </a:r>
           </a:p>
           <a:p xmlns:a="http://schemas.openxmlformats.org/drawingml/2006/main">
@@ -4298,32 +2728,12 @@
           </a:p>
           <a:p xmlns:a="http://schemas.openxmlformats.org/drawingml/2006/main">
             <a:r>
-              <a:t>屏显核对：</a:t>
-            </a:r>
-          </a:p>
-          <a:p xmlns:a="http://schemas.openxmlformats.org/drawingml/2006/main">
-            <a:r>
-              <a:t>数据与任务是否可比？</a:t>
-            </a:r>
-          </a:p>
-          <a:p xmlns:a="http://schemas.openxmlformats.org/drawingml/2006/main">
-            <a:r>
-              <a:t>资源与调参机会是否合理？</a:t>
-            </a:r>
-          </a:p>
-          <a:p xmlns:a="http://schemas.openxmlformats.org/drawingml/2006/main">
-            <a:r>
-              <a:t>评价协议是否一致？</a:t>
-            </a:r>
-          </a:p>
-          <a:p xmlns:a="http://schemas.openxmlformats.org/drawingml/2006/main">
-            <a:r>
-              <a:t>运行与停止规则是否预先约定？</a:t>
-            </a:r>
-          </a:p>
-          <a:p xmlns:a="http://schemas.openxmlformats.org/drawingml/2006/main">
-            <a:r>
-              <a:t>双方失败是否完整保留？</a:t>
+              <a:t>学生动作：</a:t>
+            </a:r>
+          </a:p>
+          <a:p xmlns:a="http://schemas.openxmlformats.org/drawingml/2006/main">
+            <a:r>
+              <a:t>给一项不公平之处写修订动作，无法修订就写边界。</a:t>
             </a:r>
           </a:p>
           <a:p xmlns:a="http://schemas.openxmlformats.org/drawingml/2006/main">
@@ -4333,12 +2743,7 @@
           </a:p>
           <a:p xmlns:a="http://schemas.openxmlformats.org/drawingml/2006/main">
             <a:r>
-              <a:t>教师讲述：</a:t>
-            </a:r>
-          </a:p>
-          <a:p xmlns:a="http://schemas.openxmlformats.org/drawingml/2006/main">
-            <a:r>
-              <a:t>五问是审计入口，不是逻辑上的充要条件。不同系统可以使用合理的不同配置，关键是比较问题是否清楚、资源差异是否披露、是否存在未控偏差。</a:t>
+              <a:t>课堂安排：按本稿下方 90 分钟教学路由安排；此页不另占独立时段。</a:t>
             </a:r>
           </a:p>
           <a:p xmlns:a="http://schemas.openxmlformats.org/drawingml/2006/main">
@@ -4348,12 +2753,12 @@
           </a:p>
           <a:p xmlns:a="http://schemas.openxmlformats.org/drawingml/2006/main">
             <a:r>
-              <a:t>学生动作：</a:t>
-            </a:r>
-          </a:p>
-          <a:p xmlns:a="http://schemas.openxmlformats.org/drawingml/2006/main">
-            <a:r>
-              <a:t>给一项不公平之处写修订动作，无法修订就写边界。</a:t>
+              <a:t>[Sources]</a:t>
+            </a:r>
+          </a:p>
+          <a:p xmlns:a="http://schemas.openxmlformats.org/drawingml/2006/main">
+            <a:r>
+              <a:t>./handout.md；课堂示例与构造数据见 ../../course/reading-card-case.md</a:t>
             </a:r>
           </a:p>
           <a:p xmlns:a="http://schemas.openxmlformats.org/drawingml/2006/main">
@@ -4363,57 +2768,7 @@
           </a:p>
           <a:p xmlns:a="http://schemas.openxmlformats.org/drawingml/2006/main">
             <a:r>
-              <a:t>来源与边界：</a:t>
-            </a:r>
-          </a:p>
-          <a:p xmlns:a="http://schemas.openxmlformats.org/drawingml/2006/main">
-            <a:r>
-              <a:t>./handout.md；课堂示例与构造数据见 ../../course/reading-card-case.md</a:t>
-            </a:r>
-          </a:p>
-          <a:p xmlns:a="http://schemas.openxmlformats.org/drawingml/2006/main">
-            <a:r>
-              <a:t/>
-            </a:r>
-          </a:p>
-          <a:p xmlns:a="http://schemas.openxmlformats.org/drawingml/2006/main">
-            <a:r>
-              <a:t>[Sources]</a:t>
-            </a:r>
-          </a:p>
-          <a:p xmlns:a="http://schemas.openxmlformats.org/drawingml/2006/main">
-            <a:r>
-              <a:t/>
-            </a:r>
-          </a:p>
-          <a:p xmlns:a="http://schemas.openxmlformats.org/drawingml/2006/main">
-            <a:r>
-              <a:t>- https://proceedings.mlsys.org/paper_files/paper/2021/hash/0184b0cd3cfb185989f858a1d9f5c1eb-Abstract.html</a:t>
-            </a:r>
-          </a:p>
-          <a:p xmlns:a="http://schemas.openxmlformats.org/drawingml/2006/main">
-            <a:r>
-              <a:t/>
-            </a:r>
-          </a:p>
-          <a:p xmlns:a="http://schemas.openxmlformats.org/drawingml/2006/main">
-            <a:r>
-              <a:t>- 本课 handout.md 与 slides.md</a:t>
-            </a:r>
-          </a:p>
-          <a:p xmlns:a="http://schemas.openxmlformats.org/drawingml/2006/main">
-            <a:r>
-              <a:t/>
-            </a:r>
-          </a:p>
-          <a:p xmlns:a="http://schemas.openxmlformats.org/drawingml/2006/main">
-            <a:r>
-              <a:t>- ../../course/reading-card-case.md</a:t>
-            </a:r>
-          </a:p>
-          <a:p xmlns:a="http://schemas.openxmlformats.org/drawingml/2006/main">
-            <a:r>
-              <a:t/>
+              <a:t>本课 handout.md、judgment-task.md；../../course/judgment-path.md。</a:t>
             </a:r>
           </a:p>
           <a:p xmlns:a="http://schemas.openxmlformats.org/drawingml/2006/main">
@@ -4498,7 +2853,12 @@
           </a:p>
           <a:p xmlns:a="http://schemas.openxmlformats.org/drawingml/2006/main">
             <a:r>
-              <a:t>讲义位置：本课讲义；见逐页母稿映射表</a:t>
+              <a:t>讲述与校准：</a:t>
+            </a:r>
+          </a:p>
+          <a:p xmlns:a="http://schemas.openxmlformats.org/drawingml/2006/main">
+            <a:r>
+              <a:t>原 10 分钟反例审计内，4 分钟审计证据复用，6 分钟审计公平性与复现。固定指标和日志完整仍可能选优过拟合。候选选择反馈属于开发证据，全部选择冻结后才揭示最终评价。新增字段写在现有七字段中，不新增表单。</a:t>
             </a:r>
           </a:p>
           <a:p xmlns:a="http://schemas.openxmlformats.org/drawingml/2006/main">
@@ -4508,42 +2868,7 @@
           </a:p>
           <a:p xmlns:a="http://schemas.openxmlformats.org/drawingml/2006/main">
             <a:r>
-              <a:t>屏显核对：</a:t>
-            </a:r>
-          </a:p>
-          <a:p xmlns:a="http://schemas.openxmlformats.org/drawingml/2006/main">
-            <a:r>
-              <a:t>| 反例 | 不公平点 | 后果 |</a:t>
-            </a:r>
-          </a:p>
-          <a:p xmlns:a="http://schemas.openxmlformats.org/drawingml/2006/main">
-            <a:r>
-              <a:t>| --- | --- | --- |</a:t>
-            </a:r>
-          </a:p>
-          <a:p xmlns:a="http://schemas.openxmlformats.org/drawingml/2006/main">
-            <a:r>
-              <a:t>| 数据不一致 | 实验组用 A 集，baseline 用 B 集 | 差异可能来自数据难度 |</a:t>
-            </a:r>
-          </a:p>
-          <a:p xmlns:a="http://schemas.openxmlformats.org/drawingml/2006/main">
-            <a:r>
-              <a:t>| 超参不对等 | baseline 没调参，实验组做了搜索 | "调参 vs 不调参"差异 |</a:t>
-            </a:r>
-          </a:p>
-          <a:p xmlns:a="http://schemas.openxmlformats.org/drawingml/2006/main">
-            <a:r>
-              <a:t>| 评价不一致 | 实验组盲评，baseline 非盲评 | 评价者偏倚 |</a:t>
-            </a:r>
-          </a:p>
-          <a:p xmlns:a="http://schemas.openxmlformats.org/drawingml/2006/main">
-            <a:r>
-              <a:t>| 运行次数不对等 | 实验组 5 次取均值，baseline 1 次 | 噪声差异 |</a:t>
-            </a:r>
-          </a:p>
-          <a:p xmlns:a="http://schemas.openxmlformats.org/drawingml/2006/main">
-            <a:r>
-              <a:t>| 失败被删除 | baseline 跑不通，只留实验组成功 | 隐性偏倚 |</a:t>
+              <a:t>五个反例都是常见错误。重点强调"失败被删除"——这是学术规范红线（见 [assessment.md](../../course/assessment.md) 学术规范红线）。ACM Functional 的 documented/consistent/complete/exercisable 是检查维度；课程不授予徽章，研究门仍按课程条件检查。</a:t>
             </a:r>
           </a:p>
           <a:p xmlns:a="http://schemas.openxmlformats.org/drawingml/2006/main">
@@ -4553,7 +2878,12 @@
           </a:p>
           <a:p xmlns:a="http://schemas.openxmlformats.org/drawingml/2006/main">
             <a:r>
-              <a:t>&gt; ACM Badging 区分"代码可下载""工件可运行""结果得到独立验证"——判断门要求 baseline 可执行，结果可追溯。</a:t>
+              <a:t>学生动作：</a:t>
+            </a:r>
+          </a:p>
+          <a:p xmlns:a="http://schemas.openxmlformats.org/drawingml/2006/main">
+            <a:r>
+              <a:t>让学生检查自己的 baseline 是否触犯五个反例之一。</a:t>
             </a:r>
           </a:p>
           <a:p xmlns:a="http://schemas.openxmlformats.org/drawingml/2006/main">
@@ -4563,12 +2893,7 @@
           </a:p>
           <a:p xmlns:a="http://schemas.openxmlformats.org/drawingml/2006/main">
             <a:r>
-              <a:t>教师讲述：</a:t>
-            </a:r>
-          </a:p>
-          <a:p xmlns:a="http://schemas.openxmlformats.org/drawingml/2006/main">
-            <a:r>
-              <a:t>五个反例都是常见错误。重点强调"失败被删除"——这是学术规范红线（见 [assessment.md](../../course/assessment.md) 学术规范红线）。ACM Functional 的 documented/consistent/complete/exercisable 是检查维度；课程不授予徽章，研究门仍按课程条件检查。</a:t>
+              <a:t>课堂安排：按本稿下方 90 分钟教学路由安排；此页不另占独立时段。</a:t>
             </a:r>
           </a:p>
           <a:p xmlns:a="http://schemas.openxmlformats.org/drawingml/2006/main">
@@ -4578,12 +2903,12 @@
           </a:p>
           <a:p xmlns:a="http://schemas.openxmlformats.org/drawingml/2006/main">
             <a:r>
-              <a:t>学生动作：</a:t>
-            </a:r>
-          </a:p>
-          <a:p xmlns:a="http://schemas.openxmlformats.org/drawingml/2006/main">
-            <a:r>
-              <a:t>让学生检查自己的 baseline 是否触犯五个反例之一。</a:t>
+              <a:t>[Sources]</a:t>
+            </a:r>
+          </a:p>
+          <a:p xmlns:a="http://schemas.openxmlformats.org/drawingml/2006/main">
+            <a:r>
+              <a:t>讲义 §二·4；ACM Artifact Review and Badging v1.1（[reading-list.md](../../course/reading-list.md) 第 9 课）。</a:t>
             </a:r>
           </a:p>
           <a:p xmlns:a="http://schemas.openxmlformats.org/drawingml/2006/main">
@@ -4593,57 +2918,7 @@
           </a:p>
           <a:p xmlns:a="http://schemas.openxmlformats.org/drawingml/2006/main">
             <a:r>
-              <a:t>来源与边界：</a:t>
-            </a:r>
-          </a:p>
-          <a:p xmlns:a="http://schemas.openxmlformats.org/drawingml/2006/main">
-            <a:r>
-              <a:t>讲义 §二·4；ACM Artifact Review and Badging v1.1（[reading-list.md](../../course/reading-list.md) 第 9 课）。</a:t>
-            </a:r>
-          </a:p>
-          <a:p xmlns:a="http://schemas.openxmlformats.org/drawingml/2006/main">
-            <a:r>
-              <a:t/>
-            </a:r>
-          </a:p>
-          <a:p xmlns:a="http://schemas.openxmlformats.org/drawingml/2006/main">
-            <a:r>
-              <a:t>---</a:t>
-            </a:r>
-          </a:p>
-          <a:p xmlns:a="http://schemas.openxmlformats.org/drawingml/2006/main">
-            <a:r>
-              <a:t/>
-            </a:r>
-          </a:p>
-          <a:p xmlns:a="http://schemas.openxmlformats.org/drawingml/2006/main">
-            <a:r>
-              <a:t>[Sources]</a:t>
-            </a:r>
-          </a:p>
-          <a:p xmlns:a="http://schemas.openxmlformats.org/drawingml/2006/main">
-            <a:r>
-              <a:t/>
-            </a:r>
-          </a:p>
-          <a:p xmlns:a="http://schemas.openxmlformats.org/drawingml/2006/main">
-            <a:r>
-              <a:t>- 本课 handout.md 与 slides.md</a:t>
-            </a:r>
-          </a:p>
-          <a:p xmlns:a="http://schemas.openxmlformats.org/drawingml/2006/main">
-            <a:r>
-              <a:t/>
-            </a:r>
-          </a:p>
-          <a:p xmlns:a="http://schemas.openxmlformats.org/drawingml/2006/main">
-            <a:r>
-              <a:t>- ../../course/reading-card-case.md</a:t>
-            </a:r>
-          </a:p>
-          <a:p xmlns:a="http://schemas.openxmlformats.org/drawingml/2006/main">
-            <a:r>
-              <a:t/>
+              <a:t>本课 handout.md、judgment-task.md；../../course/judgment-path.md。</a:t>
             </a:r>
           </a:p>
           <a:p xmlns:a="http://schemas.openxmlformats.org/drawingml/2006/main">
@@ -4728,7 +3003,12 @@
           </a:p>
           <a:p xmlns:a="http://schemas.openxmlformats.org/drawingml/2006/main">
             <a:r>
-              <a:t>讲义位置：handout.md §二、Baseline 选择与公平性；三、实验规格完善；四、可复现性；七、贯穿案例</a:t>
+              <a:t>讲述与校准：</a:t>
+            </a:r>
+          </a:p>
+          <a:p xmlns:a="http://schemas.openxmlformats.org/drawingml/2006/main">
+            <a:r>
+              <a:t>本课小包是固定输出回放，没有LLM随机采样。种子栏应写不适用，而不是补一个装饰性的42。学生真实项目按自己的随机源记录。</a:t>
             </a:r>
           </a:p>
           <a:p xmlns:a="http://schemas.openxmlformats.org/drawingml/2006/main">
@@ -4738,17 +3018,12 @@
           </a:p>
           <a:p xmlns:a="http://schemas.openxmlformats.org/drawingml/2006/main">
             <a:r>
-              <a:t>屏显核对：</a:t>
-            </a:r>
-          </a:p>
-          <a:p xmlns:a="http://schemas.openxmlformats.org/drawingml/2006/main">
-            <a:r>
-              <a:t>材料版本 + 配置 + 入口命令</a:t>
-            </a:r>
-          </a:p>
-          <a:p xmlns:a="http://schemas.openxmlformats.org/drawingml/2006/main">
-            <a:r>
-              <a:t>原始输出 + 日志 + 汇总口径</a:t>
+              <a:t>学生动作：</a:t>
+            </a:r>
+          </a:p>
+          <a:p xmlns:a="http://schemas.openxmlformats.org/drawingml/2006/main">
+            <a:r>
+              <a:t>指出一条记录里别人还无法恢复的条件。</a:t>
             </a:r>
           </a:p>
           <a:p xmlns:a="http://schemas.openxmlformats.org/drawingml/2006/main">
@@ -4758,12 +3033,7 @@
           </a:p>
           <a:p xmlns:a="http://schemas.openxmlformats.org/drawingml/2006/main">
             <a:r>
-              <a:t>有随机源：记录种子和重复计划。</a:t>
-            </a:r>
-          </a:p>
-          <a:p xmlns:a="http://schemas.openxmlformats.org/drawingml/2006/main">
-            <a:r>
-              <a:t>无随机源：说明确定性及输入版本。</a:t>
+              <a:t>课堂安排：按本稿下方 90 分钟教学路由安排；此页不另占独立时段。</a:t>
             </a:r>
           </a:p>
           <a:p xmlns:a="http://schemas.openxmlformats.org/drawingml/2006/main">
@@ -4773,12 +3043,12 @@
           </a:p>
           <a:p xmlns:a="http://schemas.openxmlformats.org/drawingml/2006/main">
             <a:r>
-              <a:t>教师讲述：</a:t>
-            </a:r>
-          </a:p>
-          <a:p xmlns:a="http://schemas.openxmlformats.org/drawingml/2006/main">
-            <a:r>
-              <a:t>本课小包是固定输出回放，没有LLM随机采样。种子栏应写不适用，而不是补一个装饰性的42。学生真实项目按自己的随机源记录。</a:t>
+              <a:t>[Sources]</a:t>
+            </a:r>
+          </a:p>
+          <a:p xmlns:a="http://schemas.openxmlformats.org/drawingml/2006/main">
+            <a:r>
+              <a:t>./handout.md；课堂示例与构造数据见 ../../course/reading-card-case.md</a:t>
             </a:r>
           </a:p>
           <a:p xmlns:a="http://schemas.openxmlformats.org/drawingml/2006/main">
@@ -4788,62 +3058,7 @@
           </a:p>
           <a:p xmlns:a="http://schemas.openxmlformats.org/drawingml/2006/main">
             <a:r>
-              <a:t>学生动作：</a:t>
-            </a:r>
-          </a:p>
-          <a:p xmlns:a="http://schemas.openxmlformats.org/drawingml/2006/main">
-            <a:r>
-              <a:t>指出一条记录里别人还无法恢复的条件。</a:t>
-            </a:r>
-          </a:p>
-          <a:p xmlns:a="http://schemas.openxmlformats.org/drawingml/2006/main">
-            <a:r>
-              <a:t/>
-            </a:r>
-          </a:p>
-          <a:p xmlns:a="http://schemas.openxmlformats.org/drawingml/2006/main">
-            <a:r>
-              <a:t>来源与边界：</a:t>
-            </a:r>
-          </a:p>
-          <a:p xmlns:a="http://schemas.openxmlformats.org/drawingml/2006/main">
-            <a:r>
-              <a:t>./handout.md；课堂示例与构造数据见 ../../course/reading-card-case.md</a:t>
-            </a:r>
-          </a:p>
-          <a:p xmlns:a="http://schemas.openxmlformats.org/drawingml/2006/main">
-            <a:r>
-              <a:t/>
-            </a:r>
-          </a:p>
-          <a:p xmlns:a="http://schemas.openxmlformats.org/drawingml/2006/main">
-            <a:r>
-              <a:t>[Sources]</a:t>
-            </a:r>
-          </a:p>
-          <a:p xmlns:a="http://schemas.openxmlformats.org/drawingml/2006/main">
-            <a:r>
-              <a:t/>
-            </a:r>
-          </a:p>
-          <a:p xmlns:a="http://schemas.openxmlformats.org/drawingml/2006/main">
-            <a:r>
-              <a:t>- 本课 handout.md 与 slides.md</a:t>
-            </a:r>
-          </a:p>
-          <a:p xmlns:a="http://schemas.openxmlformats.org/drawingml/2006/main">
-            <a:r>
-              <a:t/>
-            </a:r>
-          </a:p>
-          <a:p xmlns:a="http://schemas.openxmlformats.org/drawingml/2006/main">
-            <a:r>
-              <a:t>- ../../course/reading-card-case.md</a:t>
-            </a:r>
-          </a:p>
-          <a:p xmlns:a="http://schemas.openxmlformats.org/drawingml/2006/main">
-            <a:r>
-              <a:t/>
+              <a:t>本课 handout.md、judgment-task.md；../../course/judgment-path.md。</a:t>
             </a:r>
           </a:p>
           <a:p xmlns:a="http://schemas.openxmlformats.org/drawingml/2006/main">
@@ -4928,7 +3143,12 @@
           </a:p>
           <a:p xmlns:a="http://schemas.openxmlformats.org/drawingml/2006/main">
             <a:r>
-              <a:t>讲义位置：handout.md §二、Baseline 选择与公平性；三、实验规格完善；四、可复现性；七、贯穿案例</a:t>
+              <a:t>讲述与校准：</a:t>
+            </a:r>
+          </a:p>
+          <a:p xmlns:a="http://schemas.openxmlformats.org/drawingml/2006/main">
+            <a:r>
+              <a:t>逐行指向真实包中sources、outputs、gold、annotations、config与入口。说明这是构造课堂规格，不假冒盲评已完成或模型实验。</a:t>
             </a:r>
           </a:p>
           <a:p xmlns:a="http://schemas.openxmlformats.org/drawingml/2006/main">
@@ -4938,42 +3158,12 @@
           </a:p>
           <a:p xmlns:a="http://schemas.openxmlformats.org/drawingml/2006/main">
             <a:r>
-              <a:t>屏显核对：</a:t>
-            </a:r>
-          </a:p>
-          <a:p xmlns:a="http://schemas.openxmlformats.org/drawingml/2006/main">
-            <a:r>
-              <a:t>假设对应｜Q1；H1/A2 待区分</a:t>
-            </a:r>
-          </a:p>
-          <a:p xmlns:a="http://schemas.openxmlformats.org/drawingml/2006/main">
-            <a:r>
-              <a:t>变量｜输出条件与遗漏指标</a:t>
-            </a:r>
-          </a:p>
-          <a:p xmlns:a="http://schemas.openxmlformats.org/drawingml/2006/main">
-            <a:r>
-              <a:t>步骤｜回放、人工核验、汇总</a:t>
-            </a:r>
-          </a:p>
-          <a:p xmlns:a="http://schemas.openxmlformats.org/drawingml/2006/main">
-            <a:r>
-              <a:t>度量｜缺失条件数 / 应保留条件数</a:t>
-            </a:r>
-          </a:p>
-          <a:p xmlns:a="http://schemas.openxmlformats.org/drawingml/2006/main">
-            <a:r>
-              <a:t>对照｜同源文本的自由摘要</a:t>
-            </a:r>
-          </a:p>
-          <a:p xmlns:a="http://schemas.openxmlformats.org/drawingml/2006/main">
-            <a:r>
-              <a:t>配对与重复｜3 文本 × 2 条件 × 1 固定输出</a:t>
-            </a:r>
-          </a:p>
-          <a:p xmlns:a="http://schemas.openxmlformats.org/drawingml/2006/main">
-            <a:r>
-              <a:t>停止｜6 个任务完成；技术异常暂停并留痕</a:t>
+              <a:t>学生动作：</a:t>
+            </a:r>
+          </a:p>
+          <a:p xmlns:a="http://schemas.openxmlformats.org/drawingml/2006/main">
+            <a:r>
+              <a:t>圈出最影响本人结论的一项规格缺口。</a:t>
             </a:r>
           </a:p>
           <a:p xmlns:a="http://schemas.openxmlformats.org/drawingml/2006/main">
@@ -4983,12 +3173,7 @@
           </a:p>
           <a:p xmlns:a="http://schemas.openxmlformats.org/drawingml/2006/main">
             <a:r>
-              <a:t>教师讲述：</a:t>
-            </a:r>
-          </a:p>
-          <a:p xmlns:a="http://schemas.openxmlformats.org/drawingml/2006/main">
-            <a:r>
-              <a:t>逐行指向真实包中sources、outputs、gold、annotations、config与入口。说明这是构造课堂规格，不假冒盲评已完成或模型实验。</a:t>
+              <a:t>课堂安排：按本稿下方 90 分钟教学路由安排；此页不另占独立时段。</a:t>
             </a:r>
           </a:p>
           <a:p xmlns:a="http://schemas.openxmlformats.org/drawingml/2006/main">
@@ -4998,12 +3183,12 @@
           </a:p>
           <a:p xmlns:a="http://schemas.openxmlformats.org/drawingml/2006/main">
             <a:r>
-              <a:t>学生动作：</a:t>
-            </a:r>
-          </a:p>
-          <a:p xmlns:a="http://schemas.openxmlformats.org/drawingml/2006/main">
-            <a:r>
-              <a:t>圈出最影响本人结论的一项规格缺口。</a:t>
+              <a:t>[Sources]</a:t>
+            </a:r>
+          </a:p>
+          <a:p xmlns:a="http://schemas.openxmlformats.org/drawingml/2006/main">
+            <a:r>
+              <a:t>./handout.md；课堂示例与构造数据见 ../../course/reading-card-case.md</a:t>
             </a:r>
           </a:p>
           <a:p xmlns:a="http://schemas.openxmlformats.org/drawingml/2006/main">
@@ -5013,57 +3198,7 @@
           </a:p>
           <a:p xmlns:a="http://schemas.openxmlformats.org/drawingml/2006/main">
             <a:r>
-              <a:t>来源与边界：</a:t>
-            </a:r>
-          </a:p>
-          <a:p xmlns:a="http://schemas.openxmlformats.org/drawingml/2006/main">
-            <a:r>
-              <a:t>./handout.md；课堂示例与构造数据见 ../../course/reading-card-case.md</a:t>
-            </a:r>
-          </a:p>
-          <a:p xmlns:a="http://schemas.openxmlformats.org/drawingml/2006/main">
-            <a:r>
-              <a:t/>
-            </a:r>
-          </a:p>
-          <a:p xmlns:a="http://schemas.openxmlformats.org/drawingml/2006/main">
-            <a:r>
-              <a:t>[Sources]</a:t>
-            </a:r>
-          </a:p>
-          <a:p xmlns:a="http://schemas.openxmlformats.org/drawingml/2006/main">
-            <a:r>
-              <a:t/>
-            </a:r>
-          </a:p>
-          <a:p xmlns:a="http://schemas.openxmlformats.org/drawingml/2006/main">
-            <a:r>
-              <a:t>- https://journals.plos.org/ploscompbiol/article?id=10.1371/journal.pcbi.1005510</a:t>
-            </a:r>
-          </a:p>
-          <a:p xmlns:a="http://schemas.openxmlformats.org/drawingml/2006/main">
-            <a:r>
-              <a:t/>
-            </a:r>
-          </a:p>
-          <a:p xmlns:a="http://schemas.openxmlformats.org/drawingml/2006/main">
-            <a:r>
-              <a:t>- 本课 handout.md 与 slides.md</a:t>
-            </a:r>
-          </a:p>
-          <a:p xmlns:a="http://schemas.openxmlformats.org/drawingml/2006/main">
-            <a:r>
-              <a:t/>
-            </a:r>
-          </a:p>
-          <a:p xmlns:a="http://schemas.openxmlformats.org/drawingml/2006/main">
-            <a:r>
-              <a:t>- ../../course/reading-card-case.md</a:t>
-            </a:r>
-          </a:p>
-          <a:p xmlns:a="http://schemas.openxmlformats.org/drawingml/2006/main">
-            <a:r>
-              <a:t/>
+              <a:t>本课 handout.md、judgment-task.md；../../course/judgment-path.md。</a:t>
             </a:r>
           </a:p>
           <a:p xmlns:a="http://schemas.openxmlformats.org/drawingml/2006/main">
@@ -5148,7 +3283,12 @@
           </a:p>
           <a:p xmlns:a="http://schemas.openxmlformats.org/drawingml/2006/main">
             <a:r>
-              <a:t>讲义位置：handout.md §二、Baseline 选择与公平性；三、实验规格完善；四、可复现性；七、贯穿案例</a:t>
+              <a:t>讲述与校准：</a:t>
+            </a:r>
+          </a:p>
+          <a:p xmlns:a="http://schemas.openxmlformats.org/drawingml/2006/main">
+            <a:r>
+              <a:t>分开任务数、尝试数和研究重复次数。一次失败重试不算新的独立研究样本，也不能用重复执行固定输出来估计方差。</a:t>
             </a:r>
           </a:p>
           <a:p xmlns:a="http://schemas.openxmlformats.org/drawingml/2006/main">
@@ -5158,27 +3298,12 @@
           </a:p>
           <a:p xmlns:a="http://schemas.openxmlformats.org/drawingml/2006/main">
             <a:r>
-              <a:t>屏显核对：</a:t>
-            </a:r>
-          </a:p>
-          <a:p xmlns:a="http://schemas.openxmlformats.org/drawingml/2006/main">
-            <a:r>
-              <a:t>固定队列：6 个任务；最多 8 次执行尝试。</a:t>
-            </a:r>
-          </a:p>
-          <a:p xmlns:a="http://schemas.openxmlformats.org/drawingml/2006/main">
-            <a:r>
-              <a:t>成功完成的任务不重复执行。</a:t>
-            </a:r>
-          </a:p>
-          <a:p xmlns:a="http://schemas.openxmlformats.org/drawingml/2006/main">
-            <a:r>
-              <a:t>技术失败保留后恢复；输入变化时另建运行目录。</a:t>
-            </a:r>
-          </a:p>
-          <a:p xmlns:a="http://schemas.openxmlformats.org/drawingml/2006/main">
-            <a:r>
-              <a:t>负向结果照常进入评价。</a:t>
+              <a:t>学生动作：</a:t>
+            </a:r>
+          </a:p>
+          <a:p xmlns:a="http://schemas.openxmlformats.org/drawingml/2006/main">
+            <a:r>
+              <a:t>判断：删除T03后重算，是否遵守既定停止与汇总规则？</a:t>
             </a:r>
           </a:p>
           <a:p xmlns:a="http://schemas.openxmlformats.org/drawingml/2006/main">
@@ -5188,12 +3313,7 @@
           </a:p>
           <a:p xmlns:a="http://schemas.openxmlformats.org/drawingml/2006/main">
             <a:r>
-              <a:t>教师讲述：</a:t>
-            </a:r>
-          </a:p>
-          <a:p xmlns:a="http://schemas.openxmlformats.org/drawingml/2006/main">
-            <a:r>
-              <a:t>分开任务数、尝试数和研究重复次数。一次失败重试不算新的独立研究样本，也不能用重复执行固定输出来估计方差。</a:t>
+              <a:t>课堂安排：按本稿下方 90 分钟教学路由安排；此页不另占独立时段。</a:t>
             </a:r>
           </a:p>
           <a:p xmlns:a="http://schemas.openxmlformats.org/drawingml/2006/main">
@@ -5203,12 +3323,12 @@
           </a:p>
           <a:p xmlns:a="http://schemas.openxmlformats.org/drawingml/2006/main">
             <a:r>
-              <a:t>学生动作：</a:t>
-            </a:r>
-          </a:p>
-          <a:p xmlns:a="http://schemas.openxmlformats.org/drawingml/2006/main">
-            <a:r>
-              <a:t>判断：删除T03后重算，是否遵守既定停止与汇总规则？</a:t>
+              <a:t>[Sources]</a:t>
+            </a:r>
+          </a:p>
+          <a:p xmlns:a="http://schemas.openxmlformats.org/drawingml/2006/main">
+            <a:r>
+              <a:t>./handout.md；课堂示例与构造数据见 ../../course/reading-card-case.md</a:t>
             </a:r>
           </a:p>
           <a:p xmlns:a="http://schemas.openxmlformats.org/drawingml/2006/main">
@@ -5218,47 +3338,7 @@
           </a:p>
           <a:p xmlns:a="http://schemas.openxmlformats.org/drawingml/2006/main">
             <a:r>
-              <a:t>来源与边界：</a:t>
-            </a:r>
-          </a:p>
-          <a:p xmlns:a="http://schemas.openxmlformats.org/drawingml/2006/main">
-            <a:r>
-              <a:t>./handout.md；课堂示例与构造数据见 ../../course/reading-card-case.md</a:t>
-            </a:r>
-          </a:p>
-          <a:p xmlns:a="http://schemas.openxmlformats.org/drawingml/2006/main">
-            <a:r>
-              <a:t/>
-            </a:r>
-          </a:p>
-          <a:p xmlns:a="http://schemas.openxmlformats.org/drawingml/2006/main">
-            <a:r>
-              <a:t>[Sources]</a:t>
-            </a:r>
-          </a:p>
-          <a:p xmlns:a="http://schemas.openxmlformats.org/drawingml/2006/main">
-            <a:r>
-              <a:t/>
-            </a:r>
-          </a:p>
-          <a:p xmlns:a="http://schemas.openxmlformats.org/drawingml/2006/main">
-            <a:r>
-              <a:t>- 本课 handout.md 与 slides.md</a:t>
-            </a:r>
-          </a:p>
-          <a:p xmlns:a="http://schemas.openxmlformats.org/drawingml/2006/main">
-            <a:r>
-              <a:t/>
-            </a:r>
-          </a:p>
-          <a:p xmlns:a="http://schemas.openxmlformats.org/drawingml/2006/main">
-            <a:r>
-              <a:t>- ../../course/reading-card-case.md</a:t>
-            </a:r>
-          </a:p>
-          <a:p xmlns:a="http://schemas.openxmlformats.org/drawingml/2006/main">
-            <a:r>
-              <a:t/>
+              <a:t>本课 handout.md、judgment-task.md；../../course/judgment-path.md。</a:t>
             </a:r>
           </a:p>
           <a:p xmlns:a="http://schemas.openxmlformats.org/drawingml/2006/main">
@@ -9447,7 +7527,7 @@
                 <a:ea typeface="微软雅黑"/>
                 <a:cs typeface="微软雅黑"/>
               </a:rPr>
-              <a:t>README §1 项目信息</a:t>
+              <a:t>主文档／分文件索引</a:t>
             </a:r>
           </a:p>
         </p:txBody>
@@ -9595,7 +7675,7 @@
                 <a:ea typeface="微软雅黑"/>
                 <a:cs typeface="微软雅黑"/>
               </a:rPr>
-              <a:t>ai-usage-log.md</a:t>
+              <a:t>AI 记录章节或文件</a:t>
             </a:r>
           </a:p>
         </p:txBody>
@@ -9773,7 +7853,7 @@
                 <a:ea typeface="微软雅黑"/>
                 <a:cs typeface="微软雅黑"/>
               </a:rPr>
-              <a:t>ethics-and-compliance.md</a:t>
+              <a:t>伦理章节或文件</a:t>
             </a:r>
           </a:p>
         </p:txBody>
@@ -9891,7 +7971,7 @@
                 <a:ea typeface="微软雅黑"/>
                 <a:cs typeface="微软雅黑"/>
               </a:rPr>
-              <a:t>迁移补字段，但不丢历史记录</a:t>
+              <a:t>按内容验收，保留阶段版本</a:t>
             </a:r>
           </a:p>
         </p:txBody>
@@ -10254,7 +8334,7 @@
                 <a:ea typeface="微软雅黑"/>
                 <a:cs typeface="微软雅黑"/>
               </a:rPr>
-              <a:t>材料、指标与限制</a:t>
+              <a:t>材料、指标、证据角色</a:t>
             </a:r>
           </a:p>
         </p:txBody>
@@ -10698,7 +8778,7 @@
                 <a:ea typeface="微软雅黑"/>
                 <a:cs typeface="微软雅黑"/>
               </a:rPr>
-              <a:t>完整七字段规格</a:t>
+              <a:t>七字段与反馈使用</a:t>
             </a:r>
           </a:p>
         </p:txBody>
@@ -13131,35 +11211,55 @@
       </p:grpSpPr>
       <p:sp>
         <p:nvSpPr>
-          <p:cNvPr id="4" name="Text Placeholder 3">
-            <a:extLst xmlns:a="http://schemas.openxmlformats.org/drawingml/2006/main">
-              <a:ext uri="{FF2B5EF4-FFF2-40B4-BE49-F238E27FC236}">
-                <a16:creationId xmlns:a16="http://schemas.microsoft.com/office/drawing/2014/main" id="{4D941B40-7A0A-534E-3563-CA11753C8E3F}"/>
-              </a:ext>
-            </a:extLst>
-          </p:cNvPr>
-          <p:cNvSpPr>
-            <a:spLocks xmlns:a="http://schemas.openxmlformats.org/drawingml/2006/main" noGrp="1"/>
-          </p:cNvSpPr>
-          <p:nvPr>
-            <p:ph type="body" idx="14"/>
-          </p:nvPr>
-        </p:nvSpPr>
-        <p:spPr>
-          <a:xfrm xmlns:a="http://schemas.openxmlformats.org/drawingml/2006/main">
-            <a:off x="1028700" y="57150"/>
-            <a:ext cx="10668000" cy="571500"/>
-          </a:xfrm>
-        </p:spPr>
-        <p:txBody>
-          <a:bodyPr xmlns:a="http://schemas.openxmlformats.org/drawingml/2006/main" lIns="0" tIns="0" rIns="0" bIns="0" anchor="ctr"/>
-          <a:lstStyle xmlns:a="http://schemas.openxmlformats.org/drawingml/2006/main"/>
+          <p:cNvPr id="7" name="judgment-title">
+            <a:extLst xmlns:a="http://schemas.openxmlformats.org/drawingml/2006/main">
+              <a:ext uri="{FF2B5EF4-FFF2-40B4-BE49-F238E27FC236}">
+                <a16:creationId xmlns:a16="http://schemas.microsoft.com/office/drawing/2014/main" id="{3A81B47B-56EC-4147-909A-C66EDF3E736A}"/>
+              </a:ext>
+            </a:extLst>
+          </p:cNvPr>
+          <p:cNvSpPr>
+            <a:spLocks xmlns:a="http://schemas.openxmlformats.org/drawingml/2006/main" noGrp="1"/>
+          </p:cNvSpPr>
+          <p:nvPr/>
+        </p:nvSpPr>
+        <p:spPr>
+          <a:xfrm xmlns:a="http://schemas.openxmlformats.org/drawingml/2006/main">
+            <a:off x="1028700" y="76200"/>
+            <a:ext cx="10687050" cy="514350"/>
+          </a:xfrm>
+          <a:prstGeom xmlns:a="http://schemas.openxmlformats.org/drawingml/2006/main" prst="rect">
+            <a:avLst/>
+          </a:prstGeom>
+          <a:noFill xmlns:a="http://schemas.openxmlformats.org/drawingml/2006/main"/>
+          <a:ln xmlns:a="http://schemas.openxmlformats.org/drawingml/2006/main" w="0">
+            <a:noFill/>
+          </a:ln>
+        </p:spPr>
+        <p:txBody>
+          <a:bodyPr xmlns:a="http://schemas.openxmlformats.org/drawingml/2006/main" lIns="0" tIns="0" rIns="0" bIns="0" anchor="t"/>
+          <a:lstStyle xmlns:a="http://schemas.openxmlformats.org/drawingml/2006/main">
+            <a:defPPr algn="l">
+              <a:defRPr sz="3000" b="1">
+                <a:solidFill>
+                  <a:srgbClr val="FFFFFF"/>
+                </a:solidFill>
+                <a:latin typeface="微软雅黑"/>
+                <a:ea typeface="微软雅黑"/>
+                <a:cs typeface="微软雅黑"/>
+              </a:defRPr>
+            </a:defPPr>
+          </a:lstStyle>
           <a:p xmlns:a="http://schemas.openxmlformats.org/drawingml/2006/main">
             <a:pPr algn="l">
-              <a:lnSpc>
-                <a:spcPct val="118000"/>
-              </a:lnSpc>
-              <a:buNone/>
+              <a:defRPr sz="3000" b="1">
+                <a:solidFill>
+                  <a:srgbClr val="FFFFFF"/>
+                </a:solidFill>
+                <a:latin typeface="微软雅黑"/>
+                <a:ea typeface="微软雅黑"/>
+                <a:cs typeface="微软雅黑"/>
+              </a:defRPr>
             </a:pPr>
             <a:r>
               <a:rPr sz="3000" b="1">
@@ -13170,622 +11270,337 @@
                 <a:ea typeface="微软雅黑"/>
                 <a:cs typeface="微软雅黑"/>
               </a:rPr>
-              <a:t>个人实践：启动判断门材料的最小闭环</a:t>
-            </a:r>
-            <a:endParaRPr/>
-          </a:p>
-        </p:txBody>
-      </p:sp>
-      <p:sp>
-        <p:nvSpPr>
-          <p:cNvPr id="5" name="Slide Number Placeholder 4">
-            <a:extLst xmlns:a="http://schemas.openxmlformats.org/drawingml/2006/main">
-              <a:ext uri="{FF2B5EF4-FFF2-40B4-BE49-F238E27FC236}">
-                <a16:creationId xmlns:a16="http://schemas.microsoft.com/office/drawing/2014/main" id="{EBA5909F-738E-F60C-BE8C-B3F1D94548E5}"/>
-              </a:ext>
-            </a:extLst>
-          </p:cNvPr>
-          <p:cNvSpPr>
-            <a:spLocks xmlns:a="http://schemas.openxmlformats.org/drawingml/2006/main" noGrp="1"/>
-          </p:cNvSpPr>
-          <p:nvPr>
-            <p:ph type="sldNum" idx="10"/>
-          </p:nvPr>
-        </p:nvSpPr>
-        <p:spPr/>
-        <p:txBody>
-          <a:bodyPr xmlns:a="http://schemas.openxmlformats.org/drawingml/2006/main"/>
-          <a:lstStyle xmlns:a="http://schemas.openxmlformats.org/drawingml/2006/main"/>
-          <a:p xmlns:a="http://schemas.openxmlformats.org/drawingml/2006/main">
-            <a:fld id="{90F7333B-44AC-F7E9-D49D-FE92F45E0477}" type="slidenum">
+              <a:t>本人项目：决定、核验与回写</a:t>
+            </a:r>
+          </a:p>
+        </p:txBody>
+      </p:sp>
+      <p:sp>
+        <p:nvSpPr>
+          <p:cNvPr id="2" name="judgment-body-0">
+            <a:extLst xmlns:a="http://schemas.openxmlformats.org/drawingml/2006/main">
+              <a:ext uri="{FF2B5EF4-FFF2-40B4-BE49-F238E27FC236}">
+                <a16:creationId xmlns:a16="http://schemas.microsoft.com/office/drawing/2014/main" id="{DBEF3A1F-FDF8-4C52-9478-9DF70260CAEB}"/>
+              </a:ext>
+            </a:extLst>
+          </p:cNvPr>
+          <p:cNvSpPr>
+            <a:spLocks xmlns:a="http://schemas.openxmlformats.org/drawingml/2006/main" noGrp="1"/>
+          </p:cNvSpPr>
+          <p:nvPr/>
+        </p:nvSpPr>
+        <p:spPr>
+          <a:xfrm xmlns:a="http://schemas.openxmlformats.org/drawingml/2006/main">
+            <a:off x="666750" y="1066800"/>
+            <a:ext cx="10858500" cy="1476375"/>
+          </a:xfrm>
+          <a:prstGeom xmlns:a="http://schemas.openxmlformats.org/drawingml/2006/main" prst="rect">
+            <a:avLst/>
+          </a:prstGeom>
+          <a:noFill xmlns:a="http://schemas.openxmlformats.org/drawingml/2006/main"/>
+          <a:ln xmlns:a="http://schemas.openxmlformats.org/drawingml/2006/main" w="0">
+            <a:noFill/>
+          </a:ln>
+        </p:spPr>
+        <p:txBody>
+          <a:bodyPr xmlns:a="http://schemas.openxmlformats.org/drawingml/2006/main" lIns="0" tIns="0" rIns="0" bIns="0" anchor="t"/>
+          <a:lstStyle xmlns:a="http://schemas.openxmlformats.org/drawingml/2006/main">
+            <a:defPPr algn="l">
+              <a:defRPr sz="2400" b="0">
+                <a:solidFill>
+                  <a:srgbClr val="263746"/>
+                </a:solidFill>
+                <a:latin typeface="微软雅黑"/>
+                <a:ea typeface="微软雅黑"/>
+                <a:cs typeface="微软雅黑"/>
+              </a:defRPr>
+            </a:defPPr>
+          </a:lstStyle>
+          <a:p xmlns:a="http://schemas.openxmlformats.org/drawingml/2006/main">
+            <a:pPr algn="l">
+              <a:defRPr sz="2400" b="0">
+                <a:solidFill>
+                  <a:srgbClr val="263746"/>
+                </a:solidFill>
+                <a:latin typeface="微软雅黑"/>
+                <a:ea typeface="微软雅黑"/>
+                <a:cs typeface="微软雅黑"/>
+              </a:defRPr>
+            </a:pPr>
+            <a:r>
+              <a:rPr sz="2400" b="0">
+                <a:solidFill>
+                  <a:srgbClr val="263746"/>
+                </a:solidFill>
+                <a:latin typeface="微软雅黑"/>
+                <a:ea typeface="微软雅黑"/>
+                <a:cs typeface="微软雅黑"/>
+              </a:rPr>
+              <a:t>复制个人微型项目起点，实际执行 baseline.py 并评价；保存本人 trace 与输入、实现散列。为记录校验问题冻结比较协议，同伴依说明复现关键步骤。阅读卡回放另作方法示范。</a:t>
+            </a:r>
+          </a:p>
+        </p:txBody>
+      </p:sp>
+      <p:sp>
+        <p:nvSpPr>
+          <p:cNvPr id="3" name="judgment-body-1">
+            <a:extLst xmlns:a="http://schemas.openxmlformats.org/drawingml/2006/main">
+              <a:ext uri="{FF2B5EF4-FFF2-40B4-BE49-F238E27FC236}">
+                <a16:creationId xmlns:a16="http://schemas.microsoft.com/office/drawing/2014/main" id="{CB95FAA3-C349-480D-BC08-9A33FEDA2CAC}"/>
+              </a:ext>
+            </a:extLst>
+          </p:cNvPr>
+          <p:cNvSpPr>
+            <a:spLocks xmlns:a="http://schemas.openxmlformats.org/drawingml/2006/main" noGrp="1"/>
+          </p:cNvSpPr>
+          <p:nvPr/>
+        </p:nvSpPr>
+        <p:spPr>
+          <a:xfrm xmlns:a="http://schemas.openxmlformats.org/drawingml/2006/main">
+            <a:off x="666750" y="2724150"/>
+            <a:ext cx="10858500" cy="1524000"/>
+          </a:xfrm>
+          <a:prstGeom xmlns:a="http://schemas.openxmlformats.org/drawingml/2006/main" prst="rect">
+            <a:avLst/>
+          </a:prstGeom>
+          <a:noFill xmlns:a="http://schemas.openxmlformats.org/drawingml/2006/main"/>
+          <a:ln xmlns:a="http://schemas.openxmlformats.org/drawingml/2006/main" w="0">
+            <a:noFill/>
+          </a:ln>
+        </p:spPr>
+        <p:txBody>
+          <a:bodyPr xmlns:a="http://schemas.openxmlformats.org/drawingml/2006/main" lIns="0" tIns="0" rIns="0" bIns="0" anchor="t"/>
+          <a:lstStyle xmlns:a="http://schemas.openxmlformats.org/drawingml/2006/main">
+            <a:defPPr algn="l">
+              <a:defRPr sz="2400" b="0">
+                <a:solidFill>
+                  <a:srgbClr val="263746"/>
+                </a:solidFill>
+                <a:latin typeface="微软雅黑"/>
+                <a:ea typeface="微软雅黑"/>
+                <a:cs typeface="微软雅黑"/>
+              </a:defRPr>
+            </a:defPPr>
+          </a:lstStyle>
+          <a:p xmlns:a="http://schemas.openxmlformats.org/drawingml/2006/main">
+            <a:pPr algn="l">
+              <a:defRPr sz="2400" b="0">
+                <a:solidFill>
+                  <a:srgbClr val="263746"/>
+                </a:solidFill>
+                <a:latin typeface="微软雅黑"/>
+                <a:ea typeface="微软雅黑"/>
+                <a:cs typeface="微软雅黑"/>
+              </a:defRPr>
+            </a:pPr>
+            <a:r>
+              <a:rPr sz="2400" b="0">
+                <a:solidFill>
+                  <a:srgbClr val="263746"/>
+                </a:solidFill>
+                <a:latin typeface="微软雅黑"/>
+                <a:ea typeface="微软雅黑"/>
+                <a:cs typeface="微软雅黑"/>
+              </a:rPr>
+              <a:t>核对 inputs、implementation、reference 与运行目录；基线和后续修改共用输入及评价。回放只证明回放过程；构造开发用例上的改进不能外推为模型改善。</a:t>
+            </a:r>
+          </a:p>
+        </p:txBody>
+      </p:sp>
+      <p:sp>
+        <p:nvSpPr>
+          <p:cNvPr id="4" name="judgment-body-2">
+            <a:extLst xmlns:a="http://schemas.openxmlformats.org/drawingml/2006/main">
+              <a:ext uri="{FF2B5EF4-FFF2-40B4-BE49-F238E27FC236}">
+                <a16:creationId xmlns:a16="http://schemas.microsoft.com/office/drawing/2014/main" id="{618F0C3E-9867-4866-8283-0FA6CE499859}"/>
+              </a:ext>
+            </a:extLst>
+          </p:cNvPr>
+          <p:cNvSpPr>
+            <a:spLocks xmlns:a="http://schemas.openxmlformats.org/drawingml/2006/main" noGrp="1"/>
+          </p:cNvSpPr>
+          <p:nvPr/>
+        </p:nvSpPr>
+        <p:spPr>
+          <a:xfrm xmlns:a="http://schemas.openxmlformats.org/drawingml/2006/main">
+            <a:off x="666750" y="4457700"/>
+            <a:ext cx="10858500" cy="1466850"/>
+          </a:xfrm>
+          <a:prstGeom xmlns:a="http://schemas.openxmlformats.org/drawingml/2006/main" prst="rect">
+            <a:avLst/>
+          </a:prstGeom>
+          <a:noFill xmlns:a="http://schemas.openxmlformats.org/drawingml/2006/main"/>
+          <a:ln xmlns:a="http://schemas.openxmlformats.org/drawingml/2006/main" w="0">
+            <a:noFill/>
+          </a:ln>
+        </p:spPr>
+        <p:txBody>
+          <a:bodyPr xmlns:a="http://schemas.openxmlformats.org/drawingml/2006/main" lIns="0" tIns="0" rIns="0" bIns="0" anchor="t"/>
+          <a:lstStyle xmlns:a="http://schemas.openxmlformats.org/drawingml/2006/main">
+            <a:defPPr algn="l">
+              <a:defRPr sz="2200" b="0">
+                <a:solidFill>
+                  <a:srgbClr val="1F4D78"/>
+                </a:solidFill>
+                <a:latin typeface="微软雅黑"/>
+                <a:ea typeface="微软雅黑"/>
+                <a:cs typeface="微软雅黑"/>
+              </a:defRPr>
+            </a:defPPr>
+          </a:lstStyle>
+          <a:p xmlns:a="http://schemas.openxmlformats.org/drawingml/2006/main">
+            <a:pPr algn="l">
+              <a:defRPr sz="2200" b="0">
+                <a:solidFill>
+                  <a:srgbClr val="1F4D78"/>
+                </a:solidFill>
+                <a:latin typeface="微软雅黑"/>
+                <a:ea typeface="微软雅黑"/>
+                <a:cs typeface="微软雅黑"/>
+              </a:defRPr>
+            </a:pPr>
+            <a:r>
+              <a:rPr sz="2200" b="0">
+                <a:solidFill>
+                  <a:srgbClr val="1F4D78"/>
+                </a:solidFill>
+                <a:latin typeface="微软雅黑"/>
+                <a:ea typeface="微软雅黑"/>
+                <a:cs typeface="微软雅黑"/>
+              </a:rPr>
+              <a:t>保存：判断门：baseline 运行、七字段规格、复现说明及两条判断</a:t>
+            </a:r>
+          </a:p>
+        </p:txBody>
+      </p:sp>
+      <p:sp>
+        <p:nvSpPr>
+          <p:cNvPr id="5" name="judgment-source">
+            <a:extLst xmlns:a="http://schemas.openxmlformats.org/drawingml/2006/main">
+              <a:ext uri="{FF2B5EF4-FFF2-40B4-BE49-F238E27FC236}">
+                <a16:creationId xmlns:a16="http://schemas.microsoft.com/office/drawing/2014/main" id="{86B1F9BF-36BE-4F42-B91F-E5A389491F9C}"/>
+              </a:ext>
+            </a:extLst>
+          </p:cNvPr>
+          <p:cNvSpPr>
+            <a:spLocks xmlns:a="http://schemas.openxmlformats.org/drawingml/2006/main" noGrp="1"/>
+          </p:cNvSpPr>
+          <p:nvPr/>
+        </p:nvSpPr>
+        <p:spPr>
+          <a:xfrm xmlns:a="http://schemas.openxmlformats.org/drawingml/2006/main">
+            <a:off x="666750" y="6276975"/>
+            <a:ext cx="10572750" cy="209550"/>
+          </a:xfrm>
+          <a:prstGeom xmlns:a="http://schemas.openxmlformats.org/drawingml/2006/main" prst="rect">
+            <a:avLst/>
+          </a:prstGeom>
+          <a:noFill xmlns:a="http://schemas.openxmlformats.org/drawingml/2006/main"/>
+          <a:ln xmlns:a="http://schemas.openxmlformats.org/drawingml/2006/main" w="0">
+            <a:noFill/>
+          </a:ln>
+        </p:spPr>
+        <p:txBody>
+          <a:bodyPr xmlns:a="http://schemas.openxmlformats.org/drawingml/2006/main" lIns="0" tIns="0" rIns="0" bIns="0" anchor="t"/>
+          <a:lstStyle xmlns:a="http://schemas.openxmlformats.org/drawingml/2006/main">
+            <a:defPPr algn="l">
+              <a:defRPr sz="1100" b="0">
+                <a:solidFill>
+                  <a:srgbClr val="667684"/>
+                </a:solidFill>
+                <a:latin typeface="微软雅黑"/>
+                <a:ea typeface="微软雅黑"/>
+                <a:cs typeface="微软雅黑"/>
+              </a:defRPr>
+            </a:defPPr>
+          </a:lstStyle>
+          <a:p xmlns:a="http://schemas.openxmlformats.org/drawingml/2006/main">
+            <a:pPr algn="l">
+              <a:defRPr sz="1100" b="0">
+                <a:solidFill>
+                  <a:srgbClr val="667684"/>
+                </a:solidFill>
+                <a:latin typeface="微软雅黑"/>
+                <a:ea typeface="微软雅黑"/>
+                <a:cs typeface="微软雅黑"/>
+              </a:defRPr>
+            </a:pPr>
+            <a:r>
+              <a:rPr sz="1100" b="0">
+                <a:solidFill>
+                  <a:srgbClr val="667684"/>
+                </a:solidFill>
+                <a:latin typeface="微软雅黑"/>
+                <a:ea typeface="微软雅黑"/>
+                <a:cs typeface="微软雅黑"/>
+              </a:rPr>
+              <a:t>来源：本课判断任务与讲义；构造材料及真实来源按材料包标识</a:t>
+            </a:r>
+          </a:p>
+        </p:txBody>
+      </p:sp>
+      <p:sp>
+        <p:nvSpPr>
+          <p:cNvPr id="6" name="judgment-page">
+            <a:extLst xmlns:a="http://schemas.openxmlformats.org/drawingml/2006/main">
+              <a:ext uri="{FF2B5EF4-FFF2-40B4-BE49-F238E27FC236}">
+                <a16:creationId xmlns:a16="http://schemas.microsoft.com/office/drawing/2014/main" id="{5F8FD35F-80D8-496A-B0EA-2DB00C365C4E}"/>
+              </a:ext>
+            </a:extLst>
+          </p:cNvPr>
+          <p:cNvSpPr>
+            <a:spLocks xmlns:a="http://schemas.openxmlformats.org/drawingml/2006/main" noGrp="1"/>
+          </p:cNvSpPr>
+          <p:nvPr/>
+        </p:nvSpPr>
+        <p:spPr>
+          <a:xfrm xmlns:a="http://schemas.openxmlformats.org/drawingml/2006/main">
+            <a:off x="11715750" y="6562725"/>
+            <a:ext cx="238125" cy="171450"/>
+          </a:xfrm>
+          <a:prstGeom xmlns:a="http://schemas.openxmlformats.org/drawingml/2006/main" prst="rect">
+            <a:avLst/>
+          </a:prstGeom>
+          <a:noFill xmlns:a="http://schemas.openxmlformats.org/drawingml/2006/main"/>
+          <a:ln xmlns:a="http://schemas.openxmlformats.org/drawingml/2006/main" w="0">
+            <a:noFill/>
+          </a:ln>
+        </p:spPr>
+        <p:txBody>
+          <a:bodyPr xmlns:a="http://schemas.openxmlformats.org/drawingml/2006/main" lIns="0" tIns="0" rIns="0" bIns="0" anchor="t"/>
+          <a:lstStyle xmlns:a="http://schemas.openxmlformats.org/drawingml/2006/main">
+            <a:defPPr algn="l">
+              <a:defRPr sz="900" b="0">
+                <a:solidFill>
+                  <a:srgbClr val="A5A5A5"/>
+                </a:solidFill>
+                <a:latin typeface="微软雅黑"/>
+                <a:ea typeface="微软雅黑"/>
+                <a:cs typeface="微软雅黑"/>
+              </a:defRPr>
+            </a:defPPr>
+          </a:lstStyle>
+          <a:p xmlns:a="http://schemas.openxmlformats.org/drawingml/2006/main">
+            <a:pPr algn="l">
+              <a:defRPr sz="900" b="0">
+                <a:solidFill>
+                  <a:srgbClr val="A5A5A5"/>
+                </a:solidFill>
+                <a:latin typeface="微软雅黑"/>
+                <a:ea typeface="微软雅黑"/>
+                <a:cs typeface="微软雅黑"/>
+              </a:defRPr>
+            </a:pPr>
+            <a:r>
+              <a:rPr sz="900" b="0">
+                <a:solidFill>
+                  <a:srgbClr val="A5A5A5"/>
+                </a:solidFill>
+                <a:latin typeface="微软雅黑"/>
+                <a:ea typeface="微软雅黑"/>
+                <a:cs typeface="微软雅黑"/>
+              </a:rPr>
               <a:t>17</a:t>
-            </a:fld>
-            <a:endParaRPr/>
-          </a:p>
-        </p:txBody>
-      </p:sp>
-      <p:sp>
-        <p:nvSpPr>
-          <p:cNvPr id="6" name="class">
-            <a:extLst xmlns:a="http://schemas.openxmlformats.org/drawingml/2006/main">
-              <a:ext uri="{FF2B5EF4-FFF2-40B4-BE49-F238E27FC236}">
-                <a16:creationId xmlns:a16="http://schemas.microsoft.com/office/drawing/2014/main" id="{D67EA42A-6537-4FBB-B8E9-2EF496EB95FD}"/>
-              </a:ext>
-            </a:extLst>
-          </p:cNvPr>
-          <p:cNvSpPr>
-            <a:spLocks xmlns:a="http://schemas.openxmlformats.org/drawingml/2006/main" noGrp="1"/>
-          </p:cNvSpPr>
-          <p:nvPr/>
-        </p:nvSpPr>
-        <p:spPr>
-          <a:xfrm xmlns:a="http://schemas.openxmlformats.org/drawingml/2006/main">
-            <a:off x="609600" y="1066800"/>
-            <a:ext cx="3810000" cy="266700"/>
-          </a:xfrm>
-          <a:prstGeom xmlns:a="http://schemas.openxmlformats.org/drawingml/2006/main" prst="rect">
-            <a:avLst/>
-          </a:prstGeom>
-          <a:noFill xmlns:a="http://schemas.openxmlformats.org/drawingml/2006/main"/>
-          <a:ln xmlns:a="http://schemas.openxmlformats.org/drawingml/2006/main" w="0">
-            <a:noFill/>
-          </a:ln>
-        </p:spPr>
-        <p:txBody>
-          <a:bodyPr xmlns:a="http://schemas.openxmlformats.org/drawingml/2006/main" lIns="0" tIns="0" rIns="0" bIns="0" anchor="ctr"/>
-          <a:lstStyle xmlns:a="http://schemas.openxmlformats.org/drawingml/2006/main"/>
-          <a:p xmlns:a="http://schemas.openxmlformats.org/drawingml/2006/main">
-            <a:pPr algn="l">
-              <a:lnSpc>
-                <a:spcPct val="118000"/>
-              </a:lnSpc>
-              <a:buNone/>
-              <a:defRPr sz="2000" b="1">
-                <a:solidFill>
-                  <a:srgbClr val="2E7D5B"/>
-                </a:solidFill>
-                <a:latin typeface="微软雅黑"/>
-                <a:ea typeface="微软雅黑"/>
-                <a:cs typeface="微软雅黑"/>
-              </a:defRPr>
-            </a:pPr>
-            <a:r>
-              <a:rPr sz="2000" b="1">
-                <a:solidFill>
-                  <a:srgbClr val="2E7D5B"/>
-                </a:solidFill>
-                <a:latin typeface="微软雅黑"/>
-                <a:ea typeface="微软雅黑"/>
-                <a:cs typeface="微软雅黑"/>
-              </a:rPr>
-              <a:t>课堂最低闭环</a:t>
-            </a:r>
-          </a:p>
-        </p:txBody>
-      </p:sp>
-      <p:sp>
-        <p:nvSpPr>
-          <p:cNvPr id="7" name="task1-bg">
-            <a:extLst xmlns:a="http://schemas.openxmlformats.org/drawingml/2006/main">
-              <a:ext uri="{FF2B5EF4-FFF2-40B4-BE49-F238E27FC236}">
-                <a16:creationId xmlns:a16="http://schemas.microsoft.com/office/drawing/2014/main" id="{3BA0F69D-1301-4731-A9A5-DBE66C115352}"/>
-              </a:ext>
-            </a:extLst>
-          </p:cNvPr>
-          <p:cNvSpPr>
-            <a:spLocks xmlns:a="http://schemas.openxmlformats.org/drawingml/2006/main" noGrp="1"/>
-          </p:cNvSpPr>
-          <p:nvPr/>
-        </p:nvSpPr>
-        <p:spPr>
-          <a:xfrm xmlns:a="http://schemas.openxmlformats.org/drawingml/2006/main">
-            <a:off x="609600" y="1619250"/>
-            <a:ext cx="4762500" cy="1333500"/>
-          </a:xfrm>
-          <a:prstGeom xmlns:a="http://schemas.openxmlformats.org/drawingml/2006/main" prst="rect">
-            <a:avLst/>
-          </a:prstGeom>
-          <a:solidFill xmlns:a="http://schemas.openxmlformats.org/drawingml/2006/main">
-            <a:srgbClr val="EDF5F0"/>
-          </a:solidFill>
-          <a:ln xmlns:a="http://schemas.openxmlformats.org/drawingml/2006/main" w="0">
-            <a:noFill/>
-          </a:ln>
-        </p:spPr>
-      </p:sp>
-      <p:sp>
-        <p:nvSpPr>
-          <p:cNvPr id="8" name="task1">
-            <a:extLst xmlns:a="http://schemas.openxmlformats.org/drawingml/2006/main">
-              <a:ext uri="{FF2B5EF4-FFF2-40B4-BE49-F238E27FC236}">
-                <a16:creationId xmlns:a16="http://schemas.microsoft.com/office/drawing/2014/main" id="{48FCF2B2-021F-40AD-8BAC-1D7864B8AB46}"/>
-              </a:ext>
-            </a:extLst>
-          </p:cNvPr>
-          <p:cNvSpPr>
-            <a:spLocks xmlns:a="http://schemas.openxmlformats.org/drawingml/2006/main" noGrp="1"/>
-          </p:cNvSpPr>
-          <p:nvPr/>
-        </p:nvSpPr>
-        <p:spPr>
-          <a:xfrm xmlns:a="http://schemas.openxmlformats.org/drawingml/2006/main">
-            <a:off x="762000" y="1714500"/>
-            <a:ext cx="4457700" cy="1143000"/>
-          </a:xfrm>
-          <a:prstGeom xmlns:a="http://schemas.openxmlformats.org/drawingml/2006/main" prst="rect">
-            <a:avLst/>
-          </a:prstGeom>
-          <a:noFill xmlns:a="http://schemas.openxmlformats.org/drawingml/2006/main"/>
-          <a:ln xmlns:a="http://schemas.openxmlformats.org/drawingml/2006/main" w="0">
-            <a:noFill/>
-          </a:ln>
-        </p:spPr>
-        <p:txBody>
-          <a:bodyPr xmlns:a="http://schemas.openxmlformats.org/drawingml/2006/main" lIns="0" tIns="0" rIns="0" bIns="0" anchor="ctr"/>
-          <a:lstStyle xmlns:a="http://schemas.openxmlformats.org/drawingml/2006/main"/>
-          <a:p xmlns:a="http://schemas.openxmlformats.org/drawingml/2006/main">
-            <a:pPr algn="ctr">
-              <a:lnSpc>
-                <a:spcPct val="118000"/>
-              </a:lnSpc>
-              <a:buNone/>
-              <a:defRPr sz="2400" b="0">
-                <a:solidFill>
-                  <a:srgbClr val="1F4D78"/>
-                </a:solidFill>
-                <a:latin typeface="微软雅黑"/>
-                <a:ea typeface="微软雅黑"/>
-                <a:cs typeface="微软雅黑"/>
-              </a:defRPr>
-            </a:pPr>
-            <a:r>
-              <a:rPr sz="2400" b="0">
-                <a:solidFill>
-                  <a:srgbClr val="1F4D78"/>
-                </a:solidFill>
-                <a:latin typeface="微软雅黑"/>
-                <a:ea typeface="微软雅黑"/>
-                <a:cs typeface="微软雅黑"/>
-              </a:rPr>
-              <a:t>1  选择 baseline</a:t>
-            </a:r>
-          </a:p>
-          <a:p xmlns:a="http://schemas.openxmlformats.org/drawingml/2006/main">
-            <a:pPr algn="ctr">
-              <a:lnSpc>
-                <a:spcPct val="118000"/>
-              </a:lnSpc>
-              <a:buNone/>
-              <a:defRPr sz="2400" b="0">
-                <a:solidFill>
-                  <a:srgbClr val="1F4D78"/>
-                </a:solidFill>
-                <a:latin typeface="微软雅黑"/>
-                <a:ea typeface="微软雅黑"/>
-                <a:cs typeface="微软雅黑"/>
-              </a:defRPr>
-            </a:pPr>
-            <a:r>
-              <a:rPr sz="2400" b="0">
-                <a:solidFill>
-                  <a:srgbClr val="1F4D78"/>
-                </a:solidFill>
-                <a:latin typeface="微软雅黑"/>
-                <a:ea typeface="微软雅黑"/>
-                <a:cs typeface="微软雅黑"/>
-              </a:rPr>
-              <a:t>类型 + 公平性</a:t>
-            </a:r>
-          </a:p>
-        </p:txBody>
-      </p:sp>
-      <p:sp>
-        <p:nvSpPr>
-          <p:cNvPr id="9" name="task2-bg">
-            <a:extLst xmlns:a="http://schemas.openxmlformats.org/drawingml/2006/main">
-              <a:ext uri="{FF2B5EF4-FFF2-40B4-BE49-F238E27FC236}">
-                <a16:creationId xmlns:a16="http://schemas.microsoft.com/office/drawing/2014/main" id="{D6515D5D-7D99-478E-8807-51DD1376F038}"/>
-              </a:ext>
-            </a:extLst>
-          </p:cNvPr>
-          <p:cNvSpPr>
-            <a:spLocks xmlns:a="http://schemas.openxmlformats.org/drawingml/2006/main" noGrp="1"/>
-          </p:cNvSpPr>
-          <p:nvPr/>
-        </p:nvSpPr>
-        <p:spPr>
-          <a:xfrm xmlns:a="http://schemas.openxmlformats.org/drawingml/2006/main">
-            <a:off x="609600" y="3333750"/>
-            <a:ext cx="4762500" cy="1428750"/>
-          </a:xfrm>
-          <a:prstGeom xmlns:a="http://schemas.openxmlformats.org/drawingml/2006/main" prst="rect">
-            <a:avLst/>
-          </a:prstGeom>
-          <a:solidFill xmlns:a="http://schemas.openxmlformats.org/drawingml/2006/main">
-            <a:srgbClr val="EDF5F0"/>
-          </a:solidFill>
-          <a:ln xmlns:a="http://schemas.openxmlformats.org/drawingml/2006/main" w="0">
-            <a:noFill/>
-          </a:ln>
-        </p:spPr>
-      </p:sp>
-      <p:sp>
-        <p:nvSpPr>
-          <p:cNvPr id="10" name="task2">
-            <a:extLst xmlns:a="http://schemas.openxmlformats.org/drawingml/2006/main">
-              <a:ext uri="{FF2B5EF4-FFF2-40B4-BE49-F238E27FC236}">
-                <a16:creationId xmlns:a16="http://schemas.microsoft.com/office/drawing/2014/main" id="{E66AC4A2-A536-483B-B158-F41F1CE18511}"/>
-              </a:ext>
-            </a:extLst>
-          </p:cNvPr>
-          <p:cNvSpPr>
-            <a:spLocks xmlns:a="http://schemas.openxmlformats.org/drawingml/2006/main" noGrp="1"/>
-          </p:cNvSpPr>
-          <p:nvPr/>
-        </p:nvSpPr>
-        <p:spPr>
-          <a:xfrm xmlns:a="http://schemas.openxmlformats.org/drawingml/2006/main">
-            <a:off x="762000" y="3429000"/>
-            <a:ext cx="4457700" cy="1238250"/>
-          </a:xfrm>
-          <a:prstGeom xmlns:a="http://schemas.openxmlformats.org/drawingml/2006/main" prst="rect">
-            <a:avLst/>
-          </a:prstGeom>
-          <a:noFill xmlns:a="http://schemas.openxmlformats.org/drawingml/2006/main"/>
-          <a:ln xmlns:a="http://schemas.openxmlformats.org/drawingml/2006/main" w="0">
-            <a:noFill/>
-          </a:ln>
-        </p:spPr>
-        <p:txBody>
-          <a:bodyPr xmlns:a="http://schemas.openxmlformats.org/drawingml/2006/main" lIns="0" tIns="0" rIns="0" bIns="0" anchor="ctr"/>
-          <a:lstStyle xmlns:a="http://schemas.openxmlformats.org/drawingml/2006/main"/>
-          <a:p xmlns:a="http://schemas.openxmlformats.org/drawingml/2006/main">
-            <a:pPr algn="ctr">
-              <a:lnSpc>
-                <a:spcPct val="118000"/>
-              </a:lnSpc>
-              <a:buNone/>
-              <a:defRPr sz="2200" b="0">
-                <a:solidFill>
-                  <a:srgbClr val="1F4D78"/>
-                </a:solidFill>
-                <a:latin typeface="微软雅黑"/>
-                <a:ea typeface="微软雅黑"/>
-                <a:cs typeface="微软雅黑"/>
-              </a:defRPr>
-            </a:pPr>
-            <a:r>
-              <a:rPr sz="2200" b="0">
-                <a:solidFill>
-                  <a:srgbClr val="1F4D78"/>
-                </a:solidFill>
-                <a:latin typeface="微软雅黑"/>
-                <a:ea typeface="微软雅黑"/>
-                <a:cs typeface="微软雅黑"/>
-              </a:rPr>
-              <a:t>2  补足可重运行记录</a:t>
-            </a:r>
-          </a:p>
-          <a:p xmlns:a="http://schemas.openxmlformats.org/drawingml/2006/main">
-            <a:pPr algn="ctr">
-              <a:lnSpc>
-                <a:spcPct val="118000"/>
-              </a:lnSpc>
-              <a:buNone/>
-              <a:defRPr sz="2200" b="0">
-                <a:solidFill>
-                  <a:srgbClr val="1F4D78"/>
-                </a:solidFill>
-                <a:latin typeface="微软雅黑"/>
-                <a:ea typeface="微软雅黑"/>
-                <a:cs typeface="微软雅黑"/>
-              </a:defRPr>
-            </a:pPr>
-            <a:r>
-              <a:rPr sz="2200" b="0">
-                <a:solidFill>
-                  <a:srgbClr val="1F4D78"/>
-                </a:solidFill>
-                <a:latin typeface="微软雅黑"/>
-                <a:ea typeface="微软雅黑"/>
-                <a:cs typeface="微软雅黑"/>
-              </a:rPr>
-              <a:t>输入／环境／命令／输出／种子／结果</a:t>
-            </a:r>
-          </a:p>
-        </p:txBody>
-      </p:sp>
-      <p:sp>
-        <p:nvSpPr>
-          <p:cNvPr id="11" name="after">
-            <a:extLst xmlns:a="http://schemas.openxmlformats.org/drawingml/2006/main">
-              <a:ext uri="{FF2B5EF4-FFF2-40B4-BE49-F238E27FC236}">
-                <a16:creationId xmlns:a16="http://schemas.microsoft.com/office/drawing/2014/main" id="{C47CAB16-D45E-4479-905B-2B2F80CF9F97}"/>
-              </a:ext>
-            </a:extLst>
-          </p:cNvPr>
-          <p:cNvSpPr>
-            <a:spLocks xmlns:a="http://schemas.openxmlformats.org/drawingml/2006/main" noGrp="1"/>
-          </p:cNvSpPr>
-          <p:nvPr/>
-        </p:nvSpPr>
-        <p:spPr>
-          <a:xfrm xmlns:a="http://schemas.openxmlformats.org/drawingml/2006/main">
-            <a:off x="6858000" y="1066800"/>
-            <a:ext cx="2857500" cy="266700"/>
-          </a:xfrm>
-          <a:prstGeom xmlns:a="http://schemas.openxmlformats.org/drawingml/2006/main" prst="rect">
-            <a:avLst/>
-          </a:prstGeom>
-          <a:noFill xmlns:a="http://schemas.openxmlformats.org/drawingml/2006/main"/>
-          <a:ln xmlns:a="http://schemas.openxmlformats.org/drawingml/2006/main" w="0">
-            <a:noFill/>
-          </a:ln>
-        </p:spPr>
-        <p:txBody>
-          <a:bodyPr xmlns:a="http://schemas.openxmlformats.org/drawingml/2006/main" lIns="0" tIns="0" rIns="0" bIns="0" anchor="ctr"/>
-          <a:lstStyle xmlns:a="http://schemas.openxmlformats.org/drawingml/2006/main"/>
-          <a:p xmlns:a="http://schemas.openxmlformats.org/drawingml/2006/main">
-            <a:pPr algn="l">
-              <a:lnSpc>
-                <a:spcPct val="118000"/>
-              </a:lnSpc>
-              <a:buNone/>
-              <a:defRPr sz="2000" b="1">
-                <a:solidFill>
-                  <a:srgbClr val="A96510"/>
-                </a:solidFill>
-                <a:latin typeface="微软雅黑"/>
-                <a:ea typeface="微软雅黑"/>
-                <a:cs typeface="微软雅黑"/>
-              </a:defRPr>
-            </a:pPr>
-            <a:r>
-              <a:rPr sz="2000" b="1">
-                <a:solidFill>
-                  <a:srgbClr val="A96510"/>
-                </a:solidFill>
-                <a:latin typeface="微软雅黑"/>
-                <a:ea typeface="微软雅黑"/>
-                <a:cs typeface="微软雅黑"/>
-              </a:rPr>
-              <a:t>课后补全</a:t>
-            </a:r>
-          </a:p>
-        </p:txBody>
-      </p:sp>
-      <p:sp>
-        <p:nvSpPr>
-          <p:cNvPr id="12" name="after-l-0">
-            <a:extLst xmlns:a="http://schemas.openxmlformats.org/drawingml/2006/main">
-              <a:ext uri="{FF2B5EF4-FFF2-40B4-BE49-F238E27FC236}">
-                <a16:creationId xmlns:a16="http://schemas.microsoft.com/office/drawing/2014/main" id="{1D728B79-65B7-4267-B5CB-6BC94908387C}"/>
-              </a:ext>
-            </a:extLst>
-          </p:cNvPr>
-          <p:cNvSpPr>
-            <a:spLocks xmlns:a="http://schemas.openxmlformats.org/drawingml/2006/main" noGrp="1"/>
-          </p:cNvSpPr>
-          <p:nvPr/>
-        </p:nvSpPr>
-        <p:spPr>
-          <a:xfrm xmlns:a="http://schemas.openxmlformats.org/drawingml/2006/main">
-            <a:off x="6762750" y="1666875"/>
-            <a:ext cx="4381500" cy="619125"/>
-          </a:xfrm>
-          <a:prstGeom xmlns:a="http://schemas.openxmlformats.org/drawingml/2006/main" prst="rect">
-            <a:avLst/>
-          </a:prstGeom>
-          <a:noFill xmlns:a="http://schemas.openxmlformats.org/drawingml/2006/main"/>
-          <a:ln xmlns:a="http://schemas.openxmlformats.org/drawingml/2006/main" w="0">
-            <a:noFill/>
-          </a:ln>
-        </p:spPr>
-        <p:txBody>
-          <a:bodyPr xmlns:a="http://schemas.openxmlformats.org/drawingml/2006/main" lIns="0" tIns="0" rIns="0" bIns="0" anchor="ctr"/>
-          <a:lstStyle xmlns:a="http://schemas.openxmlformats.org/drawingml/2006/main"/>
-          <a:p xmlns:a="http://schemas.openxmlformats.org/drawingml/2006/main">
-            <a:pPr algn="l">
-              <a:lnSpc>
-                <a:spcPct val="118000"/>
-              </a:lnSpc>
-              <a:buNone/>
-              <a:defRPr sz="2200" b="0">
-                <a:solidFill>
-                  <a:srgbClr val="27333D"/>
-                </a:solidFill>
-                <a:latin typeface="微软雅黑"/>
-                <a:ea typeface="微软雅黑"/>
-                <a:cs typeface="微软雅黑"/>
-              </a:defRPr>
-            </a:pPr>
-            <a:r>
-              <a:rPr sz="2200" b="0">
-                <a:solidFill>
-                  <a:srgbClr val="27333D"/>
-                </a:solidFill>
-                <a:latin typeface="微软雅黑"/>
-                <a:ea typeface="微软雅黑"/>
-                <a:cs typeface="微软雅黑"/>
-              </a:rPr>
-              <a:t>•  七字段规格与 J2</a:t>
-            </a:r>
-          </a:p>
-        </p:txBody>
-      </p:sp>
-      <p:sp>
-        <p:nvSpPr>
-          <p:cNvPr id="13" name="after-l-1">
-            <a:extLst xmlns:a="http://schemas.openxmlformats.org/drawingml/2006/main">
-              <a:ext uri="{FF2B5EF4-FFF2-40B4-BE49-F238E27FC236}">
-                <a16:creationId xmlns:a16="http://schemas.microsoft.com/office/drawing/2014/main" id="{F33C4FF0-EC94-480B-9CF8-4C4E8579ADD9}"/>
-              </a:ext>
-            </a:extLst>
-          </p:cNvPr>
-          <p:cNvSpPr>
-            <a:spLocks xmlns:a="http://schemas.openxmlformats.org/drawingml/2006/main" noGrp="1"/>
-          </p:cNvSpPr>
-          <p:nvPr/>
-        </p:nvSpPr>
-        <p:spPr>
-          <a:xfrm xmlns:a="http://schemas.openxmlformats.org/drawingml/2006/main">
-            <a:off x="6762750" y="2314575"/>
-            <a:ext cx="4381500" cy="619125"/>
-          </a:xfrm>
-          <a:prstGeom xmlns:a="http://schemas.openxmlformats.org/drawingml/2006/main" prst="rect">
-            <a:avLst/>
-          </a:prstGeom>
-          <a:noFill xmlns:a="http://schemas.openxmlformats.org/drawingml/2006/main"/>
-          <a:ln xmlns:a="http://schemas.openxmlformats.org/drawingml/2006/main" w="0">
-            <a:noFill/>
-          </a:ln>
-        </p:spPr>
-        <p:txBody>
-          <a:bodyPr xmlns:a="http://schemas.openxmlformats.org/drawingml/2006/main" lIns="0" tIns="0" rIns="0" bIns="0" anchor="ctr"/>
-          <a:lstStyle xmlns:a="http://schemas.openxmlformats.org/drawingml/2006/main"/>
-          <a:p xmlns:a="http://schemas.openxmlformats.org/drawingml/2006/main">
-            <a:pPr algn="l">
-              <a:lnSpc>
-                <a:spcPct val="118000"/>
-              </a:lnSpc>
-              <a:buNone/>
-              <a:defRPr sz="2200" b="0">
-                <a:solidFill>
-                  <a:srgbClr val="27333D"/>
-                </a:solidFill>
-                <a:latin typeface="微软雅黑"/>
-                <a:ea typeface="微软雅黑"/>
-                <a:cs typeface="微软雅黑"/>
-              </a:defRPr>
-            </a:pPr>
-            <a:r>
-              <a:rPr sz="2200" b="0">
-                <a:solidFill>
-                  <a:srgbClr val="27333D"/>
-                </a:solidFill>
-                <a:latin typeface="微软雅黑"/>
-                <a:ea typeface="微软雅黑"/>
-                <a:cs typeface="微软雅黑"/>
-              </a:rPr>
-              <a:t>•  反馈处理与失败记录</a:t>
-            </a:r>
-          </a:p>
-        </p:txBody>
-      </p:sp>
-      <p:sp>
-        <p:nvSpPr>
-          <p:cNvPr id="14" name="after-l-2">
-            <a:extLst xmlns:a="http://schemas.openxmlformats.org/drawingml/2006/main">
-              <a:ext uri="{FF2B5EF4-FFF2-40B4-BE49-F238E27FC236}">
-                <a16:creationId xmlns:a16="http://schemas.microsoft.com/office/drawing/2014/main" id="{DD38E827-AF72-47FD-BBF3-D218522AD991}"/>
-              </a:ext>
-            </a:extLst>
-          </p:cNvPr>
-          <p:cNvSpPr>
-            <a:spLocks xmlns:a="http://schemas.openxmlformats.org/drawingml/2006/main" noGrp="1"/>
-          </p:cNvSpPr>
-          <p:nvPr/>
-        </p:nvSpPr>
-        <p:spPr>
-          <a:xfrm xmlns:a="http://schemas.openxmlformats.org/drawingml/2006/main">
-            <a:off x="6762750" y="2962275"/>
-            <a:ext cx="4381500" cy="619125"/>
-          </a:xfrm>
-          <a:prstGeom xmlns:a="http://schemas.openxmlformats.org/drawingml/2006/main" prst="rect">
-            <a:avLst/>
-          </a:prstGeom>
-          <a:noFill xmlns:a="http://schemas.openxmlformats.org/drawingml/2006/main"/>
-          <a:ln xmlns:a="http://schemas.openxmlformats.org/drawingml/2006/main" w="0">
-            <a:noFill/>
-          </a:ln>
-        </p:spPr>
-        <p:txBody>
-          <a:bodyPr xmlns:a="http://schemas.openxmlformats.org/drawingml/2006/main" lIns="0" tIns="0" rIns="0" bIns="0" anchor="ctr"/>
-          <a:lstStyle xmlns:a="http://schemas.openxmlformats.org/drawingml/2006/main"/>
-          <a:p xmlns:a="http://schemas.openxmlformats.org/drawingml/2006/main">
-            <a:pPr algn="l">
-              <a:lnSpc>
-                <a:spcPct val="118000"/>
-              </a:lnSpc>
-              <a:buNone/>
-              <a:defRPr sz="2200" b="0">
-                <a:solidFill>
-                  <a:srgbClr val="27333D"/>
-                </a:solidFill>
-                <a:latin typeface="微软雅黑"/>
-                <a:ea typeface="微软雅黑"/>
-                <a:cs typeface="微软雅黑"/>
-              </a:defRPr>
-            </a:pPr>
-            <a:r>
-              <a:rPr sz="2200" b="0">
-                <a:solidFill>
-                  <a:srgbClr val="27333D"/>
-                </a:solidFill>
-                <a:latin typeface="微软雅黑"/>
-                <a:ea typeface="微软雅黑"/>
-                <a:cs typeface="微软雅黑"/>
-              </a:rPr>
-              <a:t>•  九项自查</a:t>
-            </a:r>
-          </a:p>
-        </p:txBody>
-      </p:sp>
-      <p:sp>
-        <p:nvSpPr>
-          <p:cNvPr id="15" name="after-l-3">
-            <a:extLst xmlns:a="http://schemas.openxmlformats.org/drawingml/2006/main">
-              <a:ext uri="{FF2B5EF4-FFF2-40B4-BE49-F238E27FC236}">
-                <a16:creationId xmlns:a16="http://schemas.microsoft.com/office/drawing/2014/main" id="{4832F040-1D52-4FC5-8D4A-12B1A45FD428}"/>
-              </a:ext>
-            </a:extLst>
-          </p:cNvPr>
-          <p:cNvSpPr>
-            <a:spLocks xmlns:a="http://schemas.openxmlformats.org/drawingml/2006/main" noGrp="1"/>
-          </p:cNvSpPr>
-          <p:nvPr/>
-        </p:nvSpPr>
-        <p:spPr>
-          <a:xfrm xmlns:a="http://schemas.openxmlformats.org/drawingml/2006/main">
-            <a:off x="6762750" y="3609975"/>
-            <a:ext cx="4381500" cy="619125"/>
-          </a:xfrm>
-          <a:prstGeom xmlns:a="http://schemas.openxmlformats.org/drawingml/2006/main" prst="rect">
-            <a:avLst/>
-          </a:prstGeom>
-          <a:noFill xmlns:a="http://schemas.openxmlformats.org/drawingml/2006/main"/>
-          <a:ln xmlns:a="http://schemas.openxmlformats.org/drawingml/2006/main" w="0">
-            <a:noFill/>
-          </a:ln>
-        </p:spPr>
-        <p:txBody>
-          <a:bodyPr xmlns:a="http://schemas.openxmlformats.org/drawingml/2006/main" lIns="0" tIns="0" rIns="0" bIns="0" anchor="ctr"/>
-          <a:lstStyle xmlns:a="http://schemas.openxmlformats.org/drawingml/2006/main"/>
-          <a:p xmlns:a="http://schemas.openxmlformats.org/drawingml/2006/main">
-            <a:pPr algn="l">
-              <a:lnSpc>
-                <a:spcPct val="118000"/>
-              </a:lnSpc>
-              <a:buNone/>
-              <a:defRPr sz="2200" b="0">
-                <a:solidFill>
-                  <a:srgbClr val="27333D"/>
-                </a:solidFill>
-                <a:latin typeface="微软雅黑"/>
-                <a:ea typeface="微软雅黑"/>
-                <a:cs typeface="微软雅黑"/>
-              </a:defRPr>
-            </a:pPr>
-            <a:r>
-              <a:rPr sz="2200" b="0">
-                <a:solidFill>
-                  <a:srgbClr val="27333D"/>
-                </a:solidFill>
-                <a:latin typeface="微软雅黑"/>
-                <a:ea typeface="微软雅黑"/>
-                <a:cs typeface="微软雅黑"/>
-              </a:rPr>
-              <a:t>•  迁移到完整模板</a:t>
             </a:r>
           </a:p>
         </p:txBody>
@@ -17599,35 +15414,55 @@
       </p:grpSpPr>
       <p:sp>
         <p:nvSpPr>
-          <p:cNvPr id="4" name="Text Placeholder 3">
-            <a:extLst xmlns:a="http://schemas.openxmlformats.org/drawingml/2006/main">
-              <a:ext uri="{FF2B5EF4-FFF2-40B4-BE49-F238E27FC236}">
-                <a16:creationId xmlns:a16="http://schemas.microsoft.com/office/drawing/2014/main" id="{4D941B40-7A0A-534E-3563-CA11753C8E3F}"/>
-              </a:ext>
-            </a:extLst>
-          </p:cNvPr>
-          <p:cNvSpPr>
-            <a:spLocks xmlns:a="http://schemas.openxmlformats.org/drawingml/2006/main" noGrp="1"/>
-          </p:cNvSpPr>
-          <p:nvPr>
-            <p:ph type="body" idx="14"/>
-          </p:nvPr>
-        </p:nvSpPr>
-        <p:spPr>
-          <a:xfrm xmlns:a="http://schemas.openxmlformats.org/drawingml/2006/main">
-            <a:off x="1028700" y="57150"/>
-            <a:ext cx="10668000" cy="571500"/>
-          </a:xfrm>
-        </p:spPr>
-        <p:txBody>
-          <a:bodyPr xmlns:a="http://schemas.openxmlformats.org/drawingml/2006/main" lIns="0" tIns="0" rIns="0" bIns="0" anchor="ctr"/>
-          <a:lstStyle xmlns:a="http://schemas.openxmlformats.org/drawingml/2006/main"/>
+          <p:cNvPr id="7" name="judgment-title">
+            <a:extLst xmlns:a="http://schemas.openxmlformats.org/drawingml/2006/main">
+              <a:ext uri="{FF2B5EF4-FFF2-40B4-BE49-F238E27FC236}">
+                <a16:creationId xmlns:a16="http://schemas.microsoft.com/office/drawing/2014/main" id="{0184AA40-07CA-43D8-9C16-6865611C4C1C}"/>
+              </a:ext>
+            </a:extLst>
+          </p:cNvPr>
+          <p:cNvSpPr>
+            <a:spLocks xmlns:a="http://schemas.openxmlformats.org/drawingml/2006/main" noGrp="1"/>
+          </p:cNvSpPr>
+          <p:nvPr/>
+        </p:nvSpPr>
+        <p:spPr>
+          <a:xfrm xmlns:a="http://schemas.openxmlformats.org/drawingml/2006/main">
+            <a:off x="1028700" y="76200"/>
+            <a:ext cx="10687050" cy="514350"/>
+          </a:xfrm>
+          <a:prstGeom xmlns:a="http://schemas.openxmlformats.org/drawingml/2006/main" prst="rect">
+            <a:avLst/>
+          </a:prstGeom>
+          <a:noFill xmlns:a="http://schemas.openxmlformats.org/drawingml/2006/main"/>
+          <a:ln xmlns:a="http://schemas.openxmlformats.org/drawingml/2006/main" w="0">
+            <a:noFill/>
+          </a:ln>
+        </p:spPr>
+        <p:txBody>
+          <a:bodyPr xmlns:a="http://schemas.openxmlformats.org/drawingml/2006/main" lIns="0" tIns="0" rIns="0" bIns="0" anchor="t"/>
+          <a:lstStyle xmlns:a="http://schemas.openxmlformats.org/drawingml/2006/main">
+            <a:defPPr algn="l">
+              <a:defRPr sz="3000" b="1">
+                <a:solidFill>
+                  <a:srgbClr val="FFFFFF"/>
+                </a:solidFill>
+                <a:latin typeface="微软雅黑"/>
+                <a:ea typeface="微软雅黑"/>
+                <a:cs typeface="微软雅黑"/>
+              </a:defRPr>
+            </a:defPPr>
+          </a:lstStyle>
           <a:p xmlns:a="http://schemas.openxmlformats.org/drawingml/2006/main">
             <a:pPr algn="l">
-              <a:lnSpc>
-                <a:spcPct val="118000"/>
-              </a:lnSpc>
-              <a:buNone/>
+              <a:defRPr sz="3000" b="1">
+                <a:solidFill>
+                  <a:srgbClr val="FFFFFF"/>
+                </a:solidFill>
+                <a:latin typeface="微软雅黑"/>
+                <a:ea typeface="微软雅黑"/>
+                <a:cs typeface="微软雅黑"/>
+              </a:defRPr>
             </a:pPr>
             <a:r>
               <a:rPr sz="3000" b="1">
@@ -17638,736 +15473,337 @@
                 <a:ea typeface="微软雅黑"/>
                 <a:cs typeface="微软雅黑"/>
               </a:rPr>
-              <a:t>提交当前项目版本，并把规格交给第 10 课</a:t>
-            </a:r>
-            <a:endParaRPr/>
-          </a:p>
-        </p:txBody>
-      </p:sp>
-      <p:sp>
-        <p:nvSpPr>
-          <p:cNvPr id="5" name="Slide Number Placeholder 4">
-            <a:extLst xmlns:a="http://schemas.openxmlformats.org/drawingml/2006/main">
-              <a:ext uri="{FF2B5EF4-FFF2-40B4-BE49-F238E27FC236}">
-                <a16:creationId xmlns:a16="http://schemas.microsoft.com/office/drawing/2014/main" id="{EBA5909F-738E-F60C-BE8C-B3F1D94548E5}"/>
-              </a:ext>
-            </a:extLst>
-          </p:cNvPr>
-          <p:cNvSpPr>
-            <a:spLocks xmlns:a="http://schemas.openxmlformats.org/drawingml/2006/main" noGrp="1"/>
-          </p:cNvSpPr>
-          <p:nvPr>
-            <p:ph type="sldNum" idx="10"/>
-          </p:nvPr>
-        </p:nvSpPr>
-        <p:spPr/>
-        <p:txBody>
-          <a:bodyPr xmlns:a="http://schemas.openxmlformats.org/drawingml/2006/main"/>
-          <a:lstStyle xmlns:a="http://schemas.openxmlformats.org/drawingml/2006/main"/>
-          <a:p xmlns:a="http://schemas.openxmlformats.org/drawingml/2006/main">
-            <a:fld id="{F6DF2BE2-2DFA-1C03-677D-BDC2260D6D92}" type="slidenum">
+              <a:t>保留本课决定，准备下一课输入</a:t>
+            </a:r>
+          </a:p>
+        </p:txBody>
+      </p:sp>
+      <p:sp>
+        <p:nvSpPr>
+          <p:cNvPr id="2" name="judgment-body-0">
+            <a:extLst xmlns:a="http://schemas.openxmlformats.org/drawingml/2006/main">
+              <a:ext uri="{FF2B5EF4-FFF2-40B4-BE49-F238E27FC236}">
+                <a16:creationId xmlns:a16="http://schemas.microsoft.com/office/drawing/2014/main" id="{ABE971C3-BFAA-4FF9-BBB6-13894FF34398}"/>
+              </a:ext>
+            </a:extLst>
+          </p:cNvPr>
+          <p:cNvSpPr>
+            <a:spLocks xmlns:a="http://schemas.openxmlformats.org/drawingml/2006/main" noGrp="1"/>
+          </p:cNvSpPr>
+          <p:nvPr/>
+        </p:nvSpPr>
+        <p:spPr>
+          <a:xfrm xmlns:a="http://schemas.openxmlformats.org/drawingml/2006/main">
+            <a:off x="666750" y="1066800"/>
+            <a:ext cx="10858500" cy="1009650"/>
+          </a:xfrm>
+          <a:prstGeom xmlns:a="http://schemas.openxmlformats.org/drawingml/2006/main" prst="rect">
+            <a:avLst/>
+          </a:prstGeom>
+          <a:noFill xmlns:a="http://schemas.openxmlformats.org/drawingml/2006/main"/>
+          <a:ln xmlns:a="http://schemas.openxmlformats.org/drawingml/2006/main" w="0">
+            <a:noFill/>
+          </a:ln>
+        </p:spPr>
+        <p:txBody>
+          <a:bodyPr xmlns:a="http://schemas.openxmlformats.org/drawingml/2006/main" lIns="0" tIns="0" rIns="0" bIns="0" anchor="t"/>
+          <a:lstStyle xmlns:a="http://schemas.openxmlformats.org/drawingml/2006/main">
+            <a:defPPr algn="l">
+              <a:defRPr sz="2400" b="0">
+                <a:solidFill>
+                  <a:srgbClr val="263746"/>
+                </a:solidFill>
+                <a:latin typeface="微软雅黑"/>
+                <a:ea typeface="微软雅黑"/>
+                <a:cs typeface="微软雅黑"/>
+              </a:defRPr>
+            </a:defPPr>
+          </a:lstStyle>
+          <a:p xmlns:a="http://schemas.openxmlformats.org/drawingml/2006/main">
+            <a:pPr algn="l">
+              <a:defRPr sz="2400" b="0">
+                <a:solidFill>
+                  <a:srgbClr val="263746"/>
+                </a:solidFill>
+                <a:latin typeface="微软雅黑"/>
+                <a:ea typeface="微软雅黑"/>
+                <a:cs typeface="微软雅黑"/>
+              </a:defRPr>
+            </a:pPr>
+            <a:r>
+              <a:rPr sz="2400" b="0">
+                <a:solidFill>
+                  <a:srgbClr val="263746"/>
+                </a:solidFill>
+                <a:latin typeface="微软雅黑"/>
+                <a:ea typeface="微软雅黑"/>
+                <a:cs typeface="微软雅黑"/>
+              </a:rPr>
+              <a:t>L10 在这个工作区完成受限补丁，输入与评价协议保持冻结。</a:t>
+            </a:r>
+          </a:p>
+        </p:txBody>
+      </p:sp>
+      <p:sp>
+        <p:nvSpPr>
+          <p:cNvPr id="3" name="judgment-body-1">
+            <a:extLst xmlns:a="http://schemas.openxmlformats.org/drawingml/2006/main">
+              <a:ext uri="{FF2B5EF4-FFF2-40B4-BE49-F238E27FC236}">
+                <a16:creationId xmlns:a16="http://schemas.microsoft.com/office/drawing/2014/main" id="{95E1182C-E0A3-41AB-AB4B-A0806717CD15}"/>
+              </a:ext>
+            </a:extLst>
+          </p:cNvPr>
+          <p:cNvSpPr>
+            <a:spLocks xmlns:a="http://schemas.openxmlformats.org/drawingml/2006/main" noGrp="1"/>
+          </p:cNvSpPr>
+          <p:nvPr/>
+        </p:nvSpPr>
+        <p:spPr>
+          <a:xfrm xmlns:a="http://schemas.openxmlformats.org/drawingml/2006/main">
+            <a:off x="666750" y="2238375"/>
+            <a:ext cx="10858500" cy="2076450"/>
+          </a:xfrm>
+          <a:prstGeom xmlns:a="http://schemas.openxmlformats.org/drawingml/2006/main" prst="rect">
+            <a:avLst/>
+          </a:prstGeom>
+          <a:noFill xmlns:a="http://schemas.openxmlformats.org/drawingml/2006/main"/>
+          <a:ln xmlns:a="http://schemas.openxmlformats.org/drawingml/2006/main" w="0">
+            <a:noFill/>
+          </a:ln>
+        </p:spPr>
+        <p:txBody>
+          <a:bodyPr xmlns:a="http://schemas.openxmlformats.org/drawingml/2006/main" lIns="0" tIns="0" rIns="0" bIns="0" anchor="t"/>
+          <a:lstStyle xmlns:a="http://schemas.openxmlformats.org/drawingml/2006/main">
+            <a:defPPr algn="l">
+              <a:defRPr sz="2400" b="0">
+                <a:solidFill>
+                  <a:srgbClr val="263746"/>
+                </a:solidFill>
+                <a:latin typeface="微软雅黑"/>
+                <a:ea typeface="微软雅黑"/>
+                <a:cs typeface="微软雅黑"/>
+              </a:defRPr>
+            </a:defPPr>
+          </a:lstStyle>
+          <a:p xmlns:a="http://schemas.openxmlformats.org/drawingml/2006/main">
+            <a:pPr algn="l">
+              <a:defRPr sz="2400" b="0">
+                <a:solidFill>
+                  <a:srgbClr val="263746"/>
+                </a:solidFill>
+                <a:latin typeface="微软雅黑"/>
+                <a:ea typeface="微软雅黑"/>
+                <a:cs typeface="微软雅黑"/>
+              </a:defRPr>
+            </a:pPr>
+            <a:r>
+              <a:rPr sz="2400" b="0">
+                <a:solidFill>
+                  <a:srgbClr val="263746"/>
+                </a:solidFill>
+                <a:latin typeface="微软雅黑"/>
+                <a:ea typeface="微软雅黑"/>
+                <a:cs typeface="微软雅黑"/>
+              </a:rPr>
+              <a:t>回写已有项目：判断门：baseline 运行、七字段规格、复现说明及两条判断</a:t>
+            </a:r>
+          </a:p>
+        </p:txBody>
+      </p:sp>
+      <p:sp>
+        <p:nvSpPr>
+          <p:cNvPr id="4" name="judgment-body-2">
+            <a:extLst xmlns:a="http://schemas.openxmlformats.org/drawingml/2006/main">
+              <a:ext uri="{FF2B5EF4-FFF2-40B4-BE49-F238E27FC236}">
+                <a16:creationId xmlns:a16="http://schemas.microsoft.com/office/drawing/2014/main" id="{D5B24FBD-96F3-4C97-B302-743A39F8E270}"/>
+              </a:ext>
+            </a:extLst>
+          </p:cNvPr>
+          <p:cNvSpPr>
+            <a:spLocks xmlns:a="http://schemas.openxmlformats.org/drawingml/2006/main" noGrp="1"/>
+          </p:cNvSpPr>
+          <p:nvPr/>
+        </p:nvSpPr>
+        <p:spPr>
+          <a:xfrm xmlns:a="http://schemas.openxmlformats.org/drawingml/2006/main">
+            <a:off x="666750" y="4495800"/>
+            <a:ext cx="10858500" cy="1409700"/>
+          </a:xfrm>
+          <a:prstGeom xmlns:a="http://schemas.openxmlformats.org/drawingml/2006/main" prst="rect">
+            <a:avLst/>
+          </a:prstGeom>
+          <a:noFill xmlns:a="http://schemas.openxmlformats.org/drawingml/2006/main"/>
+          <a:ln xmlns:a="http://schemas.openxmlformats.org/drawingml/2006/main" w="0">
+            <a:noFill/>
+          </a:ln>
+        </p:spPr>
+        <p:txBody>
+          <a:bodyPr xmlns:a="http://schemas.openxmlformats.org/drawingml/2006/main" lIns="0" tIns="0" rIns="0" bIns="0" anchor="t"/>
+          <a:lstStyle xmlns:a="http://schemas.openxmlformats.org/drawingml/2006/main">
+            <a:defPPr algn="l">
+              <a:defRPr sz="2200" b="0">
+                <a:solidFill>
+                  <a:srgbClr val="1F4D78"/>
+                </a:solidFill>
+                <a:latin typeface="微软雅黑"/>
+                <a:ea typeface="微软雅黑"/>
+                <a:cs typeface="微软雅黑"/>
+              </a:defRPr>
+            </a:defPPr>
+          </a:lstStyle>
+          <a:p xmlns:a="http://schemas.openxmlformats.org/drawingml/2006/main">
+            <a:pPr algn="l">
+              <a:defRPr sz="2200" b="0">
+                <a:solidFill>
+                  <a:srgbClr val="1F4D78"/>
+                </a:solidFill>
+                <a:latin typeface="微软雅黑"/>
+                <a:ea typeface="微软雅黑"/>
+                <a:cs typeface="微软雅黑"/>
+              </a:defRPr>
+            </a:pPr>
+            <a:r>
+              <a:rPr sz="2200" b="0">
+                <a:solidFill>
+                  <a:srgbClr val="1F4D78"/>
+                </a:solidFill>
+                <a:latin typeface="微软雅黑"/>
+                <a:ea typeface="微软雅黑"/>
+                <a:cs typeface="微软雅黑"/>
+              </a:rPr>
+              <a:t>研究门材料按既定预算整理提交；不叠加新必读。</a:t>
+            </a:r>
+          </a:p>
+        </p:txBody>
+      </p:sp>
+      <p:sp>
+        <p:nvSpPr>
+          <p:cNvPr id="5" name="judgment-source">
+            <a:extLst xmlns:a="http://schemas.openxmlformats.org/drawingml/2006/main">
+              <a:ext uri="{FF2B5EF4-FFF2-40B4-BE49-F238E27FC236}">
+                <a16:creationId xmlns:a16="http://schemas.microsoft.com/office/drawing/2014/main" id="{F0ABE140-4102-424D-A743-494060666E03}"/>
+              </a:ext>
+            </a:extLst>
+          </p:cNvPr>
+          <p:cNvSpPr>
+            <a:spLocks xmlns:a="http://schemas.openxmlformats.org/drawingml/2006/main" noGrp="1"/>
+          </p:cNvSpPr>
+          <p:nvPr/>
+        </p:nvSpPr>
+        <p:spPr>
+          <a:xfrm xmlns:a="http://schemas.openxmlformats.org/drawingml/2006/main">
+            <a:off x="666750" y="6276975"/>
+            <a:ext cx="10572750" cy="209550"/>
+          </a:xfrm>
+          <a:prstGeom xmlns:a="http://schemas.openxmlformats.org/drawingml/2006/main" prst="rect">
+            <a:avLst/>
+          </a:prstGeom>
+          <a:noFill xmlns:a="http://schemas.openxmlformats.org/drawingml/2006/main"/>
+          <a:ln xmlns:a="http://schemas.openxmlformats.org/drawingml/2006/main" w="0">
+            <a:noFill/>
+          </a:ln>
+        </p:spPr>
+        <p:txBody>
+          <a:bodyPr xmlns:a="http://schemas.openxmlformats.org/drawingml/2006/main" lIns="0" tIns="0" rIns="0" bIns="0" anchor="t"/>
+          <a:lstStyle xmlns:a="http://schemas.openxmlformats.org/drawingml/2006/main">
+            <a:defPPr algn="l">
+              <a:defRPr sz="1100" b="0">
+                <a:solidFill>
+                  <a:srgbClr val="667684"/>
+                </a:solidFill>
+                <a:latin typeface="微软雅黑"/>
+                <a:ea typeface="微软雅黑"/>
+                <a:cs typeface="微软雅黑"/>
+              </a:defRPr>
+            </a:defPPr>
+          </a:lstStyle>
+          <a:p xmlns:a="http://schemas.openxmlformats.org/drawingml/2006/main">
+            <a:pPr algn="l">
+              <a:defRPr sz="1100" b="0">
+                <a:solidFill>
+                  <a:srgbClr val="667684"/>
+                </a:solidFill>
+                <a:latin typeface="微软雅黑"/>
+                <a:ea typeface="微软雅黑"/>
+                <a:cs typeface="微软雅黑"/>
+              </a:defRPr>
+            </a:pPr>
+            <a:r>
+              <a:rPr sz="1100" b="0">
+                <a:solidFill>
+                  <a:srgbClr val="667684"/>
+                </a:solidFill>
+                <a:latin typeface="微软雅黑"/>
+                <a:ea typeface="微软雅黑"/>
+                <a:cs typeface="微软雅黑"/>
+              </a:rPr>
+              <a:t>来源：本课判断任务与讲义；构造材料及真实来源按材料包标识</a:t>
+            </a:r>
+          </a:p>
+        </p:txBody>
+      </p:sp>
+      <p:sp>
+        <p:nvSpPr>
+          <p:cNvPr id="6" name="judgment-page">
+            <a:extLst xmlns:a="http://schemas.openxmlformats.org/drawingml/2006/main">
+              <a:ext uri="{FF2B5EF4-FFF2-40B4-BE49-F238E27FC236}">
+                <a16:creationId xmlns:a16="http://schemas.microsoft.com/office/drawing/2014/main" id="{C56925BD-8ED7-47A5-813E-B2CF982C3397}"/>
+              </a:ext>
+            </a:extLst>
+          </p:cNvPr>
+          <p:cNvSpPr>
+            <a:spLocks xmlns:a="http://schemas.openxmlformats.org/drawingml/2006/main" noGrp="1"/>
+          </p:cNvSpPr>
+          <p:nvPr/>
+        </p:nvSpPr>
+        <p:spPr>
+          <a:xfrm xmlns:a="http://schemas.openxmlformats.org/drawingml/2006/main">
+            <a:off x="11715750" y="6562725"/>
+            <a:ext cx="238125" cy="171450"/>
+          </a:xfrm>
+          <a:prstGeom xmlns:a="http://schemas.openxmlformats.org/drawingml/2006/main" prst="rect">
+            <a:avLst/>
+          </a:prstGeom>
+          <a:noFill xmlns:a="http://schemas.openxmlformats.org/drawingml/2006/main"/>
+          <a:ln xmlns:a="http://schemas.openxmlformats.org/drawingml/2006/main" w="0">
+            <a:noFill/>
+          </a:ln>
+        </p:spPr>
+        <p:txBody>
+          <a:bodyPr xmlns:a="http://schemas.openxmlformats.org/drawingml/2006/main" lIns="0" tIns="0" rIns="0" bIns="0" anchor="t"/>
+          <a:lstStyle xmlns:a="http://schemas.openxmlformats.org/drawingml/2006/main">
+            <a:defPPr algn="l">
+              <a:defRPr sz="900" b="0">
+                <a:solidFill>
+                  <a:srgbClr val="A5A5A5"/>
+                </a:solidFill>
+                <a:latin typeface="微软雅黑"/>
+                <a:ea typeface="微软雅黑"/>
+                <a:cs typeface="微软雅黑"/>
+              </a:defRPr>
+            </a:defPPr>
+          </a:lstStyle>
+          <a:p xmlns:a="http://schemas.openxmlformats.org/drawingml/2006/main">
+            <a:pPr algn="l">
+              <a:defRPr sz="900" b="0">
+                <a:solidFill>
+                  <a:srgbClr val="A5A5A5"/>
+                </a:solidFill>
+                <a:latin typeface="微软雅黑"/>
+                <a:ea typeface="微软雅黑"/>
+                <a:cs typeface="微软雅黑"/>
+              </a:defRPr>
+            </a:pPr>
+            <a:r>
+              <a:rPr sz="900" b="0">
+                <a:solidFill>
+                  <a:srgbClr val="A5A5A5"/>
+                </a:solidFill>
+                <a:latin typeface="微软雅黑"/>
+                <a:ea typeface="微软雅黑"/>
+                <a:cs typeface="微软雅黑"/>
+              </a:rPr>
               <a:t>21</a:t>
-            </a:fld>
-            <a:endParaRPr/>
-          </a:p>
-        </p:txBody>
-      </p:sp>
-      <p:sp>
-        <p:nvSpPr>
-          <p:cNvPr id="6" name="submit-0-bg">
-            <a:extLst xmlns:a="http://schemas.openxmlformats.org/drawingml/2006/main">
-              <a:ext uri="{FF2B5EF4-FFF2-40B4-BE49-F238E27FC236}">
-                <a16:creationId xmlns:a16="http://schemas.microsoft.com/office/drawing/2014/main" id="{9E58E9A4-3A77-4CD9-A735-D4A503C4F095}"/>
-              </a:ext>
-            </a:extLst>
-          </p:cNvPr>
-          <p:cNvSpPr>
-            <a:spLocks xmlns:a="http://schemas.openxmlformats.org/drawingml/2006/main" noGrp="1"/>
-          </p:cNvSpPr>
-          <p:nvPr/>
-        </p:nvSpPr>
-        <p:spPr>
-          <a:xfrm xmlns:a="http://schemas.openxmlformats.org/drawingml/2006/main">
-            <a:off x="609600" y="1905000"/>
-            <a:ext cx="2730500" cy="1143000"/>
-          </a:xfrm>
-          <a:prstGeom xmlns:a="http://schemas.openxmlformats.org/drawingml/2006/main" prst="rect">
-            <a:avLst/>
-          </a:prstGeom>
-          <a:solidFill xmlns:a="http://schemas.openxmlformats.org/drawingml/2006/main">
-            <a:srgbClr val="EDF5F0"/>
-          </a:solidFill>
-          <a:ln xmlns:a="http://schemas.openxmlformats.org/drawingml/2006/main" w="0">
-            <a:noFill/>
-          </a:ln>
-        </p:spPr>
-      </p:sp>
-      <p:sp>
-        <p:nvSpPr>
-          <p:cNvPr id="7" name="submit-0">
-            <a:extLst xmlns:a="http://schemas.openxmlformats.org/drawingml/2006/main">
-              <a:ext uri="{FF2B5EF4-FFF2-40B4-BE49-F238E27FC236}">
-                <a16:creationId xmlns:a16="http://schemas.microsoft.com/office/drawing/2014/main" id="{CB04D3EC-24D3-458D-997E-A915EA260B5C}"/>
-              </a:ext>
-            </a:extLst>
-          </p:cNvPr>
-          <p:cNvSpPr>
-            <a:spLocks xmlns:a="http://schemas.openxmlformats.org/drawingml/2006/main" noGrp="1"/>
-          </p:cNvSpPr>
-          <p:nvPr/>
-        </p:nvSpPr>
-        <p:spPr>
-          <a:xfrm xmlns:a="http://schemas.openxmlformats.org/drawingml/2006/main">
-            <a:off x="762000" y="2000250"/>
-            <a:ext cx="2425700" cy="952500"/>
-          </a:xfrm>
-          <a:prstGeom xmlns:a="http://schemas.openxmlformats.org/drawingml/2006/main" prst="rect">
-            <a:avLst/>
-          </a:prstGeom>
-          <a:noFill xmlns:a="http://schemas.openxmlformats.org/drawingml/2006/main"/>
-          <a:ln xmlns:a="http://schemas.openxmlformats.org/drawingml/2006/main" w="0">
-            <a:noFill/>
-          </a:ln>
-        </p:spPr>
-        <p:txBody>
-          <a:bodyPr xmlns:a="http://schemas.openxmlformats.org/drawingml/2006/main" lIns="0" tIns="0" rIns="0" bIns="0" anchor="ctr"/>
-          <a:lstStyle xmlns:a="http://schemas.openxmlformats.org/drawingml/2006/main"/>
-          <a:p xmlns:a="http://schemas.openxmlformats.org/drawingml/2006/main">
-            <a:pPr algn="ctr">
-              <a:lnSpc>
-                <a:spcPct val="118000"/>
-              </a:lnSpc>
-              <a:buNone/>
-              <a:defRPr sz="2200" b="1">
-                <a:solidFill>
-                  <a:srgbClr val="1F4D78"/>
-                </a:solidFill>
-                <a:latin typeface="微软雅黑"/>
-                <a:ea typeface="微软雅黑"/>
-                <a:cs typeface="微软雅黑"/>
-              </a:defRPr>
-            </a:pPr>
-            <a:r>
-              <a:rPr sz="2200" b="1">
-                <a:solidFill>
-                  <a:srgbClr val="1F4D78"/>
-                </a:solidFill>
-                <a:latin typeface="微软雅黑"/>
-                <a:ea typeface="微软雅黑"/>
-                <a:cs typeface="微软雅黑"/>
-              </a:rPr>
-              <a:t>提交当前项目版本</a:t>
-            </a:r>
-          </a:p>
-        </p:txBody>
-      </p:sp>
-      <p:sp>
-        <p:nvSpPr>
-          <p:cNvPr id="8" name="submit-a0">
-            <a:extLst xmlns:a="http://schemas.openxmlformats.org/drawingml/2006/main">
-              <a:ext uri="{FF2B5EF4-FFF2-40B4-BE49-F238E27FC236}">
-                <a16:creationId xmlns:a16="http://schemas.microsoft.com/office/drawing/2014/main" id="{A2D8F1E0-4FF0-46E8-9813-42A77332473F}"/>
-              </a:ext>
-            </a:extLst>
-          </p:cNvPr>
-          <p:cNvSpPr>
-            <a:spLocks xmlns:a="http://schemas.openxmlformats.org/drawingml/2006/main" noGrp="1"/>
-          </p:cNvSpPr>
-          <p:nvPr/>
-        </p:nvSpPr>
-        <p:spPr>
-          <a:xfrm xmlns:a="http://schemas.openxmlformats.org/drawingml/2006/main">
-            <a:off x="3340100" y="2200275"/>
-            <a:ext cx="190500" cy="438150"/>
-          </a:xfrm>
-          <a:prstGeom xmlns:a="http://schemas.openxmlformats.org/drawingml/2006/main" prst="rect">
-            <a:avLst/>
-          </a:prstGeom>
-          <a:noFill xmlns:a="http://schemas.openxmlformats.org/drawingml/2006/main"/>
-          <a:ln xmlns:a="http://schemas.openxmlformats.org/drawingml/2006/main" w="0">
-            <a:noFill/>
-          </a:ln>
-        </p:spPr>
-        <p:txBody>
-          <a:bodyPr xmlns:a="http://schemas.openxmlformats.org/drawingml/2006/main" lIns="0" tIns="0" rIns="0" bIns="0" anchor="ctr"/>
-          <a:lstStyle xmlns:a="http://schemas.openxmlformats.org/drawingml/2006/main"/>
-          <a:p xmlns:a="http://schemas.openxmlformats.org/drawingml/2006/main">
-            <a:pPr algn="ctr">
-              <a:lnSpc>
-                <a:spcPct val="118000"/>
-              </a:lnSpc>
-              <a:buNone/>
-              <a:defRPr sz="2800" b="0">
-                <a:solidFill>
-                  <a:srgbClr val="1F4D78"/>
-                </a:solidFill>
-                <a:latin typeface="微软雅黑"/>
-                <a:ea typeface="微软雅黑"/>
-                <a:cs typeface="微软雅黑"/>
-              </a:defRPr>
-            </a:pPr>
-            <a:r>
-              <a:rPr sz="2800" b="0">
-                <a:solidFill>
-                  <a:srgbClr val="1F4D78"/>
-                </a:solidFill>
-                <a:latin typeface="微软雅黑"/>
-                <a:ea typeface="微软雅黑"/>
-                <a:cs typeface="微软雅黑"/>
-              </a:rPr>
-              <a:t>→</a:t>
-            </a:r>
-          </a:p>
-        </p:txBody>
-      </p:sp>
-      <p:sp>
-        <p:nvSpPr>
-          <p:cNvPr id="9" name="submit-1-bg">
-            <a:extLst xmlns:a="http://schemas.openxmlformats.org/drawingml/2006/main">
-              <a:ext uri="{FF2B5EF4-FFF2-40B4-BE49-F238E27FC236}">
-                <a16:creationId xmlns:a16="http://schemas.microsoft.com/office/drawing/2014/main" id="{A9479330-C184-4058-9B16-CDB146655FBD}"/>
-              </a:ext>
-            </a:extLst>
-          </p:cNvPr>
-          <p:cNvSpPr>
-            <a:spLocks xmlns:a="http://schemas.openxmlformats.org/drawingml/2006/main" noGrp="1"/>
-          </p:cNvSpPr>
-          <p:nvPr/>
-        </p:nvSpPr>
-        <p:spPr>
-          <a:xfrm xmlns:a="http://schemas.openxmlformats.org/drawingml/2006/main">
-            <a:off x="3530600" y="1905000"/>
-            <a:ext cx="2730500" cy="1143000"/>
-          </a:xfrm>
-          <a:prstGeom xmlns:a="http://schemas.openxmlformats.org/drawingml/2006/main" prst="rect">
-            <a:avLst/>
-          </a:prstGeom>
-          <a:solidFill xmlns:a="http://schemas.openxmlformats.org/drawingml/2006/main">
-            <a:srgbClr val="F4F6F8"/>
-          </a:solidFill>
-          <a:ln xmlns:a="http://schemas.openxmlformats.org/drawingml/2006/main" w="0">
-            <a:noFill/>
-          </a:ln>
-        </p:spPr>
-      </p:sp>
-      <p:sp>
-        <p:nvSpPr>
-          <p:cNvPr id="10" name="submit-1">
-            <a:extLst xmlns:a="http://schemas.openxmlformats.org/drawingml/2006/main">
-              <a:ext uri="{FF2B5EF4-FFF2-40B4-BE49-F238E27FC236}">
-                <a16:creationId xmlns:a16="http://schemas.microsoft.com/office/drawing/2014/main" id="{B2B49811-D372-4A47-9AC2-7A68E0DEBC95}"/>
-              </a:ext>
-            </a:extLst>
-          </p:cNvPr>
-          <p:cNvSpPr>
-            <a:spLocks xmlns:a="http://schemas.openxmlformats.org/drawingml/2006/main" noGrp="1"/>
-          </p:cNvSpPr>
-          <p:nvPr/>
-        </p:nvSpPr>
-        <p:spPr>
-          <a:xfrm xmlns:a="http://schemas.openxmlformats.org/drawingml/2006/main">
-            <a:off x="3683000" y="2000250"/>
-            <a:ext cx="2425700" cy="952500"/>
-          </a:xfrm>
-          <a:prstGeom xmlns:a="http://schemas.openxmlformats.org/drawingml/2006/main" prst="rect">
-            <a:avLst/>
-          </a:prstGeom>
-          <a:noFill xmlns:a="http://schemas.openxmlformats.org/drawingml/2006/main"/>
-          <a:ln xmlns:a="http://schemas.openxmlformats.org/drawingml/2006/main" w="0">
-            <a:noFill/>
-          </a:ln>
-        </p:spPr>
-        <p:txBody>
-          <a:bodyPr xmlns:a="http://schemas.openxmlformats.org/drawingml/2006/main" lIns="0" tIns="0" rIns="0" bIns="0" anchor="ctr"/>
-          <a:lstStyle xmlns:a="http://schemas.openxmlformats.org/drawingml/2006/main"/>
-          <a:p xmlns:a="http://schemas.openxmlformats.org/drawingml/2006/main">
-            <a:pPr algn="ctr">
-              <a:lnSpc>
-                <a:spcPct val="118000"/>
-              </a:lnSpc>
-              <a:buNone/>
-              <a:defRPr sz="2200" b="0">
-                <a:solidFill>
-                  <a:srgbClr val="1F4D78"/>
-                </a:solidFill>
-                <a:latin typeface="微软雅黑"/>
-                <a:ea typeface="微软雅黑"/>
-                <a:cs typeface="微软雅黑"/>
-              </a:defRPr>
-            </a:pPr>
-            <a:r>
-              <a:rPr sz="2200" b="0">
-                <a:solidFill>
-                  <a:srgbClr val="1F4D78"/>
-                </a:solidFill>
-                <a:latin typeface="微软雅黑"/>
-                <a:ea typeface="微软雅黑"/>
-                <a:cs typeface="微软雅黑"/>
-              </a:rPr>
-              <a:t>未通过</a:t>
-            </a:r>
-          </a:p>
-          <a:p xmlns:a="http://schemas.openxmlformats.org/drawingml/2006/main">
-            <a:pPr algn="ctr">
-              <a:lnSpc>
-                <a:spcPct val="118000"/>
-              </a:lnSpc>
-              <a:buNone/>
-              <a:defRPr sz="2200" b="0">
-                <a:solidFill>
-                  <a:srgbClr val="1F4D78"/>
-                </a:solidFill>
-                <a:latin typeface="微软雅黑"/>
-                <a:ea typeface="微软雅黑"/>
-                <a:cs typeface="微软雅黑"/>
-              </a:defRPr>
-            </a:pPr>
-            <a:r>
-              <a:rPr sz="2200" b="0">
-                <a:solidFill>
-                  <a:srgbClr val="1F4D78"/>
-                </a:solidFill>
-                <a:latin typeface="微软雅黑"/>
-                <a:ea typeface="微软雅黑"/>
-                <a:cs typeface="微软雅黑"/>
-              </a:rPr>
-              <a:t>回写工件</a:t>
-            </a:r>
-          </a:p>
-        </p:txBody>
-      </p:sp>
-      <p:sp>
-        <p:nvSpPr>
-          <p:cNvPr id="11" name="submit-a1">
-            <a:extLst xmlns:a="http://schemas.openxmlformats.org/drawingml/2006/main">
-              <a:ext uri="{FF2B5EF4-FFF2-40B4-BE49-F238E27FC236}">
-                <a16:creationId xmlns:a16="http://schemas.microsoft.com/office/drawing/2014/main" id="{FC47766B-3C2A-4EE8-8442-A12F0FBBF965}"/>
-              </a:ext>
-            </a:extLst>
-          </p:cNvPr>
-          <p:cNvSpPr>
-            <a:spLocks xmlns:a="http://schemas.openxmlformats.org/drawingml/2006/main" noGrp="1"/>
-          </p:cNvSpPr>
-          <p:nvPr/>
-        </p:nvSpPr>
-        <p:spPr>
-          <a:xfrm xmlns:a="http://schemas.openxmlformats.org/drawingml/2006/main">
-            <a:off x="6261100" y="2200275"/>
-            <a:ext cx="190500" cy="438150"/>
-          </a:xfrm>
-          <a:prstGeom xmlns:a="http://schemas.openxmlformats.org/drawingml/2006/main" prst="rect">
-            <a:avLst/>
-          </a:prstGeom>
-          <a:noFill xmlns:a="http://schemas.openxmlformats.org/drawingml/2006/main"/>
-          <a:ln xmlns:a="http://schemas.openxmlformats.org/drawingml/2006/main" w="0">
-            <a:noFill/>
-          </a:ln>
-        </p:spPr>
-        <p:txBody>
-          <a:bodyPr xmlns:a="http://schemas.openxmlformats.org/drawingml/2006/main" lIns="0" tIns="0" rIns="0" bIns="0" anchor="ctr"/>
-          <a:lstStyle xmlns:a="http://schemas.openxmlformats.org/drawingml/2006/main"/>
-          <a:p xmlns:a="http://schemas.openxmlformats.org/drawingml/2006/main">
-            <a:pPr algn="ctr">
-              <a:lnSpc>
-                <a:spcPct val="118000"/>
-              </a:lnSpc>
-              <a:buNone/>
-              <a:defRPr sz="2800" b="0">
-                <a:solidFill>
-                  <a:srgbClr val="1F4D78"/>
-                </a:solidFill>
-                <a:latin typeface="微软雅黑"/>
-                <a:ea typeface="微软雅黑"/>
-                <a:cs typeface="微软雅黑"/>
-              </a:defRPr>
-            </a:pPr>
-            <a:r>
-              <a:rPr sz="2800" b="0">
-                <a:solidFill>
-                  <a:srgbClr val="1F4D78"/>
-                </a:solidFill>
-                <a:latin typeface="微软雅黑"/>
-                <a:ea typeface="微软雅黑"/>
-                <a:cs typeface="微软雅黑"/>
-              </a:rPr>
-              <a:t>→</a:t>
-            </a:r>
-          </a:p>
-        </p:txBody>
-      </p:sp>
-      <p:sp>
-        <p:nvSpPr>
-          <p:cNvPr id="12" name="submit-2-bg">
-            <a:extLst xmlns:a="http://schemas.openxmlformats.org/drawingml/2006/main">
-              <a:ext uri="{FF2B5EF4-FFF2-40B4-BE49-F238E27FC236}">
-                <a16:creationId xmlns:a16="http://schemas.microsoft.com/office/drawing/2014/main" id="{AF329938-70A6-47B0-AACD-2B4159577B95}"/>
-              </a:ext>
-            </a:extLst>
-          </p:cNvPr>
-          <p:cNvSpPr>
-            <a:spLocks xmlns:a="http://schemas.openxmlformats.org/drawingml/2006/main" noGrp="1"/>
-          </p:cNvSpPr>
-          <p:nvPr/>
-        </p:nvSpPr>
-        <p:spPr>
-          <a:xfrm xmlns:a="http://schemas.openxmlformats.org/drawingml/2006/main">
-            <a:off x="6451600" y="1905000"/>
-            <a:ext cx="2730500" cy="1143000"/>
-          </a:xfrm>
-          <a:prstGeom xmlns:a="http://schemas.openxmlformats.org/drawingml/2006/main" prst="rect">
-            <a:avLst/>
-          </a:prstGeom>
-          <a:solidFill xmlns:a="http://schemas.openxmlformats.org/drawingml/2006/main">
-            <a:srgbClr val="F4F6F8"/>
-          </a:solidFill>
-          <a:ln xmlns:a="http://schemas.openxmlformats.org/drawingml/2006/main" w="0">
-            <a:noFill/>
-          </a:ln>
-        </p:spPr>
-      </p:sp>
-      <p:sp>
-        <p:nvSpPr>
-          <p:cNvPr id="13" name="submit-2">
-            <a:extLst xmlns:a="http://schemas.openxmlformats.org/drawingml/2006/main">
-              <a:ext uri="{FF2B5EF4-FFF2-40B4-BE49-F238E27FC236}">
-                <a16:creationId xmlns:a16="http://schemas.microsoft.com/office/drawing/2014/main" id="{7792657F-7026-4311-A791-80DE806AA8BC}"/>
-              </a:ext>
-            </a:extLst>
-          </p:cNvPr>
-          <p:cNvSpPr>
-            <a:spLocks xmlns:a="http://schemas.openxmlformats.org/drawingml/2006/main" noGrp="1"/>
-          </p:cNvSpPr>
-          <p:nvPr/>
-        </p:nvSpPr>
-        <p:spPr>
-          <a:xfrm xmlns:a="http://schemas.openxmlformats.org/drawingml/2006/main">
-            <a:off x="6604000" y="2000250"/>
-            <a:ext cx="2425700" cy="952500"/>
-          </a:xfrm>
-          <a:prstGeom xmlns:a="http://schemas.openxmlformats.org/drawingml/2006/main" prst="rect">
-            <a:avLst/>
-          </a:prstGeom>
-          <a:noFill xmlns:a="http://schemas.openxmlformats.org/drawingml/2006/main"/>
-          <a:ln xmlns:a="http://schemas.openxmlformats.org/drawingml/2006/main" w="0">
-            <a:noFill/>
-          </a:ln>
-        </p:spPr>
-        <p:txBody>
-          <a:bodyPr xmlns:a="http://schemas.openxmlformats.org/drawingml/2006/main" lIns="0" tIns="0" rIns="0" bIns="0" anchor="ctr"/>
-          <a:lstStyle xmlns:a="http://schemas.openxmlformats.org/drawingml/2006/main"/>
-          <a:p xmlns:a="http://schemas.openxmlformats.org/drawingml/2006/main">
-            <a:pPr algn="ctr">
-              <a:lnSpc>
-                <a:spcPct val="118000"/>
-              </a:lnSpc>
-              <a:buNone/>
-              <a:defRPr sz="2200" b="0">
-                <a:solidFill>
-                  <a:srgbClr val="1F4D78"/>
-                </a:solidFill>
-                <a:latin typeface="微软雅黑"/>
-                <a:ea typeface="微软雅黑"/>
-                <a:cs typeface="微软雅黑"/>
-              </a:defRPr>
-            </a:pPr>
-            <a:r>
-              <a:rPr sz="2200" b="0">
-                <a:solidFill>
-                  <a:srgbClr val="1F4D78"/>
-                </a:solidFill>
-                <a:latin typeface="微软雅黑"/>
-                <a:ea typeface="微软雅黑"/>
-                <a:cs typeface="微软雅黑"/>
-              </a:rPr>
-              <a:t>交给第 10 课</a:t>
-            </a:r>
-          </a:p>
-        </p:txBody>
-      </p:sp>
-      <p:sp>
-        <p:nvSpPr>
-          <p:cNvPr id="14" name="exit-bg">
-            <a:extLst xmlns:a="http://schemas.openxmlformats.org/drawingml/2006/main">
-              <a:ext uri="{FF2B5EF4-FFF2-40B4-BE49-F238E27FC236}">
-                <a16:creationId xmlns:a16="http://schemas.microsoft.com/office/drawing/2014/main" id="{258EC893-8040-4367-8BD1-61430320ECA4}"/>
-              </a:ext>
-            </a:extLst>
-          </p:cNvPr>
-          <p:cNvSpPr>
-            <a:spLocks xmlns:a="http://schemas.openxmlformats.org/drawingml/2006/main" noGrp="1"/>
-          </p:cNvSpPr>
-          <p:nvPr/>
-        </p:nvSpPr>
-        <p:spPr>
-          <a:xfrm xmlns:a="http://schemas.openxmlformats.org/drawingml/2006/main">
-            <a:off x="9239250" y="1666875"/>
-            <a:ext cx="2095500" cy="1809750"/>
-          </a:xfrm>
-          <a:prstGeom xmlns:a="http://schemas.openxmlformats.org/drawingml/2006/main" prst="rect">
-            <a:avLst/>
-          </a:prstGeom>
-          <a:solidFill xmlns:a="http://schemas.openxmlformats.org/drawingml/2006/main">
-            <a:srgbClr val="F4F6F8"/>
-          </a:solidFill>
-          <a:ln xmlns:a="http://schemas.openxmlformats.org/drawingml/2006/main" w="0">
-            <a:noFill/>
-          </a:ln>
-        </p:spPr>
-      </p:sp>
-      <p:sp>
-        <p:nvSpPr>
-          <p:cNvPr id="15" name="exit">
-            <a:extLst xmlns:a="http://schemas.openxmlformats.org/drawingml/2006/main">
-              <a:ext uri="{FF2B5EF4-FFF2-40B4-BE49-F238E27FC236}">
-                <a16:creationId xmlns:a16="http://schemas.microsoft.com/office/drawing/2014/main" id="{3C21300C-2816-4C33-B70D-6D536D1B621E}"/>
-              </a:ext>
-            </a:extLst>
-          </p:cNvPr>
-          <p:cNvSpPr>
-            <a:spLocks xmlns:a="http://schemas.openxmlformats.org/drawingml/2006/main" noGrp="1"/>
-          </p:cNvSpPr>
-          <p:nvPr/>
-        </p:nvSpPr>
-        <p:spPr>
-          <a:xfrm xmlns:a="http://schemas.openxmlformats.org/drawingml/2006/main">
-            <a:off x="9391650" y="1762125"/>
-            <a:ext cx="1790700" cy="1619250"/>
-          </a:xfrm>
-          <a:prstGeom xmlns:a="http://schemas.openxmlformats.org/drawingml/2006/main" prst="rect">
-            <a:avLst/>
-          </a:prstGeom>
-          <a:noFill xmlns:a="http://schemas.openxmlformats.org/drawingml/2006/main"/>
-          <a:ln xmlns:a="http://schemas.openxmlformats.org/drawingml/2006/main" w="0">
-            <a:noFill/>
-          </a:ln>
-        </p:spPr>
-        <p:txBody>
-          <a:bodyPr xmlns:a="http://schemas.openxmlformats.org/drawingml/2006/main" lIns="0" tIns="0" rIns="0" bIns="0" anchor="ctr"/>
-          <a:lstStyle xmlns:a="http://schemas.openxmlformats.org/drawingml/2006/main"/>
-          <a:p xmlns:a="http://schemas.openxmlformats.org/drawingml/2006/main">
-            <a:pPr algn="ctr">
-              <a:lnSpc>
-                <a:spcPct val="118000"/>
-              </a:lnSpc>
-              <a:buNone/>
-              <a:defRPr sz="2200" b="0">
-                <a:solidFill>
-                  <a:srgbClr val="1F4D78"/>
-                </a:solidFill>
-                <a:latin typeface="微软雅黑"/>
-                <a:ea typeface="微软雅黑"/>
-                <a:cs typeface="微软雅黑"/>
-              </a:defRPr>
-            </a:pPr>
-            <a:r>
-              <a:rPr sz="2200" b="0">
-                <a:solidFill>
-                  <a:srgbClr val="1F4D78"/>
-                </a:solidFill>
-                <a:latin typeface="微软雅黑"/>
-                <a:ea typeface="微软雅黑"/>
-                <a:cs typeface="微软雅黑"/>
-              </a:rPr>
-              <a:t>退出卡</a:t>
-            </a:r>
-          </a:p>
-          <a:p xmlns:a="http://schemas.openxmlformats.org/drawingml/2006/main">
-            <a:pPr algn="ctr">
-              <a:lnSpc>
-                <a:spcPct val="118000"/>
-              </a:lnSpc>
-              <a:buNone/>
-              <a:defRPr sz="2200" b="0">
-                <a:solidFill>
-                  <a:srgbClr val="1F4D78"/>
-                </a:solidFill>
-                <a:latin typeface="微软雅黑"/>
-                <a:ea typeface="微软雅黑"/>
-                <a:cs typeface="微软雅黑"/>
-              </a:defRPr>
-            </a:pPr>
-            <a:r>
-              <a:rPr sz="2200" b="0">
-                <a:solidFill>
-                  <a:srgbClr val="1F4D78"/>
-                </a:solidFill>
-                <a:latin typeface="微软雅黑"/>
-                <a:ea typeface="微软雅黑"/>
-                <a:cs typeface="微软雅黑"/>
-              </a:rPr>
-              <a:t>哪项门条件最可能不通过？</a:t>
-            </a:r>
-          </a:p>
-          <a:p xmlns:a="http://schemas.openxmlformats.org/drawingml/2006/main">
-            <a:pPr algn="ctr">
-              <a:lnSpc>
-                <a:spcPct val="118000"/>
-              </a:lnSpc>
-              <a:buNone/>
-              <a:defRPr sz="2200" b="0">
-                <a:solidFill>
-                  <a:srgbClr val="1F4D78"/>
-                </a:solidFill>
-                <a:latin typeface="微软雅黑"/>
-                <a:ea typeface="微软雅黑"/>
-                <a:cs typeface="微软雅黑"/>
-              </a:defRPr>
-            </a:pPr>
-            <a:r>
-              <a:rPr sz="2200" b="0">
-                <a:solidFill>
-                  <a:srgbClr val="1F4D78"/>
-                </a:solidFill>
-                <a:latin typeface="微软雅黑"/>
-                <a:ea typeface="微软雅黑"/>
-                <a:cs typeface="微软雅黑"/>
-              </a:rPr>
-              <a:t>下一个最小动作是什么？</a:t>
-            </a:r>
-          </a:p>
-        </p:txBody>
-      </p:sp>
-      <p:sp>
-        <p:nvSpPr>
-          <p:cNvPr id="16" name="input">
-            <a:extLst xmlns:a="http://schemas.openxmlformats.org/drawingml/2006/main">
-              <a:ext uri="{FF2B5EF4-FFF2-40B4-BE49-F238E27FC236}">
-                <a16:creationId xmlns:a16="http://schemas.microsoft.com/office/drawing/2014/main" id="{639D8B03-0192-4E7D-A162-C045BAAFD605}"/>
-              </a:ext>
-            </a:extLst>
-          </p:cNvPr>
-          <p:cNvSpPr>
-            <a:spLocks xmlns:a="http://schemas.openxmlformats.org/drawingml/2006/main" noGrp="1"/>
-          </p:cNvSpPr>
-          <p:nvPr/>
-        </p:nvSpPr>
-        <p:spPr>
-          <a:xfrm xmlns:a="http://schemas.openxmlformats.org/drawingml/2006/main">
-            <a:off x="1285875" y="4095750"/>
-            <a:ext cx="9620250" cy="819150"/>
-          </a:xfrm>
-          <a:prstGeom xmlns:a="http://schemas.openxmlformats.org/drawingml/2006/main" prst="rect">
-            <a:avLst/>
-          </a:prstGeom>
-          <a:noFill xmlns:a="http://schemas.openxmlformats.org/drawingml/2006/main"/>
-          <a:ln xmlns:a="http://schemas.openxmlformats.org/drawingml/2006/main" w="0">
-            <a:noFill/>
-          </a:ln>
-        </p:spPr>
-        <p:txBody>
-          <a:bodyPr xmlns:a="http://schemas.openxmlformats.org/drawingml/2006/main" lIns="0" tIns="0" rIns="0" bIns="0" anchor="t"/>
-          <a:lstStyle xmlns:a="http://schemas.openxmlformats.org/drawingml/2006/main"/>
-          <a:p xmlns:a="http://schemas.openxmlformats.org/drawingml/2006/main">
-            <a:pPr algn="ctr">
-              <a:lnSpc>
-                <a:spcPct val="118000"/>
-              </a:lnSpc>
-              <a:buNone/>
-              <a:defRPr sz="2200" b="0">
-                <a:solidFill>
-                  <a:srgbClr val="27333D"/>
-                </a:solidFill>
-                <a:latin typeface="微软雅黑"/>
-                <a:ea typeface="微软雅黑"/>
-                <a:cs typeface="微软雅黑"/>
-              </a:defRPr>
-            </a:pPr>
-            <a:r>
-              <a:rPr sz="2200" b="0">
-                <a:solidFill>
-                  <a:srgbClr val="27333D"/>
-                </a:solidFill>
-                <a:latin typeface="微软雅黑"/>
-                <a:ea typeface="微软雅黑"/>
-                <a:cs typeface="微软雅黑"/>
-              </a:rPr>
-              <a:t>第 10 课输入：baseline 判断 + 可重运行记录</a:t>
-            </a:r>
-          </a:p>
-          <a:p xmlns:a="http://schemas.openxmlformats.org/drawingml/2006/main">
-            <a:pPr algn="ctr">
-              <a:lnSpc>
-                <a:spcPct val="118000"/>
-              </a:lnSpc>
-              <a:buNone/>
-              <a:defRPr sz="2200" b="0">
-                <a:solidFill>
-                  <a:srgbClr val="27333D"/>
-                </a:solidFill>
-                <a:latin typeface="微软雅黑"/>
-                <a:ea typeface="微软雅黑"/>
-                <a:cs typeface="微软雅黑"/>
-              </a:defRPr>
-            </a:pPr>
-            <a:r>
-              <a:rPr sz="2200" b="0">
-                <a:solidFill>
-                  <a:srgbClr val="27333D"/>
-                </a:solidFill>
-                <a:latin typeface="微软雅黑"/>
-                <a:ea typeface="微软雅黑"/>
-                <a:cs typeface="微软雅黑"/>
-              </a:rPr>
-              <a:t>标出“拟用 Agent 的步骤”与“必须人工确认的步骤”</a:t>
-            </a:r>
-          </a:p>
-        </p:txBody>
-      </p:sp>
-      <p:sp>
-        <p:nvSpPr>
-          <p:cNvPr id="17" name="submit-note">
-            <a:extLst xmlns:a="http://schemas.openxmlformats.org/drawingml/2006/main">
-              <a:ext uri="{FF2B5EF4-FFF2-40B4-BE49-F238E27FC236}">
-                <a16:creationId xmlns:a16="http://schemas.microsoft.com/office/drawing/2014/main" id="{3D9B3FD9-FFD2-4809-BD54-1F0F018149C3}"/>
-              </a:ext>
-            </a:extLst>
-          </p:cNvPr>
-          <p:cNvSpPr>
-            <a:spLocks xmlns:a="http://schemas.openxmlformats.org/drawingml/2006/main" noGrp="1"/>
-          </p:cNvSpPr>
-          <p:nvPr/>
-        </p:nvSpPr>
-        <p:spPr>
-          <a:xfrm xmlns:a="http://schemas.openxmlformats.org/drawingml/2006/main">
-            <a:off x="4095750" y="5286375"/>
-            <a:ext cx="4000500" cy="323850"/>
-          </a:xfrm>
-          <a:prstGeom xmlns:a="http://schemas.openxmlformats.org/drawingml/2006/main" prst="rect">
-            <a:avLst/>
-          </a:prstGeom>
-          <a:noFill xmlns:a="http://schemas.openxmlformats.org/drawingml/2006/main"/>
-          <a:ln xmlns:a="http://schemas.openxmlformats.org/drawingml/2006/main" w="0">
-            <a:noFill/>
-          </a:ln>
-        </p:spPr>
-        <p:txBody>
-          <a:bodyPr xmlns:a="http://schemas.openxmlformats.org/drawingml/2006/main" lIns="0" tIns="0" rIns="0" bIns="0" anchor="t"/>
-          <a:lstStyle xmlns:a="http://schemas.openxmlformats.org/drawingml/2006/main"/>
-          <a:p xmlns:a="http://schemas.openxmlformats.org/drawingml/2006/main">
-            <a:pPr algn="ctr">
-              <a:lnSpc>
-                <a:spcPct val="118000"/>
-              </a:lnSpc>
-              <a:buNone/>
-              <a:defRPr sz="2000" b="1">
-                <a:solidFill>
-                  <a:srgbClr val="2E7D5B"/>
-                </a:solidFill>
-                <a:latin typeface="微软雅黑"/>
-                <a:ea typeface="微软雅黑"/>
-                <a:cs typeface="微软雅黑"/>
-              </a:defRPr>
-            </a:pPr>
-            <a:r>
-              <a:rPr sz="2000" b="1">
-                <a:solidFill>
-                  <a:srgbClr val="2E7D5B"/>
-                </a:solidFill>
-                <a:latin typeface="微软雅黑"/>
-                <a:ea typeface="微软雅黑"/>
-                <a:cs typeface="微软雅黑"/>
-              </a:rPr>
-              <a:t>课后提交判断门材料包</a:t>
             </a:r>
           </a:p>
         </p:txBody>
@@ -18396,35 +15832,55 @@
       </p:grpSpPr>
       <p:sp>
         <p:nvSpPr>
-          <p:cNvPr id="4" name="Text Placeholder 3">
-            <a:extLst xmlns:a="http://schemas.openxmlformats.org/drawingml/2006/main">
-              <a:ext uri="{FF2B5EF4-FFF2-40B4-BE49-F238E27FC236}">
-                <a16:creationId xmlns:a16="http://schemas.microsoft.com/office/drawing/2014/main" id="{4D941B40-7A0A-534E-3563-CA11753C8E3F}"/>
-              </a:ext>
-            </a:extLst>
-          </p:cNvPr>
-          <p:cNvSpPr>
-            <a:spLocks xmlns:a="http://schemas.openxmlformats.org/drawingml/2006/main" noGrp="1"/>
-          </p:cNvSpPr>
-          <p:nvPr>
-            <p:ph type="body" idx="14"/>
-          </p:nvPr>
-        </p:nvSpPr>
-        <p:spPr>
-          <a:xfrm xmlns:a="http://schemas.openxmlformats.org/drawingml/2006/main">
-            <a:off x="1028700" y="57150"/>
-            <a:ext cx="10668000" cy="571500"/>
-          </a:xfrm>
-        </p:spPr>
-        <p:txBody>
-          <a:bodyPr xmlns:a="http://schemas.openxmlformats.org/drawingml/2006/main" lIns="0" tIns="0" rIns="0" bIns="0" anchor="ctr"/>
-          <a:lstStyle xmlns:a="http://schemas.openxmlformats.org/drawingml/2006/main"/>
+          <p:cNvPr id="7" name="judgment-title">
+            <a:extLst xmlns:a="http://schemas.openxmlformats.org/drawingml/2006/main">
+              <a:ext uri="{FF2B5EF4-FFF2-40B4-BE49-F238E27FC236}">
+                <a16:creationId xmlns:a16="http://schemas.microsoft.com/office/drawing/2014/main" id="{9F463918-E048-42F7-8AB5-F02232E56AE3}"/>
+              </a:ext>
+            </a:extLst>
+          </p:cNvPr>
+          <p:cNvSpPr>
+            <a:spLocks xmlns:a="http://schemas.openxmlformats.org/drawingml/2006/main" noGrp="1"/>
+          </p:cNvSpPr>
+          <p:nvPr/>
+        </p:nvSpPr>
+        <p:spPr>
+          <a:xfrm xmlns:a="http://schemas.openxmlformats.org/drawingml/2006/main">
+            <a:off x="1028700" y="76200"/>
+            <a:ext cx="10687050" cy="514350"/>
+          </a:xfrm>
+          <a:prstGeom xmlns:a="http://schemas.openxmlformats.org/drawingml/2006/main" prst="rect">
+            <a:avLst/>
+          </a:prstGeom>
+          <a:noFill xmlns:a="http://schemas.openxmlformats.org/drawingml/2006/main"/>
+          <a:ln xmlns:a="http://schemas.openxmlformats.org/drawingml/2006/main" w="0">
+            <a:noFill/>
+          </a:ln>
+        </p:spPr>
+        <p:txBody>
+          <a:bodyPr xmlns:a="http://schemas.openxmlformats.org/drawingml/2006/main" lIns="0" tIns="0" rIns="0" bIns="0" anchor="t"/>
+          <a:lstStyle xmlns:a="http://schemas.openxmlformats.org/drawingml/2006/main">
+            <a:defPPr algn="l">
+              <a:defRPr sz="3000" b="1">
+                <a:solidFill>
+                  <a:srgbClr val="FFFFFF"/>
+                </a:solidFill>
+                <a:latin typeface="微软雅黑"/>
+                <a:ea typeface="微软雅黑"/>
+                <a:cs typeface="微软雅黑"/>
+              </a:defRPr>
+            </a:defPPr>
+          </a:lstStyle>
           <a:p xmlns:a="http://schemas.openxmlformats.org/drawingml/2006/main">
             <a:pPr algn="l">
-              <a:lnSpc>
-                <a:spcPct val="118000"/>
-              </a:lnSpc>
-              <a:buNone/>
+              <a:defRPr sz="3000" b="1">
+                <a:solidFill>
+                  <a:srgbClr val="FFFFFF"/>
+                </a:solidFill>
+                <a:latin typeface="微软雅黑"/>
+                <a:ea typeface="微软雅黑"/>
+                <a:cs typeface="微软雅黑"/>
+              </a:defRPr>
             </a:pPr>
             <a:r>
               <a:rPr sz="3000" b="1">
@@ -18435,386 +15891,360 @@
                 <a:ea typeface="微软雅黑"/>
                 <a:cs typeface="微软雅黑"/>
               </a:rPr>
-              <a:t>本课产出是可复现的判断门材料初版</a:t>
-            </a:r>
-            <a:endParaRPr/>
-          </a:p>
-        </p:txBody>
-      </p:sp>
-      <p:sp>
-        <p:nvSpPr>
-          <p:cNvPr id="5" name="Slide Number Placeholder 4">
-            <a:extLst xmlns:a="http://schemas.openxmlformats.org/drawingml/2006/main">
-              <a:ext uri="{FF2B5EF4-FFF2-40B4-BE49-F238E27FC236}">
-                <a16:creationId xmlns:a16="http://schemas.microsoft.com/office/drawing/2014/main" id="{EBA5909F-738E-F60C-BE8C-B3F1D94548E5}"/>
-              </a:ext>
-            </a:extLst>
-          </p:cNvPr>
-          <p:cNvSpPr>
-            <a:spLocks xmlns:a="http://schemas.openxmlformats.org/drawingml/2006/main" noGrp="1"/>
-          </p:cNvSpPr>
-          <p:nvPr>
-            <p:ph type="sldNum" idx="10"/>
-          </p:nvPr>
-        </p:nvSpPr>
-        <p:spPr/>
-        <p:txBody>
-          <a:bodyPr xmlns:a="http://schemas.openxmlformats.org/drawingml/2006/main"/>
-          <a:lstStyle xmlns:a="http://schemas.openxmlformats.org/drawingml/2006/main"/>
-          <a:p xmlns:a="http://schemas.openxmlformats.org/drawingml/2006/main">
-            <a:fld id="{202359C0-8A7A-196E-DD58-8E6569619F09}" type="slidenum">
+              <a:t>这个提升可以比较吗</a:t>
+            </a:r>
+          </a:p>
+        </p:txBody>
+      </p:sp>
+      <p:sp>
+        <p:nvSpPr>
+          <p:cNvPr id="2" name="judgment-body-0">
+            <a:extLst xmlns:a="http://schemas.openxmlformats.org/drawingml/2006/main">
+              <a:ext uri="{FF2B5EF4-FFF2-40B4-BE49-F238E27FC236}">
+                <a16:creationId xmlns:a16="http://schemas.microsoft.com/office/drawing/2014/main" id="{D1FD1C46-DAFE-4E2E-856B-677D77FD4837}"/>
+              </a:ext>
+            </a:extLst>
+          </p:cNvPr>
+          <p:cNvSpPr>
+            <a:spLocks xmlns:a="http://schemas.openxmlformats.org/drawingml/2006/main" noGrp="1"/>
+          </p:cNvSpPr>
+          <p:nvPr/>
+        </p:nvSpPr>
+        <p:spPr>
+          <a:xfrm xmlns:a="http://schemas.openxmlformats.org/drawingml/2006/main">
+            <a:off x="666750" y="1066800"/>
+            <a:ext cx="10858500" cy="1009650"/>
+          </a:xfrm>
+          <a:prstGeom xmlns:a="http://schemas.openxmlformats.org/drawingml/2006/main" prst="rect">
+            <a:avLst/>
+          </a:prstGeom>
+          <a:noFill xmlns:a="http://schemas.openxmlformats.org/drawingml/2006/main"/>
+          <a:ln xmlns:a="http://schemas.openxmlformats.org/drawingml/2006/main" w="0">
+            <a:noFill/>
+          </a:ln>
+        </p:spPr>
+        <p:txBody>
+          <a:bodyPr xmlns:a="http://schemas.openxmlformats.org/drawingml/2006/main" lIns="0" tIns="0" rIns="0" bIns="0" anchor="t"/>
+          <a:lstStyle xmlns:a="http://schemas.openxmlformats.org/drawingml/2006/main">
+            <a:defPPr algn="l">
+              <a:defRPr sz="2400" b="0">
+                <a:solidFill>
+                  <a:srgbClr val="263746"/>
+                </a:solidFill>
+                <a:latin typeface="微软雅黑"/>
+                <a:ea typeface="微软雅黑"/>
+                <a:cs typeface="微软雅黑"/>
+              </a:defRPr>
+            </a:defPPr>
+          </a:lstStyle>
+          <a:p xmlns:a="http://schemas.openxmlformats.org/drawingml/2006/main">
+            <a:pPr algn="l">
+              <a:defRPr sz="2400" b="0">
+                <a:solidFill>
+                  <a:srgbClr val="263746"/>
+                </a:solidFill>
+                <a:latin typeface="微软雅黑"/>
+                <a:ea typeface="微软雅黑"/>
+                <a:cs typeface="微软雅黑"/>
+              </a:defRPr>
+            </a:pPr>
+            <a:r>
+              <a:rPr sz="2400" b="0">
+                <a:solidFill>
+                  <a:srgbClr val="263746"/>
+                </a:solidFill>
+                <a:latin typeface="微软雅黑"/>
+                <a:ea typeface="微软雅黑"/>
+                <a:cs typeface="微软雅黑"/>
+              </a:rPr>
+              <a:t>教学构造结果｜baseline 4/8；changed 1/6</a:t>
+            </a:r>
+          </a:p>
+        </p:txBody>
+      </p:sp>
+      <p:sp>
+        <p:nvSpPr>
+          <p:cNvPr id="3" name="judgment-body-1">
+            <a:extLst xmlns:a="http://schemas.openxmlformats.org/drawingml/2006/main">
+              <a:ext uri="{FF2B5EF4-FFF2-40B4-BE49-F238E27FC236}">
+                <a16:creationId xmlns:a16="http://schemas.microsoft.com/office/drawing/2014/main" id="{7646E760-3F20-420D-B81D-EF251BC40052}"/>
+              </a:ext>
+            </a:extLst>
+          </p:cNvPr>
+          <p:cNvSpPr>
+            <a:spLocks xmlns:a="http://schemas.openxmlformats.org/drawingml/2006/main" noGrp="1"/>
+          </p:cNvSpPr>
+          <p:nvPr/>
+        </p:nvSpPr>
+        <p:spPr>
+          <a:xfrm xmlns:a="http://schemas.openxmlformats.org/drawingml/2006/main">
+            <a:off x="666750" y="2238375"/>
+            <a:ext cx="10858500" cy="2076450"/>
+          </a:xfrm>
+          <a:prstGeom xmlns:a="http://schemas.openxmlformats.org/drawingml/2006/main" prst="rect">
+            <a:avLst/>
+          </a:prstGeom>
+          <a:noFill xmlns:a="http://schemas.openxmlformats.org/drawingml/2006/main"/>
+          <a:ln xmlns:a="http://schemas.openxmlformats.org/drawingml/2006/main" w="0">
+            <a:noFill/>
+          </a:ln>
+        </p:spPr>
+        <p:txBody>
+          <a:bodyPr xmlns:a="http://schemas.openxmlformats.org/drawingml/2006/main" lIns="0" tIns="0" rIns="0" bIns="0" anchor="t"/>
+          <a:lstStyle xmlns:a="http://schemas.openxmlformats.org/drawingml/2006/main">
+            <a:defPPr algn="l">
+              <a:defRPr sz="2400" b="0">
+                <a:solidFill>
+                  <a:srgbClr val="263746"/>
+                </a:solidFill>
+                <a:latin typeface="微软雅黑"/>
+                <a:ea typeface="微软雅黑"/>
+                <a:cs typeface="微软雅黑"/>
+              </a:defRPr>
+            </a:defPPr>
+          </a:lstStyle>
+          <a:p xmlns:a="http://schemas.openxmlformats.org/drawingml/2006/main">
+            <a:pPr algn="l">
+              <a:defRPr sz="2400" b="0">
+                <a:solidFill>
+                  <a:srgbClr val="263746"/>
+                </a:solidFill>
+                <a:latin typeface="微软雅黑"/>
+                <a:ea typeface="微软雅黑"/>
+                <a:cs typeface="微软雅黑"/>
+              </a:defRPr>
+            </a:pPr>
+            <a:r>
+              <a:rPr sz="2400" b="0">
+                <a:solidFill>
+                  <a:srgbClr val="263746"/>
+                </a:solidFill>
+                <a:latin typeface="微软雅黑"/>
+                <a:ea typeface="微软雅黑"/>
+                <a:cs typeface="微软雅黑"/>
+              </a:rPr>
+              <a:t>baseline｜T01–T03；一次；保留图注与失败</a:t>
+            </a:r>
+          </a:p>
+          <a:p xmlns:a="http://schemas.openxmlformats.org/drawingml/2006/main">
+            <a:pPr algn="l">
+              <a:defRPr sz="2400" b="0">
+                <a:solidFill>
+                  <a:srgbClr val="263746"/>
+                </a:solidFill>
+                <a:latin typeface="微软雅黑"/>
+                <a:ea typeface="微软雅黑"/>
+                <a:cs typeface="微软雅黑"/>
+              </a:defRPr>
+            </a:pPr>
+            <a:r>
+              <a:rPr sz="2400" b="0">
+                <a:solidFill>
+                  <a:srgbClr val="263746"/>
+                </a:solidFill>
+                <a:latin typeface="微软雅黑"/>
+                <a:ea typeface="微软雅黑"/>
+                <a:cs typeface="微软雅黑"/>
+              </a:rPr>
+              <a:t>changed｜T01–T02；三次选优；删除图注与失败</a:t>
+            </a:r>
+          </a:p>
+        </p:txBody>
+      </p:sp>
+      <p:sp>
+        <p:nvSpPr>
+          <p:cNvPr id="4" name="judgment-body-2">
+            <a:extLst xmlns:a="http://schemas.openxmlformats.org/drawingml/2006/main">
+              <a:ext uri="{FF2B5EF4-FFF2-40B4-BE49-F238E27FC236}">
+                <a16:creationId xmlns:a16="http://schemas.microsoft.com/office/drawing/2014/main" id="{335AD637-622C-4859-84FB-F8FA5DFE3979}"/>
+              </a:ext>
+            </a:extLst>
+          </p:cNvPr>
+          <p:cNvSpPr>
+            <a:spLocks xmlns:a="http://schemas.openxmlformats.org/drawingml/2006/main" noGrp="1"/>
+          </p:cNvSpPr>
+          <p:nvPr/>
+        </p:nvSpPr>
+        <p:spPr>
+          <a:xfrm xmlns:a="http://schemas.openxmlformats.org/drawingml/2006/main">
+            <a:off x="666750" y="4495800"/>
+            <a:ext cx="10858500" cy="1409700"/>
+          </a:xfrm>
+          <a:prstGeom xmlns:a="http://schemas.openxmlformats.org/drawingml/2006/main" prst="rect">
+            <a:avLst/>
+          </a:prstGeom>
+          <a:noFill xmlns:a="http://schemas.openxmlformats.org/drawingml/2006/main"/>
+          <a:ln xmlns:a="http://schemas.openxmlformats.org/drawingml/2006/main" w="0">
+            <a:noFill/>
+          </a:ln>
+        </p:spPr>
+        <p:txBody>
+          <a:bodyPr xmlns:a="http://schemas.openxmlformats.org/drawingml/2006/main" lIns="0" tIns="0" rIns="0" bIns="0" anchor="t"/>
+          <a:lstStyle xmlns:a="http://schemas.openxmlformats.org/drawingml/2006/main">
+            <a:defPPr algn="l">
+              <a:defRPr sz="2200" b="0">
+                <a:solidFill>
+                  <a:srgbClr val="1F4D78"/>
+                </a:solidFill>
+                <a:latin typeface="微软雅黑"/>
+                <a:ea typeface="微软雅黑"/>
+                <a:cs typeface="微软雅黑"/>
+              </a:defRPr>
+            </a:defPPr>
+          </a:lstStyle>
+          <a:p xmlns:a="http://schemas.openxmlformats.org/drawingml/2006/main">
+            <a:pPr algn="l">
+              <a:defRPr sz="2200" b="0">
+                <a:solidFill>
+                  <a:srgbClr val="1F4D78"/>
+                </a:solidFill>
+                <a:latin typeface="微软雅黑"/>
+                <a:ea typeface="微软雅黑"/>
+                <a:cs typeface="微软雅黑"/>
+              </a:defRPr>
+            </a:pPr>
+            <a:r>
+              <a:rPr sz="2200" b="0">
+                <a:solidFill>
+                  <a:srgbClr val="1F4D78"/>
+                </a:solidFill>
+                <a:latin typeface="微软雅黑"/>
+                <a:ea typeface="微软雅黑"/>
+                <a:cs typeface="微软雅黑"/>
+              </a:rPr>
+              <a:t>先列变化，再选最小公平修复；预算相同是否已经保证评价独立？</a:t>
+            </a:r>
+          </a:p>
+        </p:txBody>
+      </p:sp>
+      <p:sp>
+        <p:nvSpPr>
+          <p:cNvPr id="5" name="judgment-source">
+            <a:extLst xmlns:a="http://schemas.openxmlformats.org/drawingml/2006/main">
+              <a:ext uri="{FF2B5EF4-FFF2-40B4-BE49-F238E27FC236}">
+                <a16:creationId xmlns:a16="http://schemas.microsoft.com/office/drawing/2014/main" id="{E6AE9EB8-3F96-41A7-9E48-09CC48B8EB04}"/>
+              </a:ext>
+            </a:extLst>
+          </p:cNvPr>
+          <p:cNvSpPr>
+            <a:spLocks xmlns:a="http://schemas.openxmlformats.org/drawingml/2006/main" noGrp="1"/>
+          </p:cNvSpPr>
+          <p:nvPr/>
+        </p:nvSpPr>
+        <p:spPr>
+          <a:xfrm xmlns:a="http://schemas.openxmlformats.org/drawingml/2006/main">
+            <a:off x="666750" y="6276975"/>
+            <a:ext cx="10572750" cy="209550"/>
+          </a:xfrm>
+          <a:prstGeom xmlns:a="http://schemas.openxmlformats.org/drawingml/2006/main" prst="rect">
+            <a:avLst/>
+          </a:prstGeom>
+          <a:noFill xmlns:a="http://schemas.openxmlformats.org/drawingml/2006/main"/>
+          <a:ln xmlns:a="http://schemas.openxmlformats.org/drawingml/2006/main" w="0">
+            <a:noFill/>
+          </a:ln>
+        </p:spPr>
+        <p:txBody>
+          <a:bodyPr xmlns:a="http://schemas.openxmlformats.org/drawingml/2006/main" lIns="0" tIns="0" rIns="0" bIns="0" anchor="t"/>
+          <a:lstStyle xmlns:a="http://schemas.openxmlformats.org/drawingml/2006/main">
+            <a:defPPr algn="l">
+              <a:defRPr sz="1100" b="0">
+                <a:solidFill>
+                  <a:srgbClr val="667684"/>
+                </a:solidFill>
+                <a:latin typeface="微软雅黑"/>
+                <a:ea typeface="微软雅黑"/>
+                <a:cs typeface="微软雅黑"/>
+              </a:defRPr>
+            </a:defPPr>
+          </a:lstStyle>
+          <a:p xmlns:a="http://schemas.openxmlformats.org/drawingml/2006/main">
+            <a:pPr algn="l">
+              <a:defRPr sz="1100" b="0">
+                <a:solidFill>
+                  <a:srgbClr val="667684"/>
+                </a:solidFill>
+                <a:latin typeface="微软雅黑"/>
+                <a:ea typeface="微软雅黑"/>
+                <a:cs typeface="微软雅黑"/>
+              </a:defRPr>
+            </a:pPr>
+            <a:r>
+              <a:rPr sz="1100" b="0">
+                <a:solidFill>
+                  <a:srgbClr val="667684"/>
+                </a:solidFill>
+                <a:latin typeface="微软雅黑"/>
+                <a:ea typeface="微软雅黑"/>
+                <a:cs typeface="微软雅黑"/>
+              </a:rPr>
+              <a:t>来源：本课判断任务与讲义；构造材料及真实来源按材料包标识</a:t>
+            </a:r>
+          </a:p>
+        </p:txBody>
+      </p:sp>
+      <p:sp>
+        <p:nvSpPr>
+          <p:cNvPr id="6" name="judgment-page">
+            <a:extLst xmlns:a="http://schemas.openxmlformats.org/drawingml/2006/main">
+              <a:ext uri="{FF2B5EF4-FFF2-40B4-BE49-F238E27FC236}">
+                <a16:creationId xmlns:a16="http://schemas.microsoft.com/office/drawing/2014/main" id="{C084A778-2BF0-4347-8EE6-454BF377A55B}"/>
+              </a:ext>
+            </a:extLst>
+          </p:cNvPr>
+          <p:cNvSpPr>
+            <a:spLocks xmlns:a="http://schemas.openxmlformats.org/drawingml/2006/main" noGrp="1"/>
+          </p:cNvSpPr>
+          <p:nvPr/>
+        </p:nvSpPr>
+        <p:spPr>
+          <a:xfrm xmlns:a="http://schemas.openxmlformats.org/drawingml/2006/main">
+            <a:off x="11715750" y="6562725"/>
+            <a:ext cx="238125" cy="171450"/>
+          </a:xfrm>
+          <a:prstGeom xmlns:a="http://schemas.openxmlformats.org/drawingml/2006/main" prst="rect">
+            <a:avLst/>
+          </a:prstGeom>
+          <a:noFill xmlns:a="http://schemas.openxmlformats.org/drawingml/2006/main"/>
+          <a:ln xmlns:a="http://schemas.openxmlformats.org/drawingml/2006/main" w="0">
+            <a:noFill/>
+          </a:ln>
+        </p:spPr>
+        <p:txBody>
+          <a:bodyPr xmlns:a="http://schemas.openxmlformats.org/drawingml/2006/main" lIns="0" tIns="0" rIns="0" bIns="0" anchor="t"/>
+          <a:lstStyle xmlns:a="http://schemas.openxmlformats.org/drawingml/2006/main">
+            <a:defPPr algn="l">
+              <a:defRPr sz="900" b="0">
+                <a:solidFill>
+                  <a:srgbClr val="A5A5A5"/>
+                </a:solidFill>
+                <a:latin typeface="微软雅黑"/>
+                <a:ea typeface="微软雅黑"/>
+                <a:cs typeface="微软雅黑"/>
+              </a:defRPr>
+            </a:defPPr>
+          </a:lstStyle>
+          <a:p xmlns:a="http://schemas.openxmlformats.org/drawingml/2006/main">
+            <a:pPr algn="l">
+              <a:defRPr sz="900" b="0">
+                <a:solidFill>
+                  <a:srgbClr val="A5A5A5"/>
+                </a:solidFill>
+                <a:latin typeface="微软雅黑"/>
+                <a:ea typeface="微软雅黑"/>
+                <a:cs typeface="微软雅黑"/>
+              </a:defRPr>
+            </a:pPr>
+            <a:r>
+              <a:rPr sz="900" b="0">
+                <a:solidFill>
+                  <a:srgbClr val="A5A5A5"/>
+                </a:solidFill>
+                <a:latin typeface="微软雅黑"/>
+                <a:ea typeface="微软雅黑"/>
+                <a:cs typeface="微软雅黑"/>
+              </a:rPr>
               <a:t>3</a:t>
-            </a:fld>
-            <a:endParaRPr/>
-          </a:p>
-        </p:txBody>
-      </p:sp>
-      <p:sp>
-        <p:nvSpPr>
-          <p:cNvPr id="6" name="artifact1-bg">
-            <a:extLst xmlns:a="http://schemas.openxmlformats.org/drawingml/2006/main">
-              <a:ext uri="{FF2B5EF4-FFF2-40B4-BE49-F238E27FC236}">
-                <a16:creationId xmlns:a16="http://schemas.microsoft.com/office/drawing/2014/main" id="{02AB48E0-2F37-47CF-89A7-87A0DA6FA730}"/>
-              </a:ext>
-            </a:extLst>
-          </p:cNvPr>
-          <p:cNvSpPr>
-            <a:spLocks xmlns:a="http://schemas.openxmlformats.org/drawingml/2006/main" noGrp="1"/>
-          </p:cNvSpPr>
-          <p:nvPr/>
-        </p:nvSpPr>
-        <p:spPr>
-          <a:xfrm xmlns:a="http://schemas.openxmlformats.org/drawingml/2006/main">
-            <a:off x="1095375" y="1714500"/>
-            <a:ext cx="4095750" cy="1428750"/>
-          </a:xfrm>
-          <a:prstGeom xmlns:a="http://schemas.openxmlformats.org/drawingml/2006/main" prst="rect">
-            <a:avLst/>
-          </a:prstGeom>
-          <a:solidFill xmlns:a="http://schemas.openxmlformats.org/drawingml/2006/main">
-            <a:srgbClr val="EDF5F0"/>
-          </a:solidFill>
-          <a:ln xmlns:a="http://schemas.openxmlformats.org/drawingml/2006/main" w="0">
-            <a:noFill/>
-          </a:ln>
-        </p:spPr>
-      </p:sp>
-      <p:sp>
-        <p:nvSpPr>
-          <p:cNvPr id="7" name="artifact1">
-            <a:extLst xmlns:a="http://schemas.openxmlformats.org/drawingml/2006/main">
-              <a:ext uri="{FF2B5EF4-FFF2-40B4-BE49-F238E27FC236}">
-                <a16:creationId xmlns:a16="http://schemas.microsoft.com/office/drawing/2014/main" id="{6B8494F4-F1DF-41FF-9AD5-B00A077298E6}"/>
-              </a:ext>
-            </a:extLst>
-          </p:cNvPr>
-          <p:cNvSpPr>
-            <a:spLocks xmlns:a="http://schemas.openxmlformats.org/drawingml/2006/main" noGrp="1"/>
-          </p:cNvSpPr>
-          <p:nvPr/>
-        </p:nvSpPr>
-        <p:spPr>
-          <a:xfrm xmlns:a="http://schemas.openxmlformats.org/drawingml/2006/main">
-            <a:off x="1247775" y="1809750"/>
-            <a:ext cx="3790950" cy="1238250"/>
-          </a:xfrm>
-          <a:prstGeom xmlns:a="http://schemas.openxmlformats.org/drawingml/2006/main" prst="rect">
-            <a:avLst/>
-          </a:prstGeom>
-          <a:noFill xmlns:a="http://schemas.openxmlformats.org/drawingml/2006/main"/>
-          <a:ln xmlns:a="http://schemas.openxmlformats.org/drawingml/2006/main" w="0">
-            <a:noFill/>
-          </a:ln>
-        </p:spPr>
-        <p:txBody>
-          <a:bodyPr xmlns:a="http://schemas.openxmlformats.org/drawingml/2006/main" lIns="0" tIns="0" rIns="0" bIns="0" anchor="ctr"/>
-          <a:lstStyle xmlns:a="http://schemas.openxmlformats.org/drawingml/2006/main"/>
-          <a:p xmlns:a="http://schemas.openxmlformats.org/drawingml/2006/main">
-            <a:pPr algn="ctr">
-              <a:lnSpc>
-                <a:spcPct val="118000"/>
-              </a:lnSpc>
-              <a:buNone/>
-              <a:defRPr sz="2400" b="0">
-                <a:solidFill>
-                  <a:srgbClr val="1F4D78"/>
-                </a:solidFill>
-                <a:latin typeface="微软雅黑"/>
-                <a:ea typeface="微软雅黑"/>
-                <a:cs typeface="微软雅黑"/>
-              </a:defRPr>
-            </a:pPr>
-            <a:r>
-              <a:rPr sz="2400" b="0">
-                <a:solidFill>
-                  <a:srgbClr val="1F4D78"/>
-                </a:solidFill>
-                <a:latin typeface="微软雅黑"/>
-                <a:ea typeface="微软雅黑"/>
-                <a:cs typeface="微软雅黑"/>
-              </a:rPr>
-              <a:t>课堂最低产出 1</a:t>
-            </a:r>
-          </a:p>
-          <a:p xmlns:a="http://schemas.openxmlformats.org/drawingml/2006/main">
-            <a:pPr algn="ctr">
-              <a:lnSpc>
-                <a:spcPct val="118000"/>
-              </a:lnSpc>
-              <a:buNone/>
-              <a:defRPr sz="2400" b="0">
-                <a:solidFill>
-                  <a:srgbClr val="1F4D78"/>
-                </a:solidFill>
-                <a:latin typeface="微软雅黑"/>
-                <a:ea typeface="微软雅黑"/>
-                <a:cs typeface="微软雅黑"/>
-              </a:defRPr>
-            </a:pPr>
-            <a:r>
-              <a:rPr sz="2400" b="0">
-                <a:solidFill>
-                  <a:srgbClr val="1F4D78"/>
-                </a:solidFill>
-                <a:latin typeface="微软雅黑"/>
-                <a:ea typeface="微软雅黑"/>
-                <a:cs typeface="微软雅黑"/>
-              </a:rPr>
-              <a:t>一条公平 baseline 判断</a:t>
-            </a:r>
-          </a:p>
-        </p:txBody>
-      </p:sp>
-      <p:sp>
-        <p:nvSpPr>
-          <p:cNvPr id="8" name="artifact2-bg">
-            <a:extLst xmlns:a="http://schemas.openxmlformats.org/drawingml/2006/main">
-              <a:ext uri="{FF2B5EF4-FFF2-40B4-BE49-F238E27FC236}">
-                <a16:creationId xmlns:a16="http://schemas.microsoft.com/office/drawing/2014/main" id="{ABF783D5-9926-40A4-9C39-B329778EFBA4}"/>
-              </a:ext>
-            </a:extLst>
-          </p:cNvPr>
-          <p:cNvSpPr>
-            <a:spLocks xmlns:a="http://schemas.openxmlformats.org/drawingml/2006/main" noGrp="1"/>
-          </p:cNvSpPr>
-          <p:nvPr/>
-        </p:nvSpPr>
-        <p:spPr>
-          <a:xfrm xmlns:a="http://schemas.openxmlformats.org/drawingml/2006/main">
-            <a:off x="7000875" y="1714500"/>
-            <a:ext cx="4095750" cy="1428750"/>
-          </a:xfrm>
-          <a:prstGeom xmlns:a="http://schemas.openxmlformats.org/drawingml/2006/main" prst="rect">
-            <a:avLst/>
-          </a:prstGeom>
-          <a:solidFill xmlns:a="http://schemas.openxmlformats.org/drawingml/2006/main">
-            <a:srgbClr val="EDF5F0"/>
-          </a:solidFill>
-          <a:ln xmlns:a="http://schemas.openxmlformats.org/drawingml/2006/main" w="0">
-            <a:noFill/>
-          </a:ln>
-        </p:spPr>
-      </p:sp>
-      <p:sp>
-        <p:nvSpPr>
-          <p:cNvPr id="9" name="artifact2">
-            <a:extLst xmlns:a="http://schemas.openxmlformats.org/drawingml/2006/main">
-              <a:ext uri="{FF2B5EF4-FFF2-40B4-BE49-F238E27FC236}">
-                <a16:creationId xmlns:a16="http://schemas.microsoft.com/office/drawing/2014/main" id="{0304CA44-59F1-4958-8908-281BFAA3F00D}"/>
-              </a:ext>
-            </a:extLst>
-          </p:cNvPr>
-          <p:cNvSpPr>
-            <a:spLocks xmlns:a="http://schemas.openxmlformats.org/drawingml/2006/main" noGrp="1"/>
-          </p:cNvSpPr>
-          <p:nvPr/>
-        </p:nvSpPr>
-        <p:spPr>
-          <a:xfrm xmlns:a="http://schemas.openxmlformats.org/drawingml/2006/main">
-            <a:off x="7153275" y="1809750"/>
-            <a:ext cx="3790950" cy="1238250"/>
-          </a:xfrm>
-          <a:prstGeom xmlns:a="http://schemas.openxmlformats.org/drawingml/2006/main" prst="rect">
-            <a:avLst/>
-          </a:prstGeom>
-          <a:noFill xmlns:a="http://schemas.openxmlformats.org/drawingml/2006/main"/>
-          <a:ln xmlns:a="http://schemas.openxmlformats.org/drawingml/2006/main" w="0">
-            <a:noFill/>
-          </a:ln>
-        </p:spPr>
-        <p:txBody>
-          <a:bodyPr xmlns:a="http://schemas.openxmlformats.org/drawingml/2006/main" lIns="0" tIns="0" rIns="0" bIns="0" anchor="ctr"/>
-          <a:lstStyle xmlns:a="http://schemas.openxmlformats.org/drawingml/2006/main"/>
-          <a:p xmlns:a="http://schemas.openxmlformats.org/drawingml/2006/main">
-            <a:pPr algn="ctr">
-              <a:lnSpc>
-                <a:spcPct val="118000"/>
-              </a:lnSpc>
-              <a:buNone/>
-              <a:defRPr sz="2400" b="0">
-                <a:solidFill>
-                  <a:srgbClr val="1F4D78"/>
-                </a:solidFill>
-                <a:latin typeface="微软雅黑"/>
-                <a:ea typeface="微软雅黑"/>
-                <a:cs typeface="微软雅黑"/>
-              </a:defRPr>
-            </a:pPr>
-            <a:r>
-              <a:rPr sz="2400" b="0">
-                <a:solidFill>
-                  <a:srgbClr val="1F4D78"/>
-                </a:solidFill>
-                <a:latin typeface="微软雅黑"/>
-                <a:ea typeface="微软雅黑"/>
-                <a:cs typeface="微软雅黑"/>
-              </a:rPr>
-              <a:t>课堂最低产出 2</a:t>
-            </a:r>
-          </a:p>
-          <a:p xmlns:a="http://schemas.openxmlformats.org/drawingml/2006/main">
-            <a:pPr algn="ctr">
-              <a:lnSpc>
-                <a:spcPct val="118000"/>
-              </a:lnSpc>
-              <a:buNone/>
-              <a:defRPr sz="2400" b="0">
-                <a:solidFill>
-                  <a:srgbClr val="1F4D78"/>
-                </a:solidFill>
-                <a:latin typeface="微软雅黑"/>
-                <a:ea typeface="微软雅黑"/>
-                <a:cs typeface="微软雅黑"/>
-              </a:defRPr>
-            </a:pPr>
-            <a:r>
-              <a:rPr sz="2400" b="0">
-                <a:solidFill>
-                  <a:srgbClr val="1F4D78"/>
-                </a:solidFill>
-                <a:latin typeface="微软雅黑"/>
-                <a:ea typeface="微软雅黑"/>
-                <a:cs typeface="微软雅黑"/>
-              </a:rPr>
-              <a:t>一条可重运行记录</a:t>
-            </a:r>
-          </a:p>
-        </p:txBody>
-      </p:sp>
-      <p:sp>
-        <p:nvSpPr>
-          <p:cNvPr id="10" name="home">
-            <a:extLst xmlns:a="http://schemas.openxmlformats.org/drawingml/2006/main">
-              <a:ext uri="{FF2B5EF4-FFF2-40B4-BE49-F238E27FC236}">
-                <a16:creationId xmlns:a16="http://schemas.microsoft.com/office/drawing/2014/main" id="{DB1541FF-48C5-4CDE-8FEA-A417FB5246CF}"/>
-              </a:ext>
-            </a:extLst>
-          </p:cNvPr>
-          <p:cNvSpPr>
-            <a:spLocks xmlns:a="http://schemas.openxmlformats.org/drawingml/2006/main" noGrp="1"/>
-          </p:cNvSpPr>
-          <p:nvPr/>
-        </p:nvSpPr>
-        <p:spPr>
-          <a:xfrm xmlns:a="http://schemas.openxmlformats.org/drawingml/2006/main">
-            <a:off x="1428750" y="3857625"/>
-            <a:ext cx="9334500" cy="571500"/>
-          </a:xfrm>
-          <a:prstGeom xmlns:a="http://schemas.openxmlformats.org/drawingml/2006/main" prst="rect">
-            <a:avLst/>
-          </a:prstGeom>
-          <a:noFill xmlns:a="http://schemas.openxmlformats.org/drawingml/2006/main"/>
-          <a:ln xmlns:a="http://schemas.openxmlformats.org/drawingml/2006/main" w="0">
-            <a:noFill/>
-          </a:ln>
-        </p:spPr>
-        <p:txBody>
-          <a:bodyPr xmlns:a="http://schemas.openxmlformats.org/drawingml/2006/main" lIns="0" tIns="0" rIns="0" bIns="0" anchor="t"/>
-          <a:lstStyle xmlns:a="http://schemas.openxmlformats.org/drawingml/2006/main"/>
-          <a:p xmlns:a="http://schemas.openxmlformats.org/drawingml/2006/main">
-            <a:pPr algn="ctr">
-              <a:lnSpc>
-                <a:spcPct val="118000"/>
-              </a:lnSpc>
-              <a:buNone/>
-              <a:defRPr sz="2200" b="0">
-                <a:solidFill>
-                  <a:srgbClr val="27333D"/>
-                </a:solidFill>
-                <a:latin typeface="微软雅黑"/>
-                <a:ea typeface="微软雅黑"/>
-                <a:cs typeface="微软雅黑"/>
-              </a:defRPr>
-            </a:pPr>
-            <a:r>
-              <a:rPr sz="2200" b="0">
-                <a:solidFill>
-                  <a:srgbClr val="27333D"/>
-                </a:solidFill>
-                <a:latin typeface="微软雅黑"/>
-                <a:ea typeface="微软雅黑"/>
-                <a:cs typeface="微软雅黑"/>
-              </a:rPr>
-              <a:t>课后补全七字段规格、J2、反馈处理、失败记录、九项自查与模板迁移</a:t>
-            </a:r>
-          </a:p>
-        </p:txBody>
-      </p:sp>
-      <p:sp>
-        <p:nvSpPr>
-          <p:cNvPr id="11" name="submit">
-            <a:extLst xmlns:a="http://schemas.openxmlformats.org/drawingml/2006/main">
-              <a:ext uri="{FF2B5EF4-FFF2-40B4-BE49-F238E27FC236}">
-                <a16:creationId xmlns:a16="http://schemas.microsoft.com/office/drawing/2014/main" id="{203A3256-9B5A-47BE-9E1C-3381401D8BCE}"/>
-              </a:ext>
-            </a:extLst>
-          </p:cNvPr>
-          <p:cNvSpPr>
-            <a:spLocks xmlns:a="http://schemas.openxmlformats.org/drawingml/2006/main" noGrp="1"/>
-          </p:cNvSpPr>
-          <p:nvPr/>
-        </p:nvSpPr>
-        <p:spPr>
-          <a:xfrm xmlns:a="http://schemas.openxmlformats.org/drawingml/2006/main">
-            <a:off x="3333750" y="4953000"/>
-            <a:ext cx="5524500" cy="361950"/>
-          </a:xfrm>
-          <a:prstGeom xmlns:a="http://schemas.openxmlformats.org/drawingml/2006/main" prst="rect">
-            <a:avLst/>
-          </a:prstGeom>
-          <a:noFill xmlns:a="http://schemas.openxmlformats.org/drawingml/2006/main"/>
-          <a:ln xmlns:a="http://schemas.openxmlformats.org/drawingml/2006/main" w="0">
-            <a:noFill/>
-          </a:ln>
-        </p:spPr>
-        <p:txBody>
-          <a:bodyPr xmlns:a="http://schemas.openxmlformats.org/drawingml/2006/main" lIns="0" tIns="0" rIns="0" bIns="0" anchor="t"/>
-          <a:lstStyle xmlns:a="http://schemas.openxmlformats.org/drawingml/2006/main"/>
-          <a:p xmlns:a="http://schemas.openxmlformats.org/drawingml/2006/main">
-            <a:pPr algn="ctr">
-              <a:lnSpc>
-                <a:spcPct val="118000"/>
-              </a:lnSpc>
-              <a:buNone/>
-              <a:defRPr sz="2000" b="1">
-                <a:solidFill>
-                  <a:srgbClr val="C8161E"/>
-                </a:solidFill>
-                <a:latin typeface="微软雅黑"/>
-                <a:ea typeface="微软雅黑"/>
-                <a:cs typeface="微软雅黑"/>
-              </a:defRPr>
-            </a:pPr>
-            <a:r>
-              <a:rPr sz="2000" b="1">
-                <a:solidFill>
-                  <a:srgbClr val="C8161E"/>
-                </a:solidFill>
-                <a:latin typeface="微软雅黑"/>
-                <a:ea typeface="微软雅黑"/>
-                <a:cs typeface="微软雅黑"/>
-              </a:rPr>
-              <a:t>正式提交条件以 assignments.md 为准</a:t>
             </a:r>
           </a:p>
         </p:txBody>
@@ -20199,7 +17629,7 @@
                 <a:ea typeface="微软雅黑"/>
                 <a:cs typeface="微软雅黑"/>
               </a:rPr>
-              <a:t>运行次数不等</a:t>
+              <a:t>历史反复选优</a:t>
             </a:r>
           </a:p>
         </p:txBody>
@@ -20258,7 +17688,7 @@
                 <a:ea typeface="微软雅黑"/>
                 <a:cs typeface="微软雅黑"/>
               </a:rPr>
-              <a:t>噪声差异</a:t>
+              <a:t>乐观分数</a:t>
             </a:r>
           </a:p>
         </p:txBody>
@@ -20495,7 +17925,7 @@
                 <a:ea typeface="微软雅黑"/>
                 <a:cs typeface="微软雅黑"/>
               </a:rPr>
-              <a:t>不公平比较把左侧差异写成“方法效应”</a:t>
+              <a:t>公平对照＋独立评价，分别检查</a:t>
             </a:r>
           </a:p>
         </p:txBody>
